--- a/code/figure1.pptx
+++ b/code/figure1.pptx
@@ -6,6 +6,7 @@
   </p:sldMasterIdLst>
   <p:sldIdLst>
     <p:sldId id="256" r:id="rId3"/>
+    <p:sldId id="257" r:id="rId4"/>
   </p:sldIdLst>
   <p:sldSz cx="12192000" cy="6858000"/>
   <p:notesSz cx="6858000" cy="9144000"/>
@@ -3081,182 +3082,38 @@
       </p:grpSpPr>
       <p:grpSp>
         <p:nvGrpSpPr>
-          <p:cNvPr id="119" name="组合 118"/>
+          <p:cNvPr id="7" name="组合 6"/>
           <p:cNvGrpSpPr/>
           <p:nvPr/>
         </p:nvGrpSpPr>
         <p:grpSpPr>
-          <a:xfrm>
+          <a:xfrm rot="0">
             <a:off x="1068070" y="939165"/>
-            <a:ext cx="10923905" cy="3736340"/>
-            <a:chOff x="1682" y="1479"/>
-            <a:chExt cx="17203" cy="5884"/>
+            <a:ext cx="2248535" cy="867410"/>
+            <a:chOff x="3277" y="2245"/>
+            <a:chExt cx="3541" cy="1366"/>
           </a:xfrm>
         </p:grpSpPr>
-        <p:grpSp>
-          <p:nvGrpSpPr>
-            <p:cNvPr id="7" name="组合 6"/>
-            <p:cNvGrpSpPr/>
-            <p:nvPr/>
-          </p:nvGrpSpPr>
-          <p:grpSpPr>
-            <a:xfrm>
-              <a:off x="1682" y="1479"/>
-              <a:ext cx="3541" cy="1366"/>
-              <a:chOff x="3277" y="2245"/>
-              <a:chExt cx="3541" cy="1366"/>
-            </a:xfrm>
-          </p:grpSpPr>
-          <p:sp>
-            <p:nvSpPr>
-              <p:cNvPr id="4" name="圆角矩形 3"/>
-              <p:cNvSpPr/>
-              <p:nvPr/>
-            </p:nvSpPr>
-            <p:spPr>
-              <a:xfrm>
-                <a:off x="3277" y="2245"/>
-                <a:ext cx="3541" cy="1366"/>
-              </a:xfrm>
-              <a:prstGeom prst="roundRect">
-                <a:avLst/>
-              </a:prstGeom>
-              <a:solidFill>
-                <a:srgbClr val="E1F5EE"/>
-              </a:solidFill>
-              <a:ln>
-                <a:solidFill>
-                  <a:schemeClr val="accent5"/>
-                </a:solidFill>
-              </a:ln>
-            </p:spPr>
-            <p:style>
-              <a:lnRef idx="2">
-                <a:schemeClr val="accent1">
-                  <a:lumMod val="75000"/>
-                </a:schemeClr>
-              </a:lnRef>
-              <a:fillRef idx="1">
-                <a:schemeClr val="accent1"/>
-              </a:fillRef>
-              <a:effectRef idx="0">
-                <a:srgbClr val="FFFFFF"/>
-              </a:effectRef>
-              <a:fontRef idx="minor">
-                <a:schemeClr val="lt1"/>
-              </a:fontRef>
-            </p:style>
-            <p:txBody>
-              <a:bodyPr rtlCol="0" anchor="ctr"/>
-              <a:p>
-                <a:pPr algn="ctr"/>
-                <a:endParaRPr lang="zh-CN" altLang="en-US"/>
-              </a:p>
-            </p:txBody>
-          </p:sp>
-          <p:sp>
-            <p:nvSpPr>
-              <p:cNvPr id="5" name="文本框 4"/>
-              <p:cNvSpPr txBox="1"/>
-              <p:nvPr/>
-            </p:nvSpPr>
-            <p:spPr>
-              <a:xfrm>
-                <a:off x="3649" y="2441"/>
-                <a:ext cx="2851" cy="628"/>
-              </a:xfrm>
-              <a:prstGeom prst="rect">
-                <a:avLst/>
-              </a:prstGeom>
-              <a:noFill/>
-            </p:spPr>
-            <p:txBody>
-              <a:bodyPr wrap="square" rtlCol="0">
-                <a:spAutoFit/>
-              </a:bodyPr>
-              <a:p>
-                <a:r>
-                  <a:rPr lang="en-US" altLang="zh-CN" sz="2000" b="1">
-                    <a:solidFill>
-                      <a:srgbClr val="437C70"/>
-                    </a:solidFill>
-                    <a:latin typeface="Times New Roman" panose="02020603050405020304" charset="0"/>
-                    <a:cs typeface="Times New Roman" panose="02020603050405020304" charset="0"/>
-                  </a:rPr>
-                  <a:t>AnalysisAgent</a:t>
-                </a:r>
-                <a:endParaRPr lang="en-US" altLang="zh-CN" sz="2000" b="1">
-                  <a:solidFill>
-                    <a:srgbClr val="437C70"/>
-                  </a:solidFill>
-                  <a:latin typeface="Times New Roman" panose="02020603050405020304" charset="0"/>
-                  <a:cs typeface="Times New Roman" panose="02020603050405020304" charset="0"/>
-                </a:endParaRPr>
-              </a:p>
-            </p:txBody>
-          </p:sp>
-          <p:sp>
-            <p:nvSpPr>
-              <p:cNvPr id="6" name="文本框 5"/>
-              <p:cNvSpPr txBox="1"/>
-              <p:nvPr/>
-            </p:nvSpPr>
-            <p:spPr>
-              <a:xfrm>
-                <a:off x="3784" y="2931"/>
-                <a:ext cx="2545" cy="531"/>
-              </a:xfrm>
-              <a:prstGeom prst="rect">
-                <a:avLst/>
-              </a:prstGeom>
-              <a:noFill/>
-            </p:spPr>
-            <p:txBody>
-              <a:bodyPr wrap="square" rtlCol="0">
-                <a:spAutoFit/>
-              </a:bodyPr>
-              <a:p>
-                <a:r>
-                  <a:rPr lang="en-US" altLang="zh-CN" sz="1600">
-                    <a:solidFill>
-                      <a:srgbClr val="2B7F6A"/>
-                    </a:solidFill>
-                    <a:latin typeface="Times New Roman" panose="02020603050405020304" charset="0"/>
-                    <a:cs typeface="Times New Roman" panose="02020603050405020304" charset="0"/>
-                  </a:rPr>
-                  <a:t>Identify risk type</a:t>
-                </a:r>
-                <a:endParaRPr lang="en-US" altLang="zh-CN" sz="1600">
-                  <a:solidFill>
-                    <a:srgbClr val="2B7F6A"/>
-                  </a:solidFill>
-                  <a:latin typeface="Times New Roman" panose="02020603050405020304" charset="0"/>
-                  <a:cs typeface="Times New Roman" panose="02020603050405020304" charset="0"/>
-                </a:endParaRPr>
-              </a:p>
-            </p:txBody>
-          </p:sp>
-        </p:grpSp>
         <p:sp>
           <p:nvSpPr>
-            <p:cNvPr id="9" name="圆角矩形 8"/>
+            <p:cNvPr id="4" name="圆角矩形 3"/>
             <p:cNvSpPr/>
             <p:nvPr/>
           </p:nvSpPr>
           <p:spPr>
             <a:xfrm>
-              <a:off x="6220" y="1479"/>
+              <a:off x="3277" y="2245"/>
               <a:ext cx="3541" cy="1366"/>
             </a:xfrm>
             <a:prstGeom prst="roundRect">
               <a:avLst/>
             </a:prstGeom>
             <a:solidFill>
-              <a:srgbClr val="EEEDFE"/>
+              <a:srgbClr val="E1F5EE"/>
             </a:solidFill>
             <a:ln>
               <a:solidFill>
-                <a:srgbClr val="ADA9DA"/>
+                <a:schemeClr val="accent5"/>
               </a:solidFill>
             </a:ln>
           </p:spPr>
@@ -3286,14 +3143,14 @@
         </p:sp>
         <p:sp>
           <p:nvSpPr>
-            <p:cNvPr id="10" name="文本框 9"/>
+            <p:cNvPr id="5" name="文本框 4"/>
             <p:cNvSpPr txBox="1"/>
             <p:nvPr/>
           </p:nvSpPr>
           <p:spPr>
             <a:xfrm>
-              <a:off x="6691" y="1675"/>
-              <a:ext cx="2600" cy="628"/>
+              <a:off x="3649" y="2441"/>
+              <a:ext cx="2851" cy="628"/>
             </a:xfrm>
             <a:prstGeom prst="rect">
               <a:avLst/>
@@ -3308,16 +3165,16 @@
               <a:r>
                 <a:rPr lang="en-US" altLang="zh-CN" sz="2000" b="1">
                   <a:solidFill>
-                    <a:srgbClr val="4C4493"/>
+                    <a:srgbClr val="437C70"/>
                   </a:solidFill>
                   <a:latin typeface="Times New Roman" panose="02020603050405020304" charset="0"/>
                   <a:cs typeface="Times New Roman" panose="02020603050405020304" charset="0"/>
                 </a:rPr>
-                <a:t>FusionAgent</a:t>
+                <a:t>AnalysisAgent</a:t>
               </a:r>
               <a:endParaRPr lang="en-US" altLang="zh-CN" sz="2000" b="1">
                 <a:solidFill>
-                  <a:srgbClr val="4C4493"/>
+                  <a:srgbClr val="437C70"/>
                 </a:solidFill>
                 <a:latin typeface="Times New Roman" panose="02020603050405020304" charset="0"/>
                 <a:cs typeface="Times New Roman" panose="02020603050405020304" charset="0"/>
@@ -3327,14 +3184,14 @@
         </p:sp>
         <p:sp>
           <p:nvSpPr>
-            <p:cNvPr id="11" name="文本框 10"/>
+            <p:cNvPr id="6" name="文本框 5"/>
             <p:cNvSpPr txBox="1"/>
             <p:nvPr/>
           </p:nvSpPr>
           <p:spPr>
             <a:xfrm>
-              <a:off x="6544" y="2165"/>
-              <a:ext cx="3223" cy="531"/>
+              <a:off x="3784" y="2931"/>
+              <a:ext cx="2545" cy="531"/>
             </a:xfrm>
             <a:prstGeom prst="rect">
               <a:avLst/>
@@ -3349,16 +3206,16 @@
               <a:r>
                 <a:rPr lang="en-US" altLang="zh-CN" sz="1600">
                   <a:solidFill>
-                    <a:srgbClr val="5A51BA"/>
+                    <a:srgbClr val="2B7F6A"/>
                   </a:solidFill>
                   <a:latin typeface="Times New Roman" panose="02020603050405020304" charset="0"/>
                   <a:cs typeface="Times New Roman" panose="02020603050405020304" charset="0"/>
                 </a:rPr>
-                <a:t>Reuse &amp; evolve tools</a:t>
+                <a:t>Identify risk type</a:t>
               </a:r>
               <a:endParaRPr lang="en-US" altLang="zh-CN" sz="1600">
                 <a:solidFill>
-                  <a:srgbClr val="5A51BA"/>
+                  <a:srgbClr val="2B7F6A"/>
                 </a:solidFill>
                 <a:latin typeface="Times New Roman" panose="02020603050405020304" charset="0"/>
                 <a:cs typeface="Times New Roman" panose="02020603050405020304" charset="0"/>
@@ -3366,27 +3223,803 @@
             </a:p>
           </p:txBody>
         </p:sp>
+      </p:grpSp>
+      <p:sp>
+        <p:nvSpPr>
+          <p:cNvPr id="9" name="圆角矩形 8"/>
+          <p:cNvSpPr/>
+          <p:nvPr/>
+        </p:nvSpPr>
+        <p:spPr>
+          <a:xfrm>
+            <a:off x="3949700" y="939165"/>
+            <a:ext cx="2248535" cy="867410"/>
+          </a:xfrm>
+          <a:prstGeom prst="roundRect">
+            <a:avLst/>
+          </a:prstGeom>
+          <a:solidFill>
+            <a:srgbClr val="EEEDFE"/>
+          </a:solidFill>
+          <a:ln>
+            <a:solidFill>
+              <a:srgbClr val="ADA9DA"/>
+            </a:solidFill>
+          </a:ln>
+        </p:spPr>
+        <p:style>
+          <a:lnRef idx="2">
+            <a:schemeClr val="accent1">
+              <a:lumMod val="75000"/>
+            </a:schemeClr>
+          </a:lnRef>
+          <a:fillRef idx="1">
+            <a:schemeClr val="accent1"/>
+          </a:fillRef>
+          <a:effectRef idx="0">
+            <a:srgbClr val="FFFFFF"/>
+          </a:effectRef>
+          <a:fontRef idx="minor">
+            <a:schemeClr val="lt1"/>
+          </a:fontRef>
+        </p:style>
+        <p:txBody>
+          <a:bodyPr rtlCol="0" anchor="ctr"/>
+          <a:p>
+            <a:pPr algn="ctr"/>
+            <a:endParaRPr lang="zh-CN" altLang="en-US"/>
+          </a:p>
+        </p:txBody>
+      </p:sp>
+      <p:sp>
+        <p:nvSpPr>
+          <p:cNvPr id="10" name="文本框 9"/>
+          <p:cNvSpPr txBox="1"/>
+          <p:nvPr/>
+        </p:nvSpPr>
+        <p:spPr>
+          <a:xfrm>
+            <a:off x="4248785" y="1063625"/>
+            <a:ext cx="1651000" cy="398780"/>
+          </a:xfrm>
+          <a:prstGeom prst="rect">
+            <a:avLst/>
+          </a:prstGeom>
+          <a:noFill/>
+        </p:spPr>
+        <p:txBody>
+          <a:bodyPr wrap="square" rtlCol="0">
+            <a:spAutoFit/>
+          </a:bodyPr>
+          <a:p>
+            <a:r>
+              <a:rPr lang="en-US" altLang="zh-CN" sz="2000" b="1">
+                <a:solidFill>
+                  <a:srgbClr val="4C4493"/>
+                </a:solidFill>
+                <a:latin typeface="Times New Roman" panose="02020603050405020304" charset="0"/>
+                <a:cs typeface="Times New Roman" panose="02020603050405020304" charset="0"/>
+              </a:rPr>
+              <a:t>FusionAgent</a:t>
+            </a:r>
+            <a:endParaRPr lang="en-US" altLang="zh-CN" sz="2000" b="1">
+              <a:solidFill>
+                <a:srgbClr val="4C4493"/>
+              </a:solidFill>
+              <a:latin typeface="Times New Roman" panose="02020603050405020304" charset="0"/>
+              <a:cs typeface="Times New Roman" panose="02020603050405020304" charset="0"/>
+            </a:endParaRPr>
+          </a:p>
+        </p:txBody>
+      </p:sp>
+      <p:sp>
+        <p:nvSpPr>
+          <p:cNvPr id="11" name="文本框 10"/>
+          <p:cNvSpPr txBox="1"/>
+          <p:nvPr/>
+        </p:nvSpPr>
+        <p:spPr>
+          <a:xfrm>
+            <a:off x="4155440" y="1374775"/>
+            <a:ext cx="2046605" cy="337185"/>
+          </a:xfrm>
+          <a:prstGeom prst="rect">
+            <a:avLst/>
+          </a:prstGeom>
+          <a:noFill/>
+        </p:spPr>
+        <p:txBody>
+          <a:bodyPr wrap="square" rtlCol="0">
+            <a:spAutoFit/>
+          </a:bodyPr>
+          <a:p>
+            <a:r>
+              <a:rPr lang="en-US" altLang="zh-CN" sz="1600">
+                <a:solidFill>
+                  <a:srgbClr val="5A51BA"/>
+                </a:solidFill>
+                <a:latin typeface="Times New Roman" panose="02020603050405020304" charset="0"/>
+                <a:cs typeface="Times New Roman" panose="02020603050405020304" charset="0"/>
+              </a:rPr>
+              <a:t>Reuse &amp; evolve tools</a:t>
+            </a:r>
+            <a:endParaRPr lang="en-US" altLang="zh-CN" sz="1600">
+              <a:solidFill>
+                <a:srgbClr val="5A51BA"/>
+              </a:solidFill>
+              <a:latin typeface="Times New Roman" panose="02020603050405020304" charset="0"/>
+              <a:cs typeface="Times New Roman" panose="02020603050405020304" charset="0"/>
+            </a:endParaRPr>
+          </a:p>
+        </p:txBody>
+      </p:sp>
+      <p:sp>
+        <p:nvSpPr>
+          <p:cNvPr id="13" name="圆角矩形 12"/>
+          <p:cNvSpPr/>
+          <p:nvPr/>
+        </p:nvSpPr>
+        <p:spPr>
+          <a:xfrm>
+            <a:off x="6836410" y="939165"/>
+            <a:ext cx="2248535" cy="867410"/>
+          </a:xfrm>
+          <a:prstGeom prst="roundRect">
+            <a:avLst/>
+          </a:prstGeom>
+          <a:solidFill>
+            <a:srgbClr val="FAEEDA"/>
+          </a:solidFill>
+          <a:ln>
+            <a:solidFill>
+              <a:srgbClr val="C4A67F"/>
+            </a:solidFill>
+          </a:ln>
+        </p:spPr>
+        <p:style>
+          <a:lnRef idx="2">
+            <a:schemeClr val="accent1">
+              <a:lumMod val="75000"/>
+            </a:schemeClr>
+          </a:lnRef>
+          <a:fillRef idx="1">
+            <a:schemeClr val="accent1"/>
+          </a:fillRef>
+          <a:effectRef idx="0">
+            <a:srgbClr val="FFFFFF"/>
+          </a:effectRef>
+          <a:fontRef idx="minor">
+            <a:schemeClr val="lt1"/>
+          </a:fontRef>
+        </p:style>
+        <p:txBody>
+          <a:bodyPr rtlCol="0" anchor="ctr"/>
+          <a:p>
+            <a:pPr algn="ctr"/>
+            <a:endParaRPr lang="zh-CN" altLang="en-US"/>
+          </a:p>
+        </p:txBody>
+      </p:sp>
+      <p:sp>
+        <p:nvSpPr>
+          <p:cNvPr id="14" name="文本框 13"/>
+          <p:cNvSpPr txBox="1"/>
+          <p:nvPr/>
+        </p:nvSpPr>
+        <p:spPr>
+          <a:xfrm>
+            <a:off x="7042785" y="1063625"/>
+            <a:ext cx="1884680" cy="398780"/>
+          </a:xfrm>
+          <a:prstGeom prst="rect">
+            <a:avLst/>
+          </a:prstGeom>
+          <a:noFill/>
+        </p:spPr>
+        <p:txBody>
+          <a:bodyPr wrap="square" rtlCol="0">
+            <a:spAutoFit/>
+          </a:bodyPr>
+          <a:p>
+            <a:r>
+              <a:rPr lang="en-US" altLang="zh-CN" sz="2000" b="1">
+                <a:solidFill>
+                  <a:srgbClr val="7C562A"/>
+                </a:solidFill>
+                <a:latin typeface="Times New Roman" panose="02020603050405020304" charset="0"/>
+                <a:cs typeface="Times New Roman" panose="02020603050405020304" charset="0"/>
+              </a:rPr>
+              <a:t>ExecutorAgent</a:t>
+            </a:r>
+            <a:endParaRPr lang="en-US" altLang="zh-CN" sz="2000" b="1">
+              <a:solidFill>
+                <a:srgbClr val="7C562A"/>
+              </a:solidFill>
+              <a:latin typeface="Times New Roman" panose="02020603050405020304" charset="0"/>
+              <a:cs typeface="Times New Roman" panose="02020603050405020304" charset="0"/>
+            </a:endParaRPr>
+          </a:p>
+        </p:txBody>
+      </p:sp>
+      <p:sp>
+        <p:nvSpPr>
+          <p:cNvPr id="15" name="文本框 14"/>
+          <p:cNvSpPr txBox="1"/>
+          <p:nvPr/>
+        </p:nvSpPr>
+        <p:spPr>
+          <a:xfrm>
+            <a:off x="7018020" y="1374775"/>
+            <a:ext cx="1971040" cy="337185"/>
+          </a:xfrm>
+          <a:prstGeom prst="rect">
+            <a:avLst/>
+          </a:prstGeom>
+          <a:noFill/>
+        </p:spPr>
+        <p:txBody>
+          <a:bodyPr wrap="square" rtlCol="0">
+            <a:spAutoFit/>
+          </a:bodyPr>
+          <a:p>
+            <a:r>
+              <a:rPr lang="en-US" altLang="zh-CN" sz="1600">
+                <a:solidFill>
+                  <a:srgbClr val="996B30"/>
+                </a:solidFill>
+                <a:latin typeface="Times New Roman" panose="02020603050405020304" charset="0"/>
+                <a:cs typeface="Times New Roman" panose="02020603050405020304" charset="0"/>
+              </a:rPr>
+              <a:t>Sandboxed execution</a:t>
+            </a:r>
+            <a:endParaRPr lang="en-US" altLang="zh-CN" sz="1600">
+              <a:solidFill>
+                <a:srgbClr val="996B30"/>
+              </a:solidFill>
+              <a:latin typeface="Times New Roman" panose="02020603050405020304" charset="0"/>
+              <a:cs typeface="Times New Roman" panose="02020603050405020304" charset="0"/>
+            </a:endParaRPr>
+          </a:p>
+        </p:txBody>
+      </p:sp>
+      <p:sp>
+        <p:nvSpPr>
+          <p:cNvPr id="17" name="圆角矩形 16"/>
+          <p:cNvSpPr/>
+          <p:nvPr/>
+        </p:nvSpPr>
+        <p:spPr>
+          <a:xfrm>
+            <a:off x="9744075" y="939165"/>
+            <a:ext cx="2248535" cy="867410"/>
+          </a:xfrm>
+          <a:prstGeom prst="roundRect">
+            <a:avLst/>
+          </a:prstGeom>
+          <a:solidFill>
+            <a:srgbClr val="FAECE7"/>
+          </a:solidFill>
+          <a:ln>
+            <a:solidFill>
+              <a:srgbClr val="C38D7A"/>
+            </a:solidFill>
+          </a:ln>
+        </p:spPr>
+        <p:style>
+          <a:lnRef idx="2">
+            <a:schemeClr val="accent1">
+              <a:lumMod val="75000"/>
+            </a:schemeClr>
+          </a:lnRef>
+          <a:fillRef idx="1">
+            <a:schemeClr val="accent1"/>
+          </a:fillRef>
+          <a:effectRef idx="0">
+            <a:srgbClr val="FFFFFF"/>
+          </a:effectRef>
+          <a:fontRef idx="minor">
+            <a:schemeClr val="lt1"/>
+          </a:fontRef>
+        </p:style>
+        <p:txBody>
+          <a:bodyPr rtlCol="0" anchor="ctr"/>
+          <a:p>
+            <a:pPr algn="ctr"/>
+            <a:endParaRPr lang="zh-CN" altLang="en-US"/>
+          </a:p>
+        </p:txBody>
+      </p:sp>
+      <p:sp>
+        <p:nvSpPr>
+          <p:cNvPr id="18" name="文本框 17"/>
+          <p:cNvSpPr txBox="1"/>
+          <p:nvPr/>
+        </p:nvSpPr>
+        <p:spPr>
+          <a:xfrm>
+            <a:off x="9999345" y="1063625"/>
+            <a:ext cx="1810385" cy="398780"/>
+          </a:xfrm>
+          <a:prstGeom prst="rect">
+            <a:avLst/>
+          </a:prstGeom>
+          <a:noFill/>
+        </p:spPr>
+        <p:txBody>
+          <a:bodyPr wrap="square" rtlCol="0">
+            <a:spAutoFit/>
+          </a:bodyPr>
+          <a:p>
+            <a:r>
+              <a:rPr lang="en-US" altLang="zh-CN" sz="2000" b="1">
+                <a:solidFill>
+                  <a:srgbClr val="8B4F3B"/>
+                </a:solidFill>
+                <a:latin typeface="Times New Roman" panose="02020603050405020304" charset="0"/>
+                <a:cs typeface="Times New Roman" panose="02020603050405020304" charset="0"/>
+              </a:rPr>
+              <a:t>AuditorAgent</a:t>
+            </a:r>
+            <a:endParaRPr lang="en-US" altLang="zh-CN" sz="2000" b="1">
+              <a:solidFill>
+                <a:srgbClr val="8B4F3B"/>
+              </a:solidFill>
+              <a:latin typeface="Times New Roman" panose="02020603050405020304" charset="0"/>
+              <a:cs typeface="Times New Roman" panose="02020603050405020304" charset="0"/>
+            </a:endParaRPr>
+          </a:p>
+        </p:txBody>
+      </p:sp>
+      <p:sp>
+        <p:nvSpPr>
+          <p:cNvPr id="19" name="文本框 18"/>
+          <p:cNvSpPr txBox="1"/>
+          <p:nvPr/>
+        </p:nvSpPr>
+        <p:spPr>
+          <a:xfrm>
+            <a:off x="10110470" y="1374775"/>
+            <a:ext cx="1610360" cy="337185"/>
+          </a:xfrm>
+          <a:prstGeom prst="rect">
+            <a:avLst/>
+          </a:prstGeom>
+          <a:noFill/>
+        </p:spPr>
+        <p:txBody>
+          <a:bodyPr wrap="square" rtlCol="0">
+            <a:spAutoFit/>
+          </a:bodyPr>
+          <a:p>
+            <a:r>
+              <a:rPr lang="en-US" altLang="zh-CN" sz="1600">
+                <a:solidFill>
+                  <a:srgbClr val="A8583E"/>
+                </a:solidFill>
+                <a:latin typeface="Times New Roman" panose="02020603050405020304" charset="0"/>
+                <a:cs typeface="Times New Roman" panose="02020603050405020304" charset="0"/>
+              </a:rPr>
+              <a:t>Audit &amp; validate</a:t>
+            </a:r>
+            <a:endParaRPr lang="en-US" altLang="zh-CN" sz="1600">
+              <a:solidFill>
+                <a:srgbClr val="A8583E"/>
+              </a:solidFill>
+              <a:latin typeface="Times New Roman" panose="02020603050405020304" charset="0"/>
+              <a:cs typeface="Times New Roman" panose="02020603050405020304" charset="0"/>
+            </a:endParaRPr>
+          </a:p>
+        </p:txBody>
+      </p:sp>
+      <p:cxnSp>
+        <p:nvCxnSpPr>
+          <p:cNvPr id="20" name="直接箭头连接符 19"/>
+          <p:cNvCxnSpPr>
+            <a:stCxn id="4" idx="3"/>
+            <a:endCxn id="9" idx="1"/>
+          </p:cNvCxnSpPr>
+          <p:nvPr/>
+        </p:nvCxnSpPr>
+        <p:spPr>
+          <a:xfrm>
+            <a:off x="3316605" y="1372870"/>
+            <a:ext cx="633095" cy="0"/>
+          </a:xfrm>
+          <a:prstGeom prst="straightConnector1">
+            <a:avLst/>
+          </a:prstGeom>
+          <a:ln w="22225">
+            <a:tailEnd type="stealth" w="lg" len="lg"/>
+          </a:ln>
+        </p:spPr>
+        <p:style>
+          <a:lnRef idx="2">
+            <a:schemeClr val="accent1"/>
+          </a:lnRef>
+          <a:fillRef idx="0">
+            <a:srgbClr val="FFFFFF"/>
+          </a:fillRef>
+          <a:effectRef idx="0">
+            <a:srgbClr val="FFFFFF"/>
+          </a:effectRef>
+          <a:fontRef idx="minor">
+            <a:schemeClr val="tx1"/>
+          </a:fontRef>
+        </p:style>
+      </p:cxnSp>
+      <p:cxnSp>
+        <p:nvCxnSpPr>
+          <p:cNvPr id="21" name="直接箭头连接符 20"/>
+          <p:cNvCxnSpPr>
+            <a:endCxn id="13" idx="1"/>
+          </p:cNvCxnSpPr>
+          <p:nvPr/>
+        </p:nvCxnSpPr>
+        <p:spPr>
+          <a:xfrm>
+            <a:off x="6198870" y="1372870"/>
+            <a:ext cx="637540" cy="0"/>
+          </a:xfrm>
+          <a:prstGeom prst="straightConnector1">
+            <a:avLst/>
+          </a:prstGeom>
+          <a:ln w="22225">
+            <a:tailEnd type="stealth" w="lg" len="lg"/>
+          </a:ln>
+        </p:spPr>
+        <p:style>
+          <a:lnRef idx="2">
+            <a:schemeClr val="accent1"/>
+          </a:lnRef>
+          <a:fillRef idx="0">
+            <a:srgbClr val="FFFFFF"/>
+          </a:fillRef>
+          <a:effectRef idx="0">
+            <a:srgbClr val="FFFFFF"/>
+          </a:effectRef>
+          <a:fontRef idx="minor">
+            <a:schemeClr val="tx1"/>
+          </a:fontRef>
+        </p:style>
+      </p:cxnSp>
+      <p:cxnSp>
+        <p:nvCxnSpPr>
+          <p:cNvPr id="22" name="直接箭头连接符 21"/>
+          <p:cNvCxnSpPr>
+            <a:endCxn id="17" idx="1"/>
+          </p:cNvCxnSpPr>
+          <p:nvPr/>
+        </p:nvCxnSpPr>
+        <p:spPr>
+          <a:xfrm flipV="1">
+            <a:off x="9094470" y="1372870"/>
+            <a:ext cx="649605" cy="1905"/>
+          </a:xfrm>
+          <a:prstGeom prst="straightConnector1">
+            <a:avLst/>
+          </a:prstGeom>
+          <a:ln w="22225">
+            <a:tailEnd type="stealth" w="lg" len="lg"/>
+          </a:ln>
+        </p:spPr>
+        <p:style>
+          <a:lnRef idx="2">
+            <a:schemeClr val="accent1"/>
+          </a:lnRef>
+          <a:fillRef idx="0">
+            <a:srgbClr val="FFFFFF"/>
+          </a:fillRef>
+          <a:effectRef idx="0">
+            <a:srgbClr val="FFFFFF"/>
+          </a:effectRef>
+          <a:fontRef idx="minor">
+            <a:schemeClr val="tx1"/>
+          </a:fontRef>
+        </p:style>
+      </p:cxnSp>
+      <p:cxnSp>
+        <p:nvCxnSpPr>
+          <p:cNvPr id="23" name="曲线连接符 22"/>
+          <p:cNvCxnSpPr>
+            <a:stCxn id="17" idx="2"/>
+          </p:cNvCxnSpPr>
+          <p:nvPr/>
+        </p:nvCxnSpPr>
+        <p:spPr>
+          <a:xfrm rot="5400000">
+            <a:off x="8472170" y="-95885"/>
+            <a:ext cx="494665" cy="4298315"/>
+          </a:xfrm>
+          <a:prstGeom prst="curvedConnector2">
+            <a:avLst/>
+          </a:prstGeom>
+          <a:ln>
+            <a:tailEnd type="none"/>
+          </a:ln>
+        </p:spPr>
+        <p:style>
+          <a:lnRef idx="2">
+            <a:schemeClr val="accent1"/>
+          </a:lnRef>
+          <a:fillRef idx="0">
+            <a:srgbClr val="FFFFFF"/>
+          </a:fillRef>
+          <a:effectRef idx="0">
+            <a:srgbClr val="FFFFFF"/>
+          </a:effectRef>
+          <a:fontRef idx="minor">
+            <a:schemeClr val="tx1"/>
+          </a:fontRef>
+        </p:style>
+      </p:cxnSp>
+      <p:cxnSp>
+        <p:nvCxnSpPr>
+          <p:cNvPr id="26" name="曲线连接符 25"/>
+          <p:cNvCxnSpPr/>
+          <p:nvPr/>
+        </p:nvCxnSpPr>
+        <p:spPr>
+          <a:xfrm rot="5400000" flipV="1">
+            <a:off x="4135120" y="-136525"/>
+            <a:ext cx="493395" cy="4378325"/>
+          </a:xfrm>
+          <a:prstGeom prst="curvedConnector2">
+            <a:avLst/>
+          </a:prstGeom>
+          <a:ln>
+            <a:headEnd type="stealth" w="lg" len="lg"/>
+            <a:tailEnd type="none"/>
+          </a:ln>
+        </p:spPr>
+        <p:style>
+          <a:lnRef idx="2">
+            <a:schemeClr val="accent1"/>
+          </a:lnRef>
+          <a:fillRef idx="0">
+            <a:srgbClr val="FFFFFF"/>
+          </a:fillRef>
+          <a:effectRef idx="0">
+            <a:srgbClr val="FFFFFF"/>
+          </a:effectRef>
+          <a:fontRef idx="minor">
+            <a:schemeClr val="tx1"/>
+          </a:fontRef>
+        </p:style>
+      </p:cxnSp>
+      <p:sp>
+        <p:nvSpPr>
+          <p:cNvPr id="27" name="文本框 26"/>
+          <p:cNvSpPr txBox="1"/>
+          <p:nvPr/>
+        </p:nvSpPr>
+        <p:spPr>
+          <a:xfrm>
+            <a:off x="5541010" y="1891665"/>
+            <a:ext cx="1854200" cy="321945"/>
+          </a:xfrm>
+          <a:prstGeom prst="rect">
+            <a:avLst/>
+          </a:prstGeom>
+          <a:noFill/>
+        </p:spPr>
+        <p:txBody>
+          <a:bodyPr wrap="square" rtlCol="0">
+            <a:spAutoFit/>
+          </a:bodyPr>
+          <a:p>
+            <a:r>
+              <a:rPr lang="en-US" altLang="zh-CN" sz="1500">
+                <a:solidFill>
+                  <a:srgbClr val="B2B1AF"/>
+                </a:solidFill>
+                <a:latin typeface="Times New Roman" panose="02020603050405020304" charset="0"/>
+                <a:cs typeface="Times New Roman" panose="02020603050405020304" charset="0"/>
+              </a:rPr>
+              <a:t>lifelong learning loop</a:t>
+            </a:r>
+            <a:endParaRPr lang="en-US" altLang="zh-CN" sz="1500">
+              <a:solidFill>
+                <a:srgbClr val="B2B1AF"/>
+              </a:solidFill>
+              <a:latin typeface="Times New Roman" panose="02020603050405020304" charset="0"/>
+              <a:cs typeface="Times New Roman" panose="02020603050405020304" charset="0"/>
+            </a:endParaRPr>
+          </a:p>
+        </p:txBody>
+      </p:sp>
+      <p:grpSp>
+        <p:nvGrpSpPr>
+          <p:cNvPr id="50" name="组合 49"/>
+          <p:cNvGrpSpPr/>
+          <p:nvPr/>
+        </p:nvGrpSpPr>
+        <p:grpSpPr>
+          <a:xfrm rot="0">
+            <a:off x="1390650" y="3034030"/>
+            <a:ext cx="4918075" cy="1630045"/>
+            <a:chOff x="616" y="4857"/>
+            <a:chExt cx="7745" cy="2567"/>
+          </a:xfrm>
+        </p:grpSpPr>
+        <p:cxnSp>
+          <p:nvCxnSpPr>
+            <p:cNvPr id="28" name="直接连接符 27"/>
+            <p:cNvCxnSpPr/>
+            <p:nvPr/>
+          </p:nvCxnSpPr>
+          <p:spPr>
+            <a:xfrm flipV="1">
+              <a:off x="2557" y="6966"/>
+              <a:ext cx="5232" cy="12"/>
+            </a:xfrm>
+            <a:prstGeom prst="line">
+              <a:avLst/>
+            </a:prstGeom>
+            <a:ln>
+              <a:solidFill>
+                <a:schemeClr val="bg2">
+                  <a:lumMod val="90000"/>
+                </a:schemeClr>
+              </a:solidFill>
+            </a:ln>
+          </p:spPr>
+          <p:style>
+            <a:lnRef idx="2">
+              <a:schemeClr val="accent1"/>
+            </a:lnRef>
+            <a:fillRef idx="0">
+              <a:srgbClr val="FFFFFF"/>
+            </a:fillRef>
+            <a:effectRef idx="0">
+              <a:srgbClr val="FFFFFF"/>
+            </a:effectRef>
+            <a:fontRef idx="minor">
+              <a:schemeClr val="tx1"/>
+            </a:fontRef>
+          </p:style>
+        </p:cxnSp>
         <p:sp>
           <p:nvSpPr>
-            <p:cNvPr id="13" name="圆角矩形 12"/>
+            <p:cNvPr id="29" name="文本框 28"/>
+            <p:cNvSpPr txBox="1"/>
+            <p:nvPr/>
+          </p:nvSpPr>
+          <p:spPr>
+            <a:xfrm>
+              <a:off x="2341" y="6990"/>
+              <a:ext cx="680" cy="434"/>
+            </a:xfrm>
+            <a:prstGeom prst="rect">
+              <a:avLst/>
+            </a:prstGeom>
+            <a:noFill/>
+          </p:spPr>
+          <p:txBody>
+            <a:bodyPr wrap="square" rtlCol="0">
+              <a:spAutoFit/>
+            </a:bodyPr>
+            <a:p>
+              <a:r>
+                <a:rPr lang="en-US" altLang="zh-CN" sz="1200">
+                  <a:solidFill>
+                    <a:schemeClr val="bg2">
+                      <a:lumMod val="50000"/>
+                    </a:schemeClr>
+                  </a:solidFill>
+                </a:rPr>
+                <a:t>0.0</a:t>
+              </a:r>
+              <a:endParaRPr lang="en-US" altLang="zh-CN" sz="1200">
+                <a:solidFill>
+                  <a:schemeClr val="bg2">
+                    <a:lumMod val="50000"/>
+                  </a:schemeClr>
+                </a:solidFill>
+              </a:endParaRPr>
+            </a:p>
+          </p:txBody>
+        </p:sp>
+        <p:sp>
+          <p:nvSpPr>
+            <p:cNvPr id="30" name="文本框 29"/>
+            <p:cNvSpPr txBox="1"/>
+            <p:nvPr/>
+          </p:nvSpPr>
+          <p:spPr>
+            <a:xfrm>
+              <a:off x="4701" y="6990"/>
+              <a:ext cx="680" cy="434"/>
+            </a:xfrm>
+            <a:prstGeom prst="rect">
+              <a:avLst/>
+            </a:prstGeom>
+            <a:noFill/>
+          </p:spPr>
+          <p:txBody>
+            <a:bodyPr wrap="square" rtlCol="0">
+              <a:spAutoFit/>
+            </a:bodyPr>
+            <a:p>
+              <a:r>
+                <a:rPr lang="en-US" altLang="zh-CN" sz="1200">
+                  <a:solidFill>
+                    <a:schemeClr val="bg2">
+                      <a:lumMod val="50000"/>
+                    </a:schemeClr>
+                  </a:solidFill>
+                </a:rPr>
+                <a:t>0.5</a:t>
+              </a:r>
+              <a:endParaRPr lang="en-US" altLang="zh-CN" sz="1200">
+                <a:solidFill>
+                  <a:schemeClr val="bg2">
+                    <a:lumMod val="50000"/>
+                  </a:schemeClr>
+                </a:solidFill>
+              </a:endParaRPr>
+            </a:p>
+          </p:txBody>
+        </p:sp>
+        <p:sp>
+          <p:nvSpPr>
+            <p:cNvPr id="31" name="文本框 30"/>
+            <p:cNvSpPr txBox="1"/>
+            <p:nvPr/>
+          </p:nvSpPr>
+          <p:spPr>
+            <a:xfrm>
+              <a:off x="7277" y="6990"/>
+              <a:ext cx="680" cy="434"/>
+            </a:xfrm>
+            <a:prstGeom prst="rect">
+              <a:avLst/>
+            </a:prstGeom>
+            <a:noFill/>
+          </p:spPr>
+          <p:txBody>
+            <a:bodyPr wrap="square" rtlCol="0">
+              <a:spAutoFit/>
+            </a:bodyPr>
+            <a:p>
+              <a:r>
+                <a:rPr lang="en-US" altLang="zh-CN" sz="1200">
+                  <a:solidFill>
+                    <a:schemeClr val="bg2">
+                      <a:lumMod val="50000"/>
+                    </a:schemeClr>
+                  </a:solidFill>
+                </a:rPr>
+                <a:t>1.0</a:t>
+              </a:r>
+              <a:endParaRPr lang="en-US" altLang="zh-CN" sz="1200">
+                <a:solidFill>
+                  <a:schemeClr val="bg2">
+                    <a:lumMod val="50000"/>
+                  </a:schemeClr>
+                </a:solidFill>
+              </a:endParaRPr>
+            </a:p>
+          </p:txBody>
+        </p:sp>
+        <p:sp>
+          <p:nvSpPr>
+            <p:cNvPr id="32" name="圆角矩形 31"/>
             <p:cNvSpPr/>
             <p:nvPr/>
           </p:nvSpPr>
           <p:spPr>
             <a:xfrm>
-              <a:off x="10766" y="1479"/>
-              <a:ext cx="3541" cy="1366"/>
+              <a:off x="2557" y="6606"/>
+              <a:ext cx="4720" cy="288"/>
             </a:xfrm>
             <a:prstGeom prst="roundRect">
               <a:avLst/>
             </a:prstGeom>
             <a:solidFill>
-              <a:srgbClr val="FAEEDA"/>
+              <a:srgbClr val="1D9E75"/>
             </a:solidFill>
             <a:ln>
-              <a:solidFill>
-                <a:srgbClr val="C4A67F"/>
-              </a:solidFill>
+              <a:noFill/>
             </a:ln>
           </p:spPr>
           <p:style>
@@ -3415,107 +4048,23 @@
         </p:sp>
         <p:sp>
           <p:nvSpPr>
-            <p:cNvPr id="14" name="文本框 13"/>
-            <p:cNvSpPr txBox="1"/>
-            <p:nvPr/>
-          </p:nvSpPr>
-          <p:spPr>
-            <a:xfrm>
-              <a:off x="11091" y="1675"/>
-              <a:ext cx="2968" cy="628"/>
-            </a:xfrm>
-            <a:prstGeom prst="rect">
-              <a:avLst/>
-            </a:prstGeom>
-            <a:noFill/>
-          </p:spPr>
-          <p:txBody>
-            <a:bodyPr wrap="square" rtlCol="0">
-              <a:spAutoFit/>
-            </a:bodyPr>
-            <a:p>
-              <a:r>
-                <a:rPr lang="en-US" altLang="zh-CN" sz="2000" b="1">
-                  <a:solidFill>
-                    <a:srgbClr val="7C562A"/>
-                  </a:solidFill>
-                  <a:latin typeface="Times New Roman" panose="02020603050405020304" charset="0"/>
-                  <a:cs typeface="Times New Roman" panose="02020603050405020304" charset="0"/>
-                </a:rPr>
-                <a:t>ExecutorAgent</a:t>
-              </a:r>
-              <a:endParaRPr lang="en-US" altLang="zh-CN" sz="2000" b="1">
-                <a:solidFill>
-                  <a:srgbClr val="7C562A"/>
-                </a:solidFill>
-                <a:latin typeface="Times New Roman" panose="02020603050405020304" charset="0"/>
-                <a:cs typeface="Times New Roman" panose="02020603050405020304" charset="0"/>
-              </a:endParaRPr>
-            </a:p>
-          </p:txBody>
-        </p:sp>
-        <p:sp>
-          <p:nvSpPr>
-            <p:cNvPr id="15" name="文本框 14"/>
-            <p:cNvSpPr txBox="1"/>
-            <p:nvPr/>
-          </p:nvSpPr>
-          <p:spPr>
-            <a:xfrm>
-              <a:off x="11052" y="2165"/>
-              <a:ext cx="3104" cy="531"/>
-            </a:xfrm>
-            <a:prstGeom prst="rect">
-              <a:avLst/>
-            </a:prstGeom>
-            <a:noFill/>
-          </p:spPr>
-          <p:txBody>
-            <a:bodyPr wrap="square" rtlCol="0">
-              <a:spAutoFit/>
-            </a:bodyPr>
-            <a:p>
-              <a:r>
-                <a:rPr lang="en-US" altLang="zh-CN" sz="1600">
-                  <a:solidFill>
-                    <a:srgbClr val="996B30"/>
-                  </a:solidFill>
-                  <a:latin typeface="Times New Roman" panose="02020603050405020304" charset="0"/>
-                  <a:cs typeface="Times New Roman" panose="02020603050405020304" charset="0"/>
-                </a:rPr>
-                <a:t>Sandboxed execution</a:t>
-              </a:r>
-              <a:endParaRPr lang="en-US" altLang="zh-CN" sz="1600">
-                <a:solidFill>
-                  <a:srgbClr val="996B30"/>
-                </a:solidFill>
-                <a:latin typeface="Times New Roman" panose="02020603050405020304" charset="0"/>
-                <a:cs typeface="Times New Roman" panose="02020603050405020304" charset="0"/>
-              </a:endParaRPr>
-            </a:p>
-          </p:txBody>
-        </p:sp>
-        <p:sp>
-          <p:nvSpPr>
-            <p:cNvPr id="17" name="圆角矩形 16"/>
+            <p:cNvPr id="33" name="圆角矩形 32"/>
             <p:cNvSpPr/>
             <p:nvPr/>
           </p:nvSpPr>
           <p:spPr>
             <a:xfrm>
-              <a:off x="15345" y="1479"/>
-              <a:ext cx="3541" cy="1366"/>
+              <a:off x="2557" y="6222"/>
+              <a:ext cx="3107" cy="288"/>
             </a:xfrm>
             <a:prstGeom prst="roundRect">
               <a:avLst/>
             </a:prstGeom>
             <a:solidFill>
-              <a:srgbClr val="FAECE7"/>
+              <a:srgbClr val="D3D1C7"/>
             </a:solidFill>
             <a:ln>
-              <a:solidFill>
-                <a:srgbClr val="C38D7A"/>
-              </a:solidFill>
+              <a:noFill/>
             </a:ln>
           </p:spPr>
           <p:style>
@@ -3544,14 +4093,149 @@
         </p:sp>
         <p:sp>
           <p:nvSpPr>
-            <p:cNvPr id="18" name="文本框 17"/>
+            <p:cNvPr id="34" name="圆角矩形 33"/>
+            <p:cNvSpPr/>
+            <p:nvPr/>
+          </p:nvSpPr>
+          <p:spPr>
+            <a:xfrm>
+              <a:off x="2557" y="5838"/>
+              <a:ext cx="4134" cy="288"/>
+            </a:xfrm>
+            <a:prstGeom prst="roundRect">
+              <a:avLst/>
+            </a:prstGeom>
+            <a:solidFill>
+              <a:srgbClr val="D3D1C7"/>
+            </a:solidFill>
+            <a:ln>
+              <a:noFill/>
+            </a:ln>
+          </p:spPr>
+          <p:style>
+            <a:lnRef idx="2">
+              <a:schemeClr val="accent1">
+                <a:lumMod val="75000"/>
+              </a:schemeClr>
+            </a:lnRef>
+            <a:fillRef idx="1">
+              <a:schemeClr val="accent1"/>
+            </a:fillRef>
+            <a:effectRef idx="0">
+              <a:srgbClr val="FFFFFF"/>
+            </a:effectRef>
+            <a:fontRef idx="minor">
+              <a:schemeClr val="lt1"/>
+            </a:fontRef>
+          </p:style>
+          <p:txBody>
+            <a:bodyPr rtlCol="0" anchor="ctr"/>
+            <a:p>
+              <a:pPr algn="ctr"/>
+              <a:endParaRPr lang="zh-CN" altLang="en-US"/>
+            </a:p>
+          </p:txBody>
+        </p:sp>
+        <p:sp>
+          <p:nvSpPr>
+            <p:cNvPr id="35" name="圆角矩形 34"/>
+            <p:cNvSpPr/>
+            <p:nvPr/>
+          </p:nvSpPr>
+          <p:spPr>
+            <a:xfrm>
+              <a:off x="2553" y="5400"/>
+              <a:ext cx="3667" cy="288"/>
+            </a:xfrm>
+            <a:prstGeom prst="roundRect">
+              <a:avLst/>
+            </a:prstGeom>
+            <a:solidFill>
+              <a:srgbClr val="D3D1C7"/>
+            </a:solidFill>
+            <a:ln>
+              <a:noFill/>
+            </a:ln>
+          </p:spPr>
+          <p:style>
+            <a:lnRef idx="2">
+              <a:schemeClr val="accent1">
+                <a:lumMod val="75000"/>
+              </a:schemeClr>
+            </a:lnRef>
+            <a:fillRef idx="1">
+              <a:schemeClr val="accent1"/>
+            </a:fillRef>
+            <a:effectRef idx="0">
+              <a:srgbClr val="FFFFFF"/>
+            </a:effectRef>
+            <a:fontRef idx="minor">
+              <a:schemeClr val="lt1"/>
+            </a:fontRef>
+          </p:style>
+          <p:txBody>
+            <a:bodyPr rtlCol="0" anchor="ctr"/>
+            <a:p>
+              <a:pPr algn="ctr"/>
+              <a:endParaRPr lang="zh-CN" altLang="en-US"/>
+            </a:p>
+          </p:txBody>
+        </p:sp>
+        <p:sp>
+          <p:nvSpPr>
+            <p:cNvPr id="36" name="圆角矩形 35"/>
+            <p:cNvSpPr/>
+            <p:nvPr/>
+          </p:nvSpPr>
+          <p:spPr>
+            <a:xfrm>
+              <a:off x="2557" y="4962"/>
+              <a:ext cx="3352" cy="288"/>
+            </a:xfrm>
+            <a:prstGeom prst="roundRect">
+              <a:avLst/>
+            </a:prstGeom>
+            <a:solidFill>
+              <a:srgbClr val="D3D1C7"/>
+            </a:solidFill>
+            <a:ln>
+              <a:noFill/>
+            </a:ln>
+          </p:spPr>
+          <p:style>
+            <a:lnRef idx="2">
+              <a:schemeClr val="accent1">
+                <a:lumMod val="75000"/>
+              </a:schemeClr>
+            </a:lnRef>
+            <a:fillRef idx="1">
+              <a:schemeClr val="accent1"/>
+            </a:fillRef>
+            <a:effectRef idx="0">
+              <a:srgbClr val="FFFFFF"/>
+            </a:effectRef>
+            <a:fontRef idx="minor">
+              <a:schemeClr val="lt1"/>
+            </a:fontRef>
+          </p:style>
+          <p:txBody>
+            <a:bodyPr rtlCol="0" anchor="ctr"/>
+            <a:p>
+              <a:pPr algn="ctr"/>
+              <a:endParaRPr lang="zh-CN" altLang="en-US"/>
+            </a:p>
+          </p:txBody>
+        </p:sp>
+        <p:sp>
+          <p:nvSpPr>
+            <p:cNvPr id="38" name="文本框 37"/>
             <p:cNvSpPr txBox="1"/>
             <p:nvPr/>
           </p:nvSpPr>
           <p:spPr>
             <a:xfrm>
-              <a:off x="15747" y="1675"/>
-              <a:ext cx="2851" cy="628"/>
+              <a:off x="1024" y="6498"/>
+              <a:ext cx="1721" cy="531"/>
             </a:xfrm>
             <a:prstGeom prst="rect">
               <a:avLst/>
@@ -3564,18 +4248,18 @@
             </a:bodyPr>
             <a:p>
               <a:r>
-                <a:rPr lang="en-US" altLang="zh-CN" sz="2000" b="1">
+                <a:rPr lang="en-US" altLang="zh-CN" sz="1600" b="1">
                   <a:solidFill>
-                    <a:srgbClr val="8B4F3B"/>
+                    <a:srgbClr val="3AAA85"/>
                   </a:solidFill>
                   <a:latin typeface="Times New Roman" panose="02020603050405020304" charset="0"/>
                   <a:cs typeface="Times New Roman" panose="02020603050405020304" charset="0"/>
                 </a:rPr>
-                <a:t>AuditorAgent</a:t>
+                <a:t>DEFEND</a:t>
               </a:r>
-              <a:endParaRPr lang="en-US" altLang="zh-CN" sz="2000" b="1">
+              <a:endParaRPr lang="en-US" altLang="zh-CN" sz="1600" b="1">
                 <a:solidFill>
-                  <a:srgbClr val="8B4F3B"/>
+                  <a:srgbClr val="3AAA85"/>
                 </a:solidFill>
                 <a:latin typeface="Times New Roman" panose="02020603050405020304" charset="0"/>
                 <a:cs typeface="Times New Roman" panose="02020603050405020304" charset="0"/>
@@ -3585,14 +4269,14 @@
         </p:sp>
         <p:sp>
           <p:nvSpPr>
-            <p:cNvPr id="19" name="文本框 18"/>
+            <p:cNvPr id="40" name="文本框 39"/>
             <p:cNvSpPr txBox="1"/>
             <p:nvPr/>
           </p:nvSpPr>
           <p:spPr>
             <a:xfrm>
-              <a:off x="15922" y="2165"/>
-              <a:ext cx="2536" cy="531"/>
+              <a:off x="1371" y="4857"/>
+              <a:ext cx="1350" cy="531"/>
             </a:xfrm>
             <a:prstGeom prst="rect">
               <a:avLst/>
@@ -3605,18 +4289,22 @@
             </a:bodyPr>
             <a:p>
               <a:r>
-                <a:rPr lang="en-US" altLang="zh-CN" sz="1600">
+                <a:rPr lang="en-US" altLang="zh-CN" sz="1600" b="1">
                   <a:solidFill>
-                    <a:srgbClr val="A8583E"/>
+                    <a:schemeClr val="bg2">
+                      <a:lumMod val="50000"/>
+                    </a:schemeClr>
                   </a:solidFill>
                   <a:latin typeface="Times New Roman" panose="02020603050405020304" charset="0"/>
                   <a:cs typeface="Times New Roman" panose="02020603050405020304" charset="0"/>
                 </a:rPr>
-                <a:t>Audit &amp; validate</a:t>
+                <a:t>AGrail</a:t>
               </a:r>
-              <a:endParaRPr lang="en-US" altLang="zh-CN" sz="1600">
+              <a:endParaRPr lang="en-US" altLang="zh-CN" sz="1600" b="1">
                 <a:solidFill>
-                  <a:srgbClr val="A8583E"/>
+                  <a:schemeClr val="bg2">
+                    <a:lumMod val="50000"/>
+                  </a:schemeClr>
                 </a:solidFill>
                 <a:latin typeface="Times New Roman" panose="02020603050405020304" charset="0"/>
                 <a:cs typeface="Times New Roman" panose="02020603050405020304" charset="0"/>
@@ -3624,25 +4312,375 @@
             </a:p>
           </p:txBody>
         </p:sp>
+        <p:sp>
+          <p:nvSpPr>
+            <p:cNvPr id="41" name="文本框 40"/>
+            <p:cNvSpPr txBox="1"/>
+            <p:nvPr/>
+          </p:nvSpPr>
+          <p:spPr>
+            <a:xfrm>
+              <a:off x="1136" y="5280"/>
+              <a:ext cx="1517" cy="531"/>
+            </a:xfrm>
+            <a:prstGeom prst="rect">
+              <a:avLst/>
+            </a:prstGeom>
+            <a:noFill/>
+          </p:spPr>
+          <p:txBody>
+            <a:bodyPr wrap="square" rtlCol="0">
+              <a:spAutoFit/>
+            </a:bodyPr>
+            <a:p>
+              <a:r>
+                <a:rPr lang="en-US" altLang="zh-CN" sz="1600" b="1">
+                  <a:solidFill>
+                    <a:schemeClr val="bg2">
+                      <a:lumMod val="50000"/>
+                    </a:schemeClr>
+                  </a:solidFill>
+                  <a:latin typeface="Times New Roman" panose="02020603050405020304" charset="0"/>
+                  <a:cs typeface="Times New Roman" panose="02020603050405020304" charset="0"/>
+                </a:rPr>
+                <a:t>CoTSafe</a:t>
+              </a:r>
+              <a:endParaRPr lang="en-US" altLang="zh-CN" sz="1600" b="1">
+                <a:solidFill>
+                  <a:schemeClr val="bg2">
+                    <a:lumMod val="50000"/>
+                  </a:schemeClr>
+                </a:solidFill>
+                <a:latin typeface="Times New Roman" panose="02020603050405020304" charset="0"/>
+                <a:cs typeface="Times New Roman" panose="02020603050405020304" charset="0"/>
+              </a:endParaRPr>
+            </a:p>
+          </p:txBody>
+        </p:sp>
+        <p:sp>
+          <p:nvSpPr>
+            <p:cNvPr id="42" name="文本框 41"/>
+            <p:cNvSpPr txBox="1"/>
+            <p:nvPr/>
+          </p:nvSpPr>
+          <p:spPr>
+            <a:xfrm>
+              <a:off x="664" y="5691"/>
+              <a:ext cx="2009" cy="531"/>
+            </a:xfrm>
+            <a:prstGeom prst="rect">
+              <a:avLst/>
+            </a:prstGeom>
+            <a:noFill/>
+          </p:spPr>
+          <p:txBody>
+            <a:bodyPr wrap="square" rtlCol="0">
+              <a:spAutoFit/>
+            </a:bodyPr>
+            <a:p>
+              <a:r>
+                <a:rPr lang="en-US" altLang="zh-CN" sz="1600" b="1">
+                  <a:solidFill>
+                    <a:schemeClr val="bg2">
+                      <a:lumMod val="50000"/>
+                    </a:schemeClr>
+                  </a:solidFill>
+                  <a:latin typeface="Times New Roman" panose="02020603050405020304" charset="0"/>
+                  <a:cs typeface="Times New Roman" panose="02020603050405020304" charset="0"/>
+                </a:rPr>
+                <a:t>ShieldAgent</a:t>
+              </a:r>
+              <a:endParaRPr lang="en-US" altLang="zh-CN" sz="1600" b="1">
+                <a:solidFill>
+                  <a:schemeClr val="bg2">
+                    <a:lumMod val="50000"/>
+                  </a:schemeClr>
+                </a:solidFill>
+                <a:latin typeface="Times New Roman" panose="02020603050405020304" charset="0"/>
+                <a:cs typeface="Times New Roman" panose="02020603050405020304" charset="0"/>
+              </a:endParaRPr>
+            </a:p>
+          </p:txBody>
+        </p:sp>
+        <p:sp>
+          <p:nvSpPr>
+            <p:cNvPr id="43" name="文本框 42"/>
+            <p:cNvSpPr txBox="1"/>
+            <p:nvPr/>
+          </p:nvSpPr>
+          <p:spPr>
+            <a:xfrm>
+              <a:off x="616" y="6075"/>
+              <a:ext cx="2086" cy="531"/>
+            </a:xfrm>
+            <a:prstGeom prst="rect">
+              <a:avLst/>
+            </a:prstGeom>
+            <a:noFill/>
+          </p:spPr>
+          <p:txBody>
+            <a:bodyPr wrap="square" rtlCol="0">
+              <a:spAutoFit/>
+            </a:bodyPr>
+            <a:p>
+              <a:r>
+                <a:rPr lang="en-US" altLang="zh-CN" sz="1600" b="1">
+                  <a:solidFill>
+                    <a:schemeClr val="bg2">
+                      <a:lumMod val="50000"/>
+                    </a:schemeClr>
+                  </a:solidFill>
+                  <a:latin typeface="Times New Roman" panose="02020603050405020304" charset="0"/>
+                  <a:cs typeface="Times New Roman" panose="02020603050405020304" charset="0"/>
+                </a:rPr>
+                <a:t>GuardAgent</a:t>
+              </a:r>
+              <a:endParaRPr lang="en-US" altLang="zh-CN" sz="1600" b="1">
+                <a:solidFill>
+                  <a:schemeClr val="bg2">
+                    <a:lumMod val="50000"/>
+                  </a:schemeClr>
+                </a:solidFill>
+                <a:latin typeface="Times New Roman" panose="02020603050405020304" charset="0"/>
+                <a:cs typeface="Times New Roman" panose="02020603050405020304" charset="0"/>
+              </a:endParaRPr>
+            </a:p>
+          </p:txBody>
+        </p:sp>
+        <p:sp>
+          <p:nvSpPr>
+            <p:cNvPr id="44" name="文本框 43"/>
+            <p:cNvSpPr txBox="1"/>
+            <p:nvPr/>
+          </p:nvSpPr>
+          <p:spPr>
+            <a:xfrm>
+              <a:off x="7193" y="6510"/>
+              <a:ext cx="1169" cy="483"/>
+            </a:xfrm>
+            <a:prstGeom prst="rect">
+              <a:avLst/>
+            </a:prstGeom>
+            <a:noFill/>
+          </p:spPr>
+          <p:txBody>
+            <a:bodyPr wrap="square" rtlCol="0">
+              <a:spAutoFit/>
+            </a:bodyPr>
+            <a:p>
+              <a:r>
+                <a:rPr lang="en-US" altLang="zh-CN" sz="1400" b="1">
+                  <a:solidFill>
+                    <a:srgbClr val="3A7367"/>
+                  </a:solidFill>
+                </a:rPr>
+                <a:t>0.924</a:t>
+              </a:r>
+              <a:endParaRPr lang="en-US" altLang="zh-CN" sz="1400" b="1">
+                <a:solidFill>
+                  <a:srgbClr val="3A7367"/>
+                </a:solidFill>
+              </a:endParaRPr>
+            </a:p>
+          </p:txBody>
+        </p:sp>
+        <p:sp>
+          <p:nvSpPr>
+            <p:cNvPr id="45" name="文本框 44"/>
+            <p:cNvSpPr txBox="1"/>
+            <p:nvPr/>
+          </p:nvSpPr>
+          <p:spPr>
+            <a:xfrm>
+              <a:off x="5557" y="6129"/>
+              <a:ext cx="1169" cy="483"/>
+            </a:xfrm>
+            <a:prstGeom prst="rect">
+              <a:avLst/>
+            </a:prstGeom>
+            <a:noFill/>
+          </p:spPr>
+          <p:txBody>
+            <a:bodyPr wrap="square" rtlCol="0">
+              <a:spAutoFit/>
+            </a:bodyPr>
+            <a:p>
+              <a:r>
+                <a:rPr lang="en-US" altLang="zh-CN" sz="1400">
+                  <a:solidFill>
+                    <a:schemeClr val="bg2">
+                      <a:lumMod val="50000"/>
+                    </a:schemeClr>
+                  </a:solidFill>
+                </a:rPr>
+                <a:t>0.604</a:t>
+              </a:r>
+              <a:endParaRPr lang="en-US" altLang="zh-CN" sz="1400">
+                <a:solidFill>
+                  <a:schemeClr val="bg2">
+                    <a:lumMod val="50000"/>
+                  </a:schemeClr>
+                </a:solidFill>
+              </a:endParaRPr>
+            </a:p>
+          </p:txBody>
+        </p:sp>
+        <p:sp>
+          <p:nvSpPr>
+            <p:cNvPr id="47" name="文本框 46"/>
+            <p:cNvSpPr txBox="1"/>
+            <p:nvPr/>
+          </p:nvSpPr>
+          <p:spPr>
+            <a:xfrm>
+              <a:off x="6606" y="5739"/>
+              <a:ext cx="1169" cy="483"/>
+            </a:xfrm>
+            <a:prstGeom prst="rect">
+              <a:avLst/>
+            </a:prstGeom>
+            <a:noFill/>
+          </p:spPr>
+          <p:txBody>
+            <a:bodyPr wrap="square" rtlCol="0">
+              <a:spAutoFit/>
+            </a:bodyPr>
+            <a:p>
+              <a:r>
+                <a:rPr lang="en-US" altLang="zh-CN" sz="1400">
+                  <a:solidFill>
+                    <a:schemeClr val="bg2">
+                      <a:lumMod val="50000"/>
+                    </a:schemeClr>
+                  </a:solidFill>
+                </a:rPr>
+                <a:t>0.832</a:t>
+              </a:r>
+              <a:endParaRPr lang="en-US" altLang="zh-CN" sz="1400">
+                <a:solidFill>
+                  <a:schemeClr val="bg2">
+                    <a:lumMod val="50000"/>
+                  </a:schemeClr>
+                </a:solidFill>
+              </a:endParaRPr>
+            </a:p>
+          </p:txBody>
+        </p:sp>
+        <p:sp>
+          <p:nvSpPr>
+            <p:cNvPr id="48" name="文本框 47"/>
+            <p:cNvSpPr txBox="1"/>
+            <p:nvPr/>
+          </p:nvSpPr>
+          <p:spPr>
+            <a:xfrm>
+              <a:off x="6127" y="5308"/>
+              <a:ext cx="1169" cy="483"/>
+            </a:xfrm>
+            <a:prstGeom prst="rect">
+              <a:avLst/>
+            </a:prstGeom>
+            <a:noFill/>
+          </p:spPr>
+          <p:txBody>
+            <a:bodyPr wrap="square" rtlCol="0">
+              <a:spAutoFit/>
+            </a:bodyPr>
+            <a:p>
+              <a:r>
+                <a:rPr lang="en-US" altLang="zh-CN" sz="1400">
+                  <a:solidFill>
+                    <a:schemeClr val="bg2">
+                      <a:lumMod val="50000"/>
+                    </a:schemeClr>
+                  </a:solidFill>
+                </a:rPr>
+                <a:t>0.770</a:t>
+              </a:r>
+              <a:endParaRPr lang="en-US" altLang="zh-CN" sz="1400">
+                <a:solidFill>
+                  <a:schemeClr val="bg2">
+                    <a:lumMod val="50000"/>
+                  </a:schemeClr>
+                </a:solidFill>
+              </a:endParaRPr>
+            </a:p>
+          </p:txBody>
+        </p:sp>
+        <p:sp>
+          <p:nvSpPr>
+            <p:cNvPr id="49" name="文本框 48"/>
+            <p:cNvSpPr txBox="1"/>
+            <p:nvPr/>
+          </p:nvSpPr>
+          <p:spPr>
+            <a:xfrm>
+              <a:off x="5813" y="4866"/>
+              <a:ext cx="1169" cy="483"/>
+            </a:xfrm>
+            <a:prstGeom prst="rect">
+              <a:avLst/>
+            </a:prstGeom>
+            <a:noFill/>
+          </p:spPr>
+          <p:txBody>
+            <a:bodyPr wrap="square" rtlCol="0">
+              <a:spAutoFit/>
+            </a:bodyPr>
+            <a:p>
+              <a:r>
+                <a:rPr lang="en-US" altLang="zh-CN" sz="1400">
+                  <a:solidFill>
+                    <a:schemeClr val="bg2">
+                      <a:lumMod val="50000"/>
+                    </a:schemeClr>
+                  </a:solidFill>
+                </a:rPr>
+                <a:t>0.707</a:t>
+              </a:r>
+              <a:endParaRPr lang="en-US" altLang="zh-CN" sz="1400">
+                <a:solidFill>
+                  <a:schemeClr val="bg2">
+                    <a:lumMod val="50000"/>
+                  </a:schemeClr>
+                </a:solidFill>
+              </a:endParaRPr>
+            </a:p>
+          </p:txBody>
+        </p:sp>
+      </p:grpSp>
+      <p:grpSp>
+        <p:nvGrpSpPr>
+          <p:cNvPr id="108" name="组合 107"/>
+          <p:cNvGrpSpPr/>
+          <p:nvPr/>
+        </p:nvGrpSpPr>
+        <p:grpSpPr>
+          <a:xfrm rot="0">
+            <a:off x="6514465" y="2938145"/>
+            <a:ext cx="4556760" cy="1737995"/>
+            <a:chOff x="10535" y="4710"/>
+            <a:chExt cx="7176" cy="2737"/>
+          </a:xfrm>
+        </p:grpSpPr>
         <p:cxnSp>
           <p:nvCxnSpPr>
-            <p:cNvPr id="20" name="直接箭头连接符 19"/>
-            <p:cNvCxnSpPr>
-              <a:stCxn id="4" idx="3"/>
-              <a:endCxn id="9" idx="1"/>
-            </p:cNvCxnSpPr>
+            <p:cNvPr id="51" name="直接连接符 50"/>
+            <p:cNvCxnSpPr/>
             <p:nvPr/>
           </p:nvCxnSpPr>
           <p:spPr>
             <a:xfrm>
-              <a:off x="5223" y="2162"/>
-              <a:ext cx="997" cy="0"/>
+              <a:off x="11041" y="4710"/>
+              <a:ext cx="0" cy="2292"/>
             </a:xfrm>
-            <a:prstGeom prst="straightConnector1">
+            <a:prstGeom prst="line">
               <a:avLst/>
             </a:prstGeom>
-            <a:ln w="22225">
-              <a:tailEnd type="stealth" w="lg" len="lg"/>
+            <a:ln>
+              <a:solidFill>
+                <a:srgbClr val="D3D1C7"/>
+              </a:solidFill>
             </a:ln>
           </p:spPr>
           <p:style>
@@ -3662,126 +4700,22 @@
         </p:cxnSp>
         <p:cxnSp>
           <p:nvCxnSpPr>
-            <p:cNvPr id="21" name="直接箭头连接符 20"/>
-            <p:cNvCxnSpPr>
-              <a:endCxn id="13" idx="1"/>
-            </p:cNvCxnSpPr>
-            <p:nvPr/>
-          </p:nvCxnSpPr>
-          <p:spPr>
-            <a:xfrm>
-              <a:off x="9762" y="2162"/>
-              <a:ext cx="1004" cy="0"/>
-            </a:xfrm>
-            <a:prstGeom prst="straightConnector1">
-              <a:avLst/>
-            </a:prstGeom>
-            <a:ln w="22225">
-              <a:tailEnd type="stealth" w="lg" len="lg"/>
-            </a:ln>
-          </p:spPr>
-          <p:style>
-            <a:lnRef idx="2">
-              <a:schemeClr val="accent1"/>
-            </a:lnRef>
-            <a:fillRef idx="0">
-              <a:srgbClr val="FFFFFF"/>
-            </a:fillRef>
-            <a:effectRef idx="0">
-              <a:srgbClr val="FFFFFF"/>
-            </a:effectRef>
-            <a:fontRef idx="minor">
-              <a:schemeClr val="tx1"/>
-            </a:fontRef>
-          </p:style>
-        </p:cxnSp>
-        <p:cxnSp>
-          <p:nvCxnSpPr>
-            <p:cNvPr id="22" name="直接箭头连接符 21"/>
-            <p:cNvCxnSpPr>
-              <a:endCxn id="17" idx="1"/>
-            </p:cNvCxnSpPr>
+            <p:cNvPr id="52" name="直接连接符 51"/>
+            <p:cNvCxnSpPr/>
             <p:nvPr/>
           </p:nvCxnSpPr>
           <p:spPr>
             <a:xfrm flipV="1">
-              <a:off x="14322" y="2162"/>
-              <a:ext cx="1023" cy="3"/>
+              <a:off x="11044" y="6968"/>
+              <a:ext cx="5270" cy="28"/>
             </a:xfrm>
-            <a:prstGeom prst="straightConnector1">
-              <a:avLst/>
-            </a:prstGeom>
-            <a:ln w="22225">
-              <a:tailEnd type="stealth" w="lg" len="lg"/>
-            </a:ln>
-          </p:spPr>
-          <p:style>
-            <a:lnRef idx="2">
-              <a:schemeClr val="accent1"/>
-            </a:lnRef>
-            <a:fillRef idx="0">
-              <a:srgbClr val="FFFFFF"/>
-            </a:fillRef>
-            <a:effectRef idx="0">
-              <a:srgbClr val="FFFFFF"/>
-            </a:effectRef>
-            <a:fontRef idx="minor">
-              <a:schemeClr val="tx1"/>
-            </a:fontRef>
-          </p:style>
-        </p:cxnSp>
-        <p:cxnSp>
-          <p:nvCxnSpPr>
-            <p:cNvPr id="23" name="曲线连接符 22"/>
-            <p:cNvCxnSpPr>
-              <a:stCxn id="17" idx="2"/>
-            </p:cNvCxnSpPr>
-            <p:nvPr/>
-          </p:nvCxnSpPr>
-          <p:spPr>
-            <a:xfrm rot="5400000">
-              <a:off x="13342" y="-151"/>
-              <a:ext cx="779" cy="6769"/>
-            </a:xfrm>
-            <a:prstGeom prst="curvedConnector2">
+            <a:prstGeom prst="line">
               <a:avLst/>
             </a:prstGeom>
             <a:ln>
-              <a:tailEnd type="none"/>
-            </a:ln>
-          </p:spPr>
-          <p:style>
-            <a:lnRef idx="2">
-              <a:schemeClr val="accent1"/>
-            </a:lnRef>
-            <a:fillRef idx="0">
-              <a:srgbClr val="FFFFFF"/>
-            </a:fillRef>
-            <a:effectRef idx="0">
-              <a:srgbClr val="FFFFFF"/>
-            </a:effectRef>
-            <a:fontRef idx="minor">
-              <a:schemeClr val="tx1"/>
-            </a:fontRef>
-          </p:style>
-        </p:cxnSp>
-        <p:cxnSp>
-          <p:nvCxnSpPr>
-            <p:cNvPr id="26" name="曲线连接符 25"/>
-            <p:cNvCxnSpPr/>
-            <p:nvPr/>
-          </p:nvCxnSpPr>
-          <p:spPr>
-            <a:xfrm rot="5400000" flipV="1">
-              <a:off x="6512" y="-215"/>
-              <a:ext cx="777" cy="6895"/>
-            </a:xfrm>
-            <a:prstGeom prst="curvedConnector2">
-              <a:avLst/>
-            </a:prstGeom>
-            <a:ln>
-              <a:headEnd type="stealth" w="lg" len="lg"/>
-              <a:tailEnd type="none"/>
+              <a:solidFill>
+                <a:srgbClr val="D3D1C7"/>
+              </a:solidFill>
             </a:ln>
           </p:spPr>
           <p:style>
@@ -3801,14 +4735,149 @@
         </p:cxnSp>
         <p:sp>
           <p:nvSpPr>
-            <p:cNvPr id="27" name="文本框 26"/>
+            <p:cNvPr id="58" name="文本框 57"/>
             <p:cNvSpPr txBox="1"/>
             <p:nvPr/>
           </p:nvSpPr>
           <p:spPr>
             <a:xfrm>
-              <a:off x="8726" y="2979"/>
-              <a:ext cx="2920" cy="507"/>
+              <a:off x="11099" y="6941"/>
+              <a:ext cx="856" cy="483"/>
+            </a:xfrm>
+            <a:prstGeom prst="rect">
+              <a:avLst/>
+            </a:prstGeom>
+            <a:noFill/>
+          </p:spPr>
+          <p:txBody>
+            <a:bodyPr wrap="square" rtlCol="0">
+              <a:spAutoFit/>
+            </a:bodyPr>
+            <a:p>
+              <a:r>
+                <a:rPr lang="en-US" altLang="zh-CN" sz="1400">
+                  <a:solidFill>
+                    <a:schemeClr val="bg2">
+                      <a:lumMod val="50000"/>
+                    </a:schemeClr>
+                  </a:solidFill>
+                  <a:latin typeface="Times New Roman" panose="02020603050405020304" charset="0"/>
+                  <a:cs typeface="Times New Roman" panose="02020603050405020304" charset="0"/>
+                </a:rPr>
+                <a:t>App</a:t>
+              </a:r>
+              <a:endParaRPr lang="en-US" altLang="zh-CN" sz="1400">
+                <a:solidFill>
+                  <a:schemeClr val="bg2">
+                    <a:lumMod val="50000"/>
+                  </a:schemeClr>
+                </a:solidFill>
+                <a:latin typeface="Times New Roman" panose="02020603050405020304" charset="0"/>
+                <a:cs typeface="Times New Roman" panose="02020603050405020304" charset="0"/>
+              </a:endParaRPr>
+            </a:p>
+          </p:txBody>
+        </p:sp>
+        <p:sp>
+          <p:nvSpPr>
+            <p:cNvPr id="59" name="文本框 58"/>
+            <p:cNvSpPr txBox="1"/>
+            <p:nvPr/>
+          </p:nvSpPr>
+          <p:spPr>
+            <a:xfrm>
+              <a:off x="11932" y="6941"/>
+              <a:ext cx="856" cy="483"/>
+            </a:xfrm>
+            <a:prstGeom prst="rect">
+              <a:avLst/>
+            </a:prstGeom>
+            <a:noFill/>
+          </p:spPr>
+          <p:txBody>
+            <a:bodyPr wrap="square" rtlCol="0">
+              <a:spAutoFit/>
+            </a:bodyPr>
+            <a:p>
+              <a:r>
+                <a:rPr lang="en-US" altLang="zh-CN" sz="1400">
+                  <a:solidFill>
+                    <a:schemeClr val="bg2">
+                      <a:lumMod val="50000"/>
+                    </a:schemeClr>
+                  </a:solidFill>
+                  <a:latin typeface="Times New Roman" panose="02020603050405020304" charset="0"/>
+                  <a:cs typeface="Times New Roman" panose="02020603050405020304" charset="0"/>
+                </a:rPr>
+                <a:t>Prog</a:t>
+              </a:r>
+              <a:endParaRPr lang="en-US" altLang="zh-CN" sz="1400">
+                <a:solidFill>
+                  <a:schemeClr val="bg2">
+                    <a:lumMod val="50000"/>
+                  </a:schemeClr>
+                </a:solidFill>
+                <a:latin typeface="Times New Roman" panose="02020603050405020304" charset="0"/>
+                <a:cs typeface="Times New Roman" panose="02020603050405020304" charset="0"/>
+              </a:endParaRPr>
+            </a:p>
+          </p:txBody>
+        </p:sp>
+        <p:sp>
+          <p:nvSpPr>
+            <p:cNvPr id="60" name="文本框 59"/>
+            <p:cNvSpPr txBox="1"/>
+            <p:nvPr/>
+          </p:nvSpPr>
+          <p:spPr>
+            <a:xfrm>
+              <a:off x="12828" y="6941"/>
+              <a:ext cx="856" cy="483"/>
+            </a:xfrm>
+            <a:prstGeom prst="rect">
+              <a:avLst/>
+            </a:prstGeom>
+            <a:noFill/>
+          </p:spPr>
+          <p:txBody>
+            <a:bodyPr wrap="square" rtlCol="0">
+              <a:spAutoFit/>
+            </a:bodyPr>
+            <a:p>
+              <a:r>
+                <a:rPr lang="en-US" altLang="zh-CN" sz="1400">
+                  <a:solidFill>
+                    <a:schemeClr val="bg2">
+                      <a:lumMod val="50000"/>
+                    </a:schemeClr>
+                  </a:solidFill>
+                  <a:latin typeface="Times New Roman" panose="02020603050405020304" charset="0"/>
+                  <a:cs typeface="Times New Roman" panose="02020603050405020304" charset="0"/>
+                </a:rPr>
+                <a:t>IoT</a:t>
+              </a:r>
+              <a:endParaRPr lang="en-US" altLang="zh-CN" sz="1400">
+                <a:solidFill>
+                  <a:schemeClr val="bg2">
+                    <a:lumMod val="50000"/>
+                  </a:schemeClr>
+                </a:solidFill>
+                <a:latin typeface="Times New Roman" panose="02020603050405020304" charset="0"/>
+                <a:cs typeface="Times New Roman" panose="02020603050405020304" charset="0"/>
+              </a:endParaRPr>
+            </a:p>
+          </p:txBody>
+        </p:sp>
+        <p:sp>
+          <p:nvSpPr>
+            <p:cNvPr id="61" name="文本框 60"/>
+            <p:cNvSpPr txBox="1"/>
+            <p:nvPr/>
+          </p:nvSpPr>
+          <p:spPr>
+            <a:xfrm>
+              <a:off x="13604" y="6933"/>
+              <a:ext cx="856" cy="507"/>
             </a:xfrm>
             <a:prstGeom prst="rect">
               <a:avLst/>
@@ -3823,16 +4892,65 @@
               <a:r>
                 <a:rPr lang="en-US" altLang="zh-CN" sz="1500">
                   <a:solidFill>
-                    <a:srgbClr val="B2B1AF"/>
+                    <a:schemeClr val="bg2">
+                      <a:lumMod val="50000"/>
+                    </a:schemeClr>
                   </a:solidFill>
                   <a:latin typeface="Times New Roman" panose="02020603050405020304" charset="0"/>
                   <a:cs typeface="Times New Roman" panose="02020603050405020304" charset="0"/>
                 </a:rPr>
-                <a:t>lifelong learning loop</a:t>
+                <a:t>Fin</a:t>
               </a:r>
               <a:endParaRPr lang="en-US" altLang="zh-CN" sz="1500">
                 <a:solidFill>
-                  <a:srgbClr val="B2B1AF"/>
+                  <a:schemeClr val="bg2">
+                    <a:lumMod val="50000"/>
+                  </a:schemeClr>
+                </a:solidFill>
+                <a:latin typeface="Times New Roman" panose="02020603050405020304" charset="0"/>
+                <a:cs typeface="Times New Roman" panose="02020603050405020304" charset="0"/>
+              </a:endParaRPr>
+            </a:p>
+          </p:txBody>
+        </p:sp>
+        <p:sp>
+          <p:nvSpPr>
+            <p:cNvPr id="62" name="文本框 61"/>
+            <p:cNvSpPr txBox="1"/>
+            <p:nvPr/>
+          </p:nvSpPr>
+          <p:spPr>
+            <a:xfrm>
+              <a:off x="14298" y="6941"/>
+              <a:ext cx="856" cy="507"/>
+            </a:xfrm>
+            <a:prstGeom prst="rect">
+              <a:avLst/>
+            </a:prstGeom>
+            <a:noFill/>
+          </p:spPr>
+          <p:txBody>
+            <a:bodyPr wrap="square" rtlCol="0">
+              <a:spAutoFit/>
+            </a:bodyPr>
+            <a:p>
+              <a:r>
+                <a:rPr lang="en-US" altLang="zh-CN" sz="1500">
+                  <a:solidFill>
+                    <a:schemeClr val="bg2">
+                      <a:lumMod val="50000"/>
+                    </a:schemeClr>
+                  </a:solidFill>
+                  <a:latin typeface="Times New Roman" panose="02020603050405020304" charset="0"/>
+                  <a:cs typeface="Times New Roman" panose="02020603050405020304" charset="0"/>
+                </a:rPr>
+                <a:t>Web</a:t>
+              </a:r>
+              <a:endParaRPr lang="en-US" altLang="zh-CN" sz="1500">
+                <a:solidFill>
+                  <a:schemeClr val="bg2">
+                    <a:lumMod val="50000"/>
+                  </a:schemeClr>
                 </a:solidFill>
                 <a:latin typeface="Times New Roman" panose="02020603050405020304" charset="0"/>
                 <a:cs typeface="Times New Roman" panose="02020603050405020304" charset="0"/>
@@ -3842,2379 +4960,27 @@
         </p:sp>
         <p:grpSp>
           <p:nvGrpSpPr>
-            <p:cNvPr id="50" name="组合 49"/>
+            <p:cNvPr id="67" name="组合 66"/>
             <p:cNvGrpSpPr/>
             <p:nvPr/>
           </p:nvGrpSpPr>
           <p:grpSpPr>
-            <a:xfrm>
-              <a:off x="2190" y="4778"/>
-              <a:ext cx="7745" cy="2567"/>
-              <a:chOff x="616" y="4857"/>
-              <a:chExt cx="7745" cy="2567"/>
+            <a:xfrm rot="0">
+              <a:off x="11310" y="4778"/>
+              <a:ext cx="3574" cy="530"/>
+              <a:chOff x="11310" y="4778"/>
+              <a:chExt cx="3574" cy="530"/>
             </a:xfrm>
           </p:grpSpPr>
-          <p:cxnSp>
-            <p:nvCxnSpPr>
-              <p:cNvPr id="28" name="直接连接符 27"/>
-              <p:cNvCxnSpPr/>
-              <p:nvPr/>
-            </p:nvCxnSpPr>
-            <p:spPr>
-              <a:xfrm flipV="1">
-                <a:off x="2557" y="6966"/>
-                <a:ext cx="5232" cy="12"/>
-              </a:xfrm>
-              <a:prstGeom prst="line">
-                <a:avLst/>
-              </a:prstGeom>
-              <a:ln>
-                <a:solidFill>
-                  <a:schemeClr val="bg2">
-                    <a:lumMod val="90000"/>
-                  </a:schemeClr>
-                </a:solidFill>
-              </a:ln>
-            </p:spPr>
-            <p:style>
-              <a:lnRef idx="2">
-                <a:schemeClr val="accent1"/>
-              </a:lnRef>
-              <a:fillRef idx="0">
-                <a:srgbClr val="FFFFFF"/>
-              </a:fillRef>
-              <a:effectRef idx="0">
-                <a:srgbClr val="FFFFFF"/>
-              </a:effectRef>
-              <a:fontRef idx="minor">
-                <a:schemeClr val="tx1"/>
-              </a:fontRef>
-            </p:style>
-          </p:cxnSp>
           <p:sp>
             <p:nvSpPr>
-              <p:cNvPr id="29" name="文本框 28"/>
-              <p:cNvSpPr txBox="1"/>
-              <p:nvPr/>
-            </p:nvSpPr>
-            <p:spPr>
-              <a:xfrm>
-                <a:off x="2341" y="6990"/>
-                <a:ext cx="680" cy="434"/>
-              </a:xfrm>
-              <a:prstGeom prst="rect">
-                <a:avLst/>
-              </a:prstGeom>
-              <a:noFill/>
-            </p:spPr>
-            <p:txBody>
-              <a:bodyPr wrap="square" rtlCol="0">
-                <a:spAutoFit/>
-              </a:bodyPr>
-              <a:p>
-                <a:r>
-                  <a:rPr lang="en-US" altLang="zh-CN" sz="1200">
-                    <a:solidFill>
-                      <a:schemeClr val="bg2">
-                        <a:lumMod val="50000"/>
-                      </a:schemeClr>
-                    </a:solidFill>
-                  </a:rPr>
-                  <a:t>0.0</a:t>
-                </a:r>
-                <a:endParaRPr lang="en-US" altLang="zh-CN" sz="1200">
-                  <a:solidFill>
-                    <a:schemeClr val="bg2">
-                      <a:lumMod val="50000"/>
-                    </a:schemeClr>
-                  </a:solidFill>
-                </a:endParaRPr>
-              </a:p>
-            </p:txBody>
-          </p:sp>
-          <p:sp>
-            <p:nvSpPr>
-              <p:cNvPr id="30" name="文本框 29"/>
-              <p:cNvSpPr txBox="1"/>
-              <p:nvPr/>
-            </p:nvSpPr>
-            <p:spPr>
-              <a:xfrm>
-                <a:off x="4701" y="6990"/>
-                <a:ext cx="680" cy="434"/>
-              </a:xfrm>
-              <a:prstGeom prst="rect">
-                <a:avLst/>
-              </a:prstGeom>
-              <a:noFill/>
-            </p:spPr>
-            <p:txBody>
-              <a:bodyPr wrap="square" rtlCol="0">
-                <a:spAutoFit/>
-              </a:bodyPr>
-              <a:p>
-                <a:r>
-                  <a:rPr lang="en-US" altLang="zh-CN" sz="1200">
-                    <a:solidFill>
-                      <a:schemeClr val="bg2">
-                        <a:lumMod val="50000"/>
-                      </a:schemeClr>
-                    </a:solidFill>
-                  </a:rPr>
-                  <a:t>0.5</a:t>
-                </a:r>
-                <a:endParaRPr lang="en-US" altLang="zh-CN" sz="1200">
-                  <a:solidFill>
-                    <a:schemeClr val="bg2">
-                      <a:lumMod val="50000"/>
-                    </a:schemeClr>
-                  </a:solidFill>
-                </a:endParaRPr>
-              </a:p>
-            </p:txBody>
-          </p:sp>
-          <p:sp>
-            <p:nvSpPr>
-              <p:cNvPr id="31" name="文本框 30"/>
-              <p:cNvSpPr txBox="1"/>
-              <p:nvPr/>
-            </p:nvSpPr>
-            <p:spPr>
-              <a:xfrm>
-                <a:off x="7277" y="6990"/>
-                <a:ext cx="680" cy="434"/>
-              </a:xfrm>
-              <a:prstGeom prst="rect">
-                <a:avLst/>
-              </a:prstGeom>
-              <a:noFill/>
-            </p:spPr>
-            <p:txBody>
-              <a:bodyPr wrap="square" rtlCol="0">
-                <a:spAutoFit/>
-              </a:bodyPr>
-              <a:p>
-                <a:r>
-                  <a:rPr lang="en-US" altLang="zh-CN" sz="1200">
-                    <a:solidFill>
-                      <a:schemeClr val="bg2">
-                        <a:lumMod val="50000"/>
-                      </a:schemeClr>
-                    </a:solidFill>
-                  </a:rPr>
-                  <a:t>1.0</a:t>
-                </a:r>
-                <a:endParaRPr lang="en-US" altLang="zh-CN" sz="1200">
-                  <a:solidFill>
-                    <a:schemeClr val="bg2">
-                      <a:lumMod val="50000"/>
-                    </a:schemeClr>
-                  </a:solidFill>
-                </a:endParaRPr>
-              </a:p>
-            </p:txBody>
-          </p:sp>
-          <p:sp>
-            <p:nvSpPr>
-              <p:cNvPr id="32" name="圆角矩形 31"/>
+              <p:cNvPr id="53" name="椭圆 52"/>
               <p:cNvSpPr/>
               <p:nvPr/>
             </p:nvSpPr>
             <p:spPr>
               <a:xfrm>
-                <a:off x="2557" y="6606"/>
-                <a:ext cx="4720" cy="288"/>
-              </a:xfrm>
-              <a:prstGeom prst="roundRect">
-                <a:avLst/>
-              </a:prstGeom>
-              <a:solidFill>
-                <a:srgbClr val="1D9E75"/>
-              </a:solidFill>
-              <a:ln>
-                <a:noFill/>
-              </a:ln>
-            </p:spPr>
-            <p:style>
-              <a:lnRef idx="2">
-                <a:schemeClr val="accent1">
-                  <a:lumMod val="75000"/>
-                </a:schemeClr>
-              </a:lnRef>
-              <a:fillRef idx="1">
-                <a:schemeClr val="accent1"/>
-              </a:fillRef>
-              <a:effectRef idx="0">
-                <a:srgbClr val="FFFFFF"/>
-              </a:effectRef>
-              <a:fontRef idx="minor">
-                <a:schemeClr val="lt1"/>
-              </a:fontRef>
-            </p:style>
-            <p:txBody>
-              <a:bodyPr rtlCol="0" anchor="ctr"/>
-              <a:p>
-                <a:pPr algn="ctr"/>
-                <a:endParaRPr lang="zh-CN" altLang="en-US"/>
-              </a:p>
-            </p:txBody>
-          </p:sp>
-          <p:sp>
-            <p:nvSpPr>
-              <p:cNvPr id="33" name="圆角矩形 32"/>
-              <p:cNvSpPr/>
-              <p:nvPr/>
-            </p:nvSpPr>
-            <p:spPr>
-              <a:xfrm>
-                <a:off x="2557" y="6222"/>
-                <a:ext cx="3107" cy="288"/>
-              </a:xfrm>
-              <a:prstGeom prst="roundRect">
-                <a:avLst/>
-              </a:prstGeom>
-              <a:solidFill>
-                <a:srgbClr val="D3D1C7"/>
-              </a:solidFill>
-              <a:ln>
-                <a:noFill/>
-              </a:ln>
-            </p:spPr>
-            <p:style>
-              <a:lnRef idx="2">
-                <a:schemeClr val="accent1">
-                  <a:lumMod val="75000"/>
-                </a:schemeClr>
-              </a:lnRef>
-              <a:fillRef idx="1">
-                <a:schemeClr val="accent1"/>
-              </a:fillRef>
-              <a:effectRef idx="0">
-                <a:srgbClr val="FFFFFF"/>
-              </a:effectRef>
-              <a:fontRef idx="minor">
-                <a:schemeClr val="lt1"/>
-              </a:fontRef>
-            </p:style>
-            <p:txBody>
-              <a:bodyPr rtlCol="0" anchor="ctr"/>
-              <a:p>
-                <a:pPr algn="ctr"/>
-                <a:endParaRPr lang="zh-CN" altLang="en-US"/>
-              </a:p>
-            </p:txBody>
-          </p:sp>
-          <p:sp>
-            <p:nvSpPr>
-              <p:cNvPr id="34" name="圆角矩形 33"/>
-              <p:cNvSpPr/>
-              <p:nvPr/>
-            </p:nvSpPr>
-            <p:spPr>
-              <a:xfrm>
-                <a:off x="2557" y="5838"/>
-                <a:ext cx="4134" cy="288"/>
-              </a:xfrm>
-              <a:prstGeom prst="roundRect">
-                <a:avLst/>
-              </a:prstGeom>
-              <a:solidFill>
-                <a:srgbClr val="D3D1C7"/>
-              </a:solidFill>
-              <a:ln>
-                <a:noFill/>
-              </a:ln>
-            </p:spPr>
-            <p:style>
-              <a:lnRef idx="2">
-                <a:schemeClr val="accent1">
-                  <a:lumMod val="75000"/>
-                </a:schemeClr>
-              </a:lnRef>
-              <a:fillRef idx="1">
-                <a:schemeClr val="accent1"/>
-              </a:fillRef>
-              <a:effectRef idx="0">
-                <a:srgbClr val="FFFFFF"/>
-              </a:effectRef>
-              <a:fontRef idx="minor">
-                <a:schemeClr val="lt1"/>
-              </a:fontRef>
-            </p:style>
-            <p:txBody>
-              <a:bodyPr rtlCol="0" anchor="ctr"/>
-              <a:p>
-                <a:pPr algn="ctr"/>
-                <a:endParaRPr lang="zh-CN" altLang="en-US"/>
-              </a:p>
-            </p:txBody>
-          </p:sp>
-          <p:sp>
-            <p:nvSpPr>
-              <p:cNvPr id="35" name="圆角矩形 34"/>
-              <p:cNvSpPr/>
-              <p:nvPr/>
-            </p:nvSpPr>
-            <p:spPr>
-              <a:xfrm>
-                <a:off x="2553" y="5400"/>
-                <a:ext cx="3667" cy="288"/>
-              </a:xfrm>
-              <a:prstGeom prst="roundRect">
-                <a:avLst/>
-              </a:prstGeom>
-              <a:solidFill>
-                <a:srgbClr val="D3D1C7"/>
-              </a:solidFill>
-              <a:ln>
-                <a:noFill/>
-              </a:ln>
-            </p:spPr>
-            <p:style>
-              <a:lnRef idx="2">
-                <a:schemeClr val="accent1">
-                  <a:lumMod val="75000"/>
-                </a:schemeClr>
-              </a:lnRef>
-              <a:fillRef idx="1">
-                <a:schemeClr val="accent1"/>
-              </a:fillRef>
-              <a:effectRef idx="0">
-                <a:srgbClr val="FFFFFF"/>
-              </a:effectRef>
-              <a:fontRef idx="minor">
-                <a:schemeClr val="lt1"/>
-              </a:fontRef>
-            </p:style>
-            <p:txBody>
-              <a:bodyPr rtlCol="0" anchor="ctr"/>
-              <a:p>
-                <a:pPr algn="ctr"/>
-                <a:endParaRPr lang="zh-CN" altLang="en-US"/>
-              </a:p>
-            </p:txBody>
-          </p:sp>
-          <p:sp>
-            <p:nvSpPr>
-              <p:cNvPr id="36" name="圆角矩形 35"/>
-              <p:cNvSpPr/>
-              <p:nvPr/>
-            </p:nvSpPr>
-            <p:spPr>
-              <a:xfrm>
-                <a:off x="2557" y="4962"/>
-                <a:ext cx="3352" cy="288"/>
-              </a:xfrm>
-              <a:prstGeom prst="roundRect">
-                <a:avLst/>
-              </a:prstGeom>
-              <a:solidFill>
-                <a:srgbClr val="D3D1C7"/>
-              </a:solidFill>
-              <a:ln>
-                <a:noFill/>
-              </a:ln>
-            </p:spPr>
-            <p:style>
-              <a:lnRef idx="2">
-                <a:schemeClr val="accent1">
-                  <a:lumMod val="75000"/>
-                </a:schemeClr>
-              </a:lnRef>
-              <a:fillRef idx="1">
-                <a:schemeClr val="accent1"/>
-              </a:fillRef>
-              <a:effectRef idx="0">
-                <a:srgbClr val="FFFFFF"/>
-              </a:effectRef>
-              <a:fontRef idx="minor">
-                <a:schemeClr val="lt1"/>
-              </a:fontRef>
-            </p:style>
-            <p:txBody>
-              <a:bodyPr rtlCol="0" anchor="ctr"/>
-              <a:p>
-                <a:pPr algn="ctr"/>
-                <a:endParaRPr lang="zh-CN" altLang="en-US"/>
-              </a:p>
-            </p:txBody>
-          </p:sp>
-          <p:sp>
-            <p:nvSpPr>
-              <p:cNvPr id="38" name="文本框 37"/>
-              <p:cNvSpPr txBox="1"/>
-              <p:nvPr/>
-            </p:nvSpPr>
-            <p:spPr>
-              <a:xfrm>
-                <a:off x="1024" y="6498"/>
-                <a:ext cx="1721" cy="531"/>
-              </a:xfrm>
-              <a:prstGeom prst="rect">
-                <a:avLst/>
-              </a:prstGeom>
-              <a:noFill/>
-            </p:spPr>
-            <p:txBody>
-              <a:bodyPr wrap="square" rtlCol="0">
-                <a:spAutoFit/>
-              </a:bodyPr>
-              <a:p>
-                <a:r>
-                  <a:rPr lang="en-US" altLang="zh-CN" sz="1600" b="1">
-                    <a:solidFill>
-                      <a:srgbClr val="3AAA85"/>
-                    </a:solidFill>
-                    <a:latin typeface="Times New Roman" panose="02020603050405020304" charset="0"/>
-                    <a:cs typeface="Times New Roman" panose="02020603050405020304" charset="0"/>
-                  </a:rPr>
-                  <a:t>DEFEND</a:t>
-                </a:r>
-                <a:endParaRPr lang="en-US" altLang="zh-CN" sz="1600" b="1">
-                  <a:solidFill>
-                    <a:srgbClr val="3AAA85"/>
-                  </a:solidFill>
-                  <a:latin typeface="Times New Roman" panose="02020603050405020304" charset="0"/>
-                  <a:cs typeface="Times New Roman" panose="02020603050405020304" charset="0"/>
-                </a:endParaRPr>
-              </a:p>
-            </p:txBody>
-          </p:sp>
-          <p:sp>
-            <p:nvSpPr>
-              <p:cNvPr id="40" name="文本框 39"/>
-              <p:cNvSpPr txBox="1"/>
-              <p:nvPr/>
-            </p:nvSpPr>
-            <p:spPr>
-              <a:xfrm>
-                <a:off x="1371" y="4857"/>
-                <a:ext cx="1350" cy="531"/>
-              </a:xfrm>
-              <a:prstGeom prst="rect">
-                <a:avLst/>
-              </a:prstGeom>
-              <a:noFill/>
-            </p:spPr>
-            <p:txBody>
-              <a:bodyPr wrap="square" rtlCol="0">
-                <a:spAutoFit/>
-              </a:bodyPr>
-              <a:p>
-                <a:r>
-                  <a:rPr lang="en-US" altLang="zh-CN" sz="1600" b="1">
-                    <a:solidFill>
-                      <a:schemeClr val="bg2">
-                        <a:lumMod val="50000"/>
-                      </a:schemeClr>
-                    </a:solidFill>
-                    <a:latin typeface="Times New Roman" panose="02020603050405020304" charset="0"/>
-                    <a:cs typeface="Times New Roman" panose="02020603050405020304" charset="0"/>
-                  </a:rPr>
-                  <a:t>AGrail</a:t>
-                </a:r>
-                <a:endParaRPr lang="en-US" altLang="zh-CN" sz="1600" b="1">
-                  <a:solidFill>
-                    <a:schemeClr val="bg2">
-                      <a:lumMod val="50000"/>
-                    </a:schemeClr>
-                  </a:solidFill>
-                  <a:latin typeface="Times New Roman" panose="02020603050405020304" charset="0"/>
-                  <a:cs typeface="Times New Roman" panose="02020603050405020304" charset="0"/>
-                </a:endParaRPr>
-              </a:p>
-            </p:txBody>
-          </p:sp>
-          <p:sp>
-            <p:nvSpPr>
-              <p:cNvPr id="41" name="文本框 40"/>
-              <p:cNvSpPr txBox="1"/>
-              <p:nvPr/>
-            </p:nvSpPr>
-            <p:spPr>
-              <a:xfrm>
-                <a:off x="1136" y="5280"/>
-                <a:ext cx="1517" cy="531"/>
-              </a:xfrm>
-              <a:prstGeom prst="rect">
-                <a:avLst/>
-              </a:prstGeom>
-              <a:noFill/>
-            </p:spPr>
-            <p:txBody>
-              <a:bodyPr wrap="square" rtlCol="0">
-                <a:spAutoFit/>
-              </a:bodyPr>
-              <a:p>
-                <a:r>
-                  <a:rPr lang="en-US" altLang="zh-CN" sz="1600" b="1">
-                    <a:solidFill>
-                      <a:schemeClr val="bg2">
-                        <a:lumMod val="50000"/>
-                      </a:schemeClr>
-                    </a:solidFill>
-                    <a:latin typeface="Times New Roman" panose="02020603050405020304" charset="0"/>
-                    <a:cs typeface="Times New Roman" panose="02020603050405020304" charset="0"/>
-                  </a:rPr>
-                  <a:t>CoTSafe</a:t>
-                </a:r>
-                <a:endParaRPr lang="en-US" altLang="zh-CN" sz="1600" b="1">
-                  <a:solidFill>
-                    <a:schemeClr val="bg2">
-                      <a:lumMod val="50000"/>
-                    </a:schemeClr>
-                  </a:solidFill>
-                  <a:latin typeface="Times New Roman" panose="02020603050405020304" charset="0"/>
-                  <a:cs typeface="Times New Roman" panose="02020603050405020304" charset="0"/>
-                </a:endParaRPr>
-              </a:p>
-            </p:txBody>
-          </p:sp>
-          <p:sp>
-            <p:nvSpPr>
-              <p:cNvPr id="42" name="文本框 41"/>
-              <p:cNvSpPr txBox="1"/>
-              <p:nvPr/>
-            </p:nvSpPr>
-            <p:spPr>
-              <a:xfrm>
-                <a:off x="664" y="5691"/>
-                <a:ext cx="2009" cy="531"/>
-              </a:xfrm>
-              <a:prstGeom prst="rect">
-                <a:avLst/>
-              </a:prstGeom>
-              <a:noFill/>
-            </p:spPr>
-            <p:txBody>
-              <a:bodyPr wrap="square" rtlCol="0">
-                <a:spAutoFit/>
-              </a:bodyPr>
-              <a:p>
-                <a:r>
-                  <a:rPr lang="en-US" altLang="zh-CN" sz="1600" b="1">
-                    <a:solidFill>
-                      <a:schemeClr val="bg2">
-                        <a:lumMod val="50000"/>
-                      </a:schemeClr>
-                    </a:solidFill>
-                    <a:latin typeface="Times New Roman" panose="02020603050405020304" charset="0"/>
-                    <a:cs typeface="Times New Roman" panose="02020603050405020304" charset="0"/>
-                  </a:rPr>
-                  <a:t>ShieldAgent</a:t>
-                </a:r>
-                <a:endParaRPr lang="en-US" altLang="zh-CN" sz="1600" b="1">
-                  <a:solidFill>
-                    <a:schemeClr val="bg2">
-                      <a:lumMod val="50000"/>
-                    </a:schemeClr>
-                  </a:solidFill>
-                  <a:latin typeface="Times New Roman" panose="02020603050405020304" charset="0"/>
-                  <a:cs typeface="Times New Roman" panose="02020603050405020304" charset="0"/>
-                </a:endParaRPr>
-              </a:p>
-            </p:txBody>
-          </p:sp>
-          <p:sp>
-            <p:nvSpPr>
-              <p:cNvPr id="43" name="文本框 42"/>
-              <p:cNvSpPr txBox="1"/>
-              <p:nvPr/>
-            </p:nvSpPr>
-            <p:spPr>
-              <a:xfrm>
-                <a:off x="616" y="6075"/>
-                <a:ext cx="2086" cy="531"/>
-              </a:xfrm>
-              <a:prstGeom prst="rect">
-                <a:avLst/>
-              </a:prstGeom>
-              <a:noFill/>
-            </p:spPr>
-            <p:txBody>
-              <a:bodyPr wrap="square" rtlCol="0">
-                <a:spAutoFit/>
-              </a:bodyPr>
-              <a:p>
-                <a:r>
-                  <a:rPr lang="en-US" altLang="zh-CN" sz="1600" b="1">
-                    <a:solidFill>
-                      <a:schemeClr val="bg2">
-                        <a:lumMod val="50000"/>
-                      </a:schemeClr>
-                    </a:solidFill>
-                    <a:latin typeface="Times New Roman" panose="02020603050405020304" charset="0"/>
-                    <a:cs typeface="Times New Roman" panose="02020603050405020304" charset="0"/>
-                  </a:rPr>
-                  <a:t>GuardAgent</a:t>
-                </a:r>
-                <a:endParaRPr lang="en-US" altLang="zh-CN" sz="1600" b="1">
-                  <a:solidFill>
-                    <a:schemeClr val="bg2">
-                      <a:lumMod val="50000"/>
-                    </a:schemeClr>
-                  </a:solidFill>
-                  <a:latin typeface="Times New Roman" panose="02020603050405020304" charset="0"/>
-                  <a:cs typeface="Times New Roman" panose="02020603050405020304" charset="0"/>
-                </a:endParaRPr>
-              </a:p>
-            </p:txBody>
-          </p:sp>
-          <p:sp>
-            <p:nvSpPr>
-              <p:cNvPr id="44" name="文本框 43"/>
-              <p:cNvSpPr txBox="1"/>
-              <p:nvPr/>
-            </p:nvSpPr>
-            <p:spPr>
-              <a:xfrm>
-                <a:off x="7193" y="6510"/>
-                <a:ext cx="1169" cy="483"/>
-              </a:xfrm>
-              <a:prstGeom prst="rect">
-                <a:avLst/>
-              </a:prstGeom>
-              <a:noFill/>
-            </p:spPr>
-            <p:txBody>
-              <a:bodyPr wrap="square" rtlCol="0">
-                <a:spAutoFit/>
-              </a:bodyPr>
-              <a:p>
-                <a:r>
-                  <a:rPr lang="en-US" altLang="zh-CN" sz="1400" b="1">
-                    <a:solidFill>
-                      <a:srgbClr val="3A7367"/>
-                    </a:solidFill>
-                  </a:rPr>
-                  <a:t>0.924</a:t>
-                </a:r>
-                <a:endParaRPr lang="en-US" altLang="zh-CN" sz="1400" b="1">
-                  <a:solidFill>
-                    <a:srgbClr val="3A7367"/>
-                  </a:solidFill>
-                </a:endParaRPr>
-              </a:p>
-            </p:txBody>
-          </p:sp>
-          <p:sp>
-            <p:nvSpPr>
-              <p:cNvPr id="45" name="文本框 44"/>
-              <p:cNvSpPr txBox="1"/>
-              <p:nvPr/>
-            </p:nvSpPr>
-            <p:spPr>
-              <a:xfrm>
-                <a:off x="5557" y="6129"/>
-                <a:ext cx="1169" cy="483"/>
-              </a:xfrm>
-              <a:prstGeom prst="rect">
-                <a:avLst/>
-              </a:prstGeom>
-              <a:noFill/>
-            </p:spPr>
-            <p:txBody>
-              <a:bodyPr wrap="square" rtlCol="0">
-                <a:spAutoFit/>
-              </a:bodyPr>
-              <a:p>
-                <a:r>
-                  <a:rPr lang="en-US" altLang="zh-CN" sz="1400">
-                    <a:solidFill>
-                      <a:schemeClr val="bg2">
-                        <a:lumMod val="50000"/>
-                      </a:schemeClr>
-                    </a:solidFill>
-                  </a:rPr>
-                  <a:t>0.604</a:t>
-                </a:r>
-                <a:endParaRPr lang="en-US" altLang="zh-CN" sz="1400">
-                  <a:solidFill>
-                    <a:schemeClr val="bg2">
-                      <a:lumMod val="50000"/>
-                    </a:schemeClr>
-                  </a:solidFill>
-                </a:endParaRPr>
-              </a:p>
-            </p:txBody>
-          </p:sp>
-          <p:sp>
-            <p:nvSpPr>
-              <p:cNvPr id="47" name="文本框 46"/>
-              <p:cNvSpPr txBox="1"/>
-              <p:nvPr/>
-            </p:nvSpPr>
-            <p:spPr>
-              <a:xfrm>
-                <a:off x="6606" y="5739"/>
-                <a:ext cx="1169" cy="483"/>
-              </a:xfrm>
-              <a:prstGeom prst="rect">
-                <a:avLst/>
-              </a:prstGeom>
-              <a:noFill/>
-            </p:spPr>
-            <p:txBody>
-              <a:bodyPr wrap="square" rtlCol="0">
-                <a:spAutoFit/>
-              </a:bodyPr>
-              <a:p>
-                <a:r>
-                  <a:rPr lang="en-US" altLang="zh-CN" sz="1400">
-                    <a:solidFill>
-                      <a:schemeClr val="bg2">
-                        <a:lumMod val="50000"/>
-                      </a:schemeClr>
-                    </a:solidFill>
-                  </a:rPr>
-                  <a:t>0.832</a:t>
-                </a:r>
-                <a:endParaRPr lang="en-US" altLang="zh-CN" sz="1400">
-                  <a:solidFill>
-                    <a:schemeClr val="bg2">
-                      <a:lumMod val="50000"/>
-                    </a:schemeClr>
-                  </a:solidFill>
-                </a:endParaRPr>
-              </a:p>
-            </p:txBody>
-          </p:sp>
-          <p:sp>
-            <p:nvSpPr>
-              <p:cNvPr id="48" name="文本框 47"/>
-              <p:cNvSpPr txBox="1"/>
-              <p:nvPr/>
-            </p:nvSpPr>
-            <p:spPr>
-              <a:xfrm>
-                <a:off x="6127" y="5308"/>
-                <a:ext cx="1169" cy="483"/>
-              </a:xfrm>
-              <a:prstGeom prst="rect">
-                <a:avLst/>
-              </a:prstGeom>
-              <a:noFill/>
-            </p:spPr>
-            <p:txBody>
-              <a:bodyPr wrap="square" rtlCol="0">
-                <a:spAutoFit/>
-              </a:bodyPr>
-              <a:p>
-                <a:r>
-                  <a:rPr lang="en-US" altLang="zh-CN" sz="1400">
-                    <a:solidFill>
-                      <a:schemeClr val="bg2">
-                        <a:lumMod val="50000"/>
-                      </a:schemeClr>
-                    </a:solidFill>
-                  </a:rPr>
-                  <a:t>0.770</a:t>
-                </a:r>
-                <a:endParaRPr lang="en-US" altLang="zh-CN" sz="1400">
-                  <a:solidFill>
-                    <a:schemeClr val="bg2">
-                      <a:lumMod val="50000"/>
-                    </a:schemeClr>
-                  </a:solidFill>
-                </a:endParaRPr>
-              </a:p>
-            </p:txBody>
-          </p:sp>
-          <p:sp>
-            <p:nvSpPr>
-              <p:cNvPr id="49" name="文本框 48"/>
-              <p:cNvSpPr txBox="1"/>
-              <p:nvPr/>
-            </p:nvSpPr>
-            <p:spPr>
-              <a:xfrm>
-                <a:off x="5813" y="4866"/>
-                <a:ext cx="1169" cy="483"/>
-              </a:xfrm>
-              <a:prstGeom prst="rect">
-                <a:avLst/>
-              </a:prstGeom>
-              <a:noFill/>
-            </p:spPr>
-            <p:txBody>
-              <a:bodyPr wrap="square" rtlCol="0">
-                <a:spAutoFit/>
-              </a:bodyPr>
-              <a:p>
-                <a:r>
-                  <a:rPr lang="en-US" altLang="zh-CN" sz="1400">
-                    <a:solidFill>
-                      <a:schemeClr val="bg2">
-                        <a:lumMod val="50000"/>
-                      </a:schemeClr>
-                    </a:solidFill>
-                  </a:rPr>
-                  <a:t>0.707</a:t>
-                </a:r>
-                <a:endParaRPr lang="en-US" altLang="zh-CN" sz="1400">
-                  <a:solidFill>
-                    <a:schemeClr val="bg2">
-                      <a:lumMod val="50000"/>
-                    </a:schemeClr>
-                  </a:solidFill>
-                </a:endParaRPr>
-              </a:p>
-            </p:txBody>
-          </p:sp>
-        </p:grpSp>
-        <p:grpSp>
-          <p:nvGrpSpPr>
-            <p:cNvPr id="108" name="组合 107"/>
-            <p:cNvGrpSpPr/>
-            <p:nvPr/>
-          </p:nvGrpSpPr>
-          <p:grpSpPr>
-            <a:xfrm>
-              <a:off x="10259" y="4627"/>
-              <a:ext cx="7176" cy="2737"/>
-              <a:chOff x="10535" y="4710"/>
-              <a:chExt cx="7176" cy="2737"/>
-            </a:xfrm>
-          </p:grpSpPr>
-          <p:cxnSp>
-            <p:nvCxnSpPr>
-              <p:cNvPr id="51" name="直接连接符 50"/>
-              <p:cNvCxnSpPr/>
-              <p:nvPr/>
-            </p:nvCxnSpPr>
-            <p:spPr>
-              <a:xfrm>
-                <a:off x="11041" y="4710"/>
-                <a:ext cx="0" cy="2292"/>
-              </a:xfrm>
-              <a:prstGeom prst="line">
-                <a:avLst/>
-              </a:prstGeom>
-              <a:ln>
-                <a:solidFill>
-                  <a:srgbClr val="D3D1C7"/>
-                </a:solidFill>
-              </a:ln>
-            </p:spPr>
-            <p:style>
-              <a:lnRef idx="2">
-                <a:schemeClr val="accent1"/>
-              </a:lnRef>
-              <a:fillRef idx="0">
-                <a:srgbClr val="FFFFFF"/>
-              </a:fillRef>
-              <a:effectRef idx="0">
-                <a:srgbClr val="FFFFFF"/>
-              </a:effectRef>
-              <a:fontRef idx="minor">
-                <a:schemeClr val="tx1"/>
-              </a:fontRef>
-            </p:style>
-          </p:cxnSp>
-          <p:cxnSp>
-            <p:nvCxnSpPr>
-              <p:cNvPr id="52" name="直接连接符 51"/>
-              <p:cNvCxnSpPr/>
-              <p:nvPr/>
-            </p:nvCxnSpPr>
-            <p:spPr>
-              <a:xfrm flipV="1">
-                <a:off x="11044" y="6968"/>
-                <a:ext cx="5270" cy="28"/>
-              </a:xfrm>
-              <a:prstGeom prst="line">
-                <a:avLst/>
-              </a:prstGeom>
-              <a:ln>
-                <a:solidFill>
-                  <a:srgbClr val="D3D1C7"/>
-                </a:solidFill>
-              </a:ln>
-            </p:spPr>
-            <p:style>
-              <a:lnRef idx="2">
-                <a:schemeClr val="accent1"/>
-              </a:lnRef>
-              <a:fillRef idx="0">
-                <a:srgbClr val="FFFFFF"/>
-              </a:fillRef>
-              <a:effectRef idx="0">
-                <a:srgbClr val="FFFFFF"/>
-              </a:effectRef>
-              <a:fontRef idx="minor">
-                <a:schemeClr val="tx1"/>
-              </a:fontRef>
-            </p:style>
-          </p:cxnSp>
-          <p:sp>
-            <p:nvSpPr>
-              <p:cNvPr id="58" name="文本框 57"/>
-              <p:cNvSpPr txBox="1"/>
-              <p:nvPr/>
-            </p:nvSpPr>
-            <p:spPr>
-              <a:xfrm>
-                <a:off x="11099" y="6941"/>
-                <a:ext cx="856" cy="483"/>
-              </a:xfrm>
-              <a:prstGeom prst="rect">
-                <a:avLst/>
-              </a:prstGeom>
-              <a:noFill/>
-            </p:spPr>
-            <p:txBody>
-              <a:bodyPr wrap="square" rtlCol="0">
-                <a:spAutoFit/>
-              </a:bodyPr>
-              <a:p>
-                <a:r>
-                  <a:rPr lang="en-US" altLang="zh-CN" sz="1400">
-                    <a:solidFill>
-                      <a:schemeClr val="bg2">
-                        <a:lumMod val="50000"/>
-                      </a:schemeClr>
-                    </a:solidFill>
-                    <a:latin typeface="Times New Roman" panose="02020603050405020304" charset="0"/>
-                    <a:cs typeface="Times New Roman" panose="02020603050405020304" charset="0"/>
-                  </a:rPr>
-                  <a:t>App</a:t>
-                </a:r>
-                <a:endParaRPr lang="en-US" altLang="zh-CN" sz="1400">
-                  <a:solidFill>
-                    <a:schemeClr val="bg2">
-                      <a:lumMod val="50000"/>
-                    </a:schemeClr>
-                  </a:solidFill>
-                  <a:latin typeface="Times New Roman" panose="02020603050405020304" charset="0"/>
-                  <a:cs typeface="Times New Roman" panose="02020603050405020304" charset="0"/>
-                </a:endParaRPr>
-              </a:p>
-            </p:txBody>
-          </p:sp>
-          <p:sp>
-            <p:nvSpPr>
-              <p:cNvPr id="59" name="文本框 58"/>
-              <p:cNvSpPr txBox="1"/>
-              <p:nvPr/>
-            </p:nvSpPr>
-            <p:spPr>
-              <a:xfrm>
-                <a:off x="11932" y="6941"/>
-                <a:ext cx="856" cy="483"/>
-              </a:xfrm>
-              <a:prstGeom prst="rect">
-                <a:avLst/>
-              </a:prstGeom>
-              <a:noFill/>
-            </p:spPr>
-            <p:txBody>
-              <a:bodyPr wrap="square" rtlCol="0">
-                <a:spAutoFit/>
-              </a:bodyPr>
-              <a:p>
-                <a:r>
-                  <a:rPr lang="en-US" altLang="zh-CN" sz="1400">
-                    <a:solidFill>
-                      <a:schemeClr val="bg2">
-                        <a:lumMod val="50000"/>
-                      </a:schemeClr>
-                    </a:solidFill>
-                    <a:latin typeface="Times New Roman" panose="02020603050405020304" charset="0"/>
-                    <a:cs typeface="Times New Roman" panose="02020603050405020304" charset="0"/>
-                  </a:rPr>
-                  <a:t>Prog</a:t>
-                </a:r>
-                <a:endParaRPr lang="en-US" altLang="zh-CN" sz="1400">
-                  <a:solidFill>
-                    <a:schemeClr val="bg2">
-                      <a:lumMod val="50000"/>
-                    </a:schemeClr>
-                  </a:solidFill>
-                  <a:latin typeface="Times New Roman" panose="02020603050405020304" charset="0"/>
-                  <a:cs typeface="Times New Roman" panose="02020603050405020304" charset="0"/>
-                </a:endParaRPr>
-              </a:p>
-            </p:txBody>
-          </p:sp>
-          <p:sp>
-            <p:nvSpPr>
-              <p:cNvPr id="60" name="文本框 59"/>
-              <p:cNvSpPr txBox="1"/>
-              <p:nvPr/>
-            </p:nvSpPr>
-            <p:spPr>
-              <a:xfrm>
-                <a:off x="12828" y="6941"/>
-                <a:ext cx="856" cy="483"/>
-              </a:xfrm>
-              <a:prstGeom prst="rect">
-                <a:avLst/>
-              </a:prstGeom>
-              <a:noFill/>
-            </p:spPr>
-            <p:txBody>
-              <a:bodyPr wrap="square" rtlCol="0">
-                <a:spAutoFit/>
-              </a:bodyPr>
-              <a:p>
-                <a:r>
-                  <a:rPr lang="en-US" altLang="zh-CN" sz="1400">
-                    <a:solidFill>
-                      <a:schemeClr val="bg2">
-                        <a:lumMod val="50000"/>
-                      </a:schemeClr>
-                    </a:solidFill>
-                    <a:latin typeface="Times New Roman" panose="02020603050405020304" charset="0"/>
-                    <a:cs typeface="Times New Roman" panose="02020603050405020304" charset="0"/>
-                  </a:rPr>
-                  <a:t>IoT</a:t>
-                </a:r>
-                <a:endParaRPr lang="en-US" altLang="zh-CN" sz="1400">
-                  <a:solidFill>
-                    <a:schemeClr val="bg2">
-                      <a:lumMod val="50000"/>
-                    </a:schemeClr>
-                  </a:solidFill>
-                  <a:latin typeface="Times New Roman" panose="02020603050405020304" charset="0"/>
-                  <a:cs typeface="Times New Roman" panose="02020603050405020304" charset="0"/>
-                </a:endParaRPr>
-              </a:p>
-            </p:txBody>
-          </p:sp>
-          <p:sp>
-            <p:nvSpPr>
-              <p:cNvPr id="61" name="文本框 60"/>
-              <p:cNvSpPr txBox="1"/>
-              <p:nvPr/>
-            </p:nvSpPr>
-            <p:spPr>
-              <a:xfrm>
-                <a:off x="13604" y="6933"/>
-                <a:ext cx="856" cy="507"/>
-              </a:xfrm>
-              <a:prstGeom prst="rect">
-                <a:avLst/>
-              </a:prstGeom>
-              <a:noFill/>
-            </p:spPr>
-            <p:txBody>
-              <a:bodyPr wrap="square" rtlCol="0">
-                <a:spAutoFit/>
-              </a:bodyPr>
-              <a:p>
-                <a:r>
-                  <a:rPr lang="en-US" altLang="zh-CN" sz="1500">
-                    <a:solidFill>
-                      <a:schemeClr val="bg2">
-                        <a:lumMod val="50000"/>
-                      </a:schemeClr>
-                    </a:solidFill>
-                    <a:latin typeface="Times New Roman" panose="02020603050405020304" charset="0"/>
-                    <a:cs typeface="Times New Roman" panose="02020603050405020304" charset="0"/>
-                  </a:rPr>
-                  <a:t>Fin</a:t>
-                </a:r>
-                <a:endParaRPr lang="en-US" altLang="zh-CN" sz="1500">
-                  <a:solidFill>
-                    <a:schemeClr val="bg2">
-                      <a:lumMod val="50000"/>
-                    </a:schemeClr>
-                  </a:solidFill>
-                  <a:latin typeface="Times New Roman" panose="02020603050405020304" charset="0"/>
-                  <a:cs typeface="Times New Roman" panose="02020603050405020304" charset="0"/>
-                </a:endParaRPr>
-              </a:p>
-            </p:txBody>
-          </p:sp>
-          <p:sp>
-            <p:nvSpPr>
-              <p:cNvPr id="62" name="文本框 61"/>
-              <p:cNvSpPr txBox="1"/>
-              <p:nvPr/>
-            </p:nvSpPr>
-            <p:spPr>
-              <a:xfrm>
-                <a:off x="14298" y="6941"/>
-                <a:ext cx="856" cy="507"/>
-              </a:xfrm>
-              <a:prstGeom prst="rect">
-                <a:avLst/>
-              </a:prstGeom>
-              <a:noFill/>
-            </p:spPr>
-            <p:txBody>
-              <a:bodyPr wrap="square" rtlCol="0">
-                <a:spAutoFit/>
-              </a:bodyPr>
-              <a:p>
-                <a:r>
-                  <a:rPr lang="en-US" altLang="zh-CN" sz="1500">
-                    <a:solidFill>
-                      <a:schemeClr val="bg2">
-                        <a:lumMod val="50000"/>
-                      </a:schemeClr>
-                    </a:solidFill>
-                    <a:latin typeface="Times New Roman" panose="02020603050405020304" charset="0"/>
-                    <a:cs typeface="Times New Roman" panose="02020603050405020304" charset="0"/>
-                  </a:rPr>
-                  <a:t>Web</a:t>
-                </a:r>
-                <a:endParaRPr lang="en-US" altLang="zh-CN" sz="1500">
-                  <a:solidFill>
-                    <a:schemeClr val="bg2">
-                      <a:lumMod val="50000"/>
-                    </a:schemeClr>
-                  </a:solidFill>
-                  <a:latin typeface="Times New Roman" panose="02020603050405020304" charset="0"/>
-                  <a:cs typeface="Times New Roman" panose="02020603050405020304" charset="0"/>
-                </a:endParaRPr>
-              </a:p>
-            </p:txBody>
-          </p:sp>
-          <p:grpSp>
-            <p:nvGrpSpPr>
-              <p:cNvPr id="67" name="组合 66"/>
-              <p:cNvGrpSpPr/>
-              <p:nvPr/>
-            </p:nvGrpSpPr>
-            <p:grpSpPr>
-              <a:xfrm rot="0">
-                <a:off x="11310" y="4778"/>
-                <a:ext cx="3574" cy="530"/>
-                <a:chOff x="11310" y="4778"/>
-                <a:chExt cx="3574" cy="530"/>
-              </a:xfrm>
-            </p:grpSpPr>
-            <p:sp>
-              <p:nvSpPr>
-                <p:cNvPr id="53" name="椭圆 52"/>
-                <p:cNvSpPr/>
-                <p:nvPr/>
-              </p:nvSpPr>
-              <p:spPr>
-                <a:xfrm>
-                  <a:off x="11310" y="4962"/>
-                  <a:ext cx="280" cy="280"/>
-                </a:xfrm>
-                <a:prstGeom prst="ellipse">
-                  <a:avLst/>
-                </a:prstGeom>
-                <a:solidFill>
-                  <a:srgbClr val="1D9E75"/>
-                </a:solidFill>
-                <a:ln>
-                  <a:solidFill>
-                    <a:srgbClr val="1F6052"/>
-                  </a:solidFill>
-                </a:ln>
-              </p:spPr>
-              <p:style>
-                <a:lnRef idx="2">
-                  <a:schemeClr val="accent1">
-                    <a:lumMod val="75000"/>
-                  </a:schemeClr>
-                </a:lnRef>
-                <a:fillRef idx="1">
-                  <a:schemeClr val="accent1"/>
-                </a:fillRef>
-                <a:effectRef idx="0">
-                  <a:srgbClr val="FFFFFF"/>
-                </a:effectRef>
-                <a:fontRef idx="minor">
-                  <a:schemeClr val="lt1"/>
-                </a:fontRef>
-              </p:style>
-              <p:txBody>
-                <a:bodyPr rtlCol="0" anchor="ctr"/>
-                <a:p>
-                  <a:pPr algn="ctr"/>
-                  <a:endParaRPr lang="zh-CN" altLang="en-US"/>
-                </a:p>
-              </p:txBody>
-            </p:sp>
-            <p:sp>
-              <p:nvSpPr>
-                <p:cNvPr id="54" name="椭圆 53"/>
-                <p:cNvSpPr/>
-                <p:nvPr/>
-              </p:nvSpPr>
-              <p:spPr>
-                <a:xfrm>
-                  <a:off x="12100" y="4778"/>
-                  <a:ext cx="280" cy="280"/>
-                </a:xfrm>
-                <a:prstGeom prst="ellipse">
-                  <a:avLst/>
-                </a:prstGeom>
-                <a:solidFill>
-                  <a:srgbClr val="1D9E75"/>
-                </a:solidFill>
-                <a:ln>
-                  <a:solidFill>
-                    <a:srgbClr val="1F6052"/>
-                  </a:solidFill>
-                </a:ln>
-              </p:spPr>
-              <p:style>
-                <a:lnRef idx="2">
-                  <a:schemeClr val="accent1">
-                    <a:lumMod val="75000"/>
-                  </a:schemeClr>
-                </a:lnRef>
-                <a:fillRef idx="1">
-                  <a:schemeClr val="accent1"/>
-                </a:fillRef>
-                <a:effectRef idx="0">
-                  <a:srgbClr val="FFFFFF"/>
-                </a:effectRef>
-                <a:fontRef idx="minor">
-                  <a:schemeClr val="lt1"/>
-                </a:fontRef>
-              </p:style>
-              <p:txBody>
-                <a:bodyPr rtlCol="0" anchor="ctr"/>
-                <a:p>
-                  <a:pPr algn="ctr"/>
-                  <a:endParaRPr lang="zh-CN" altLang="en-US"/>
-                </a:p>
-              </p:txBody>
-            </p:sp>
-            <p:sp>
-              <p:nvSpPr>
-                <p:cNvPr id="55" name="椭圆 54"/>
-                <p:cNvSpPr/>
-                <p:nvPr/>
-              </p:nvSpPr>
-              <p:spPr>
-                <a:xfrm>
-                  <a:off x="12964" y="5028"/>
-                  <a:ext cx="280" cy="280"/>
-                </a:xfrm>
-                <a:prstGeom prst="ellipse">
-                  <a:avLst/>
-                </a:prstGeom>
-                <a:solidFill>
-                  <a:srgbClr val="1D9E75"/>
-                </a:solidFill>
-                <a:ln>
-                  <a:solidFill>
-                    <a:srgbClr val="1F6052"/>
-                  </a:solidFill>
-                </a:ln>
-              </p:spPr>
-              <p:style>
-                <a:lnRef idx="2">
-                  <a:schemeClr val="accent1">
-                    <a:lumMod val="75000"/>
-                  </a:schemeClr>
-                </a:lnRef>
-                <a:fillRef idx="1">
-                  <a:schemeClr val="accent1"/>
-                </a:fillRef>
-                <a:effectRef idx="0">
-                  <a:srgbClr val="FFFFFF"/>
-                </a:effectRef>
-                <a:fontRef idx="minor">
-                  <a:schemeClr val="lt1"/>
-                </a:fontRef>
-              </p:style>
-              <p:txBody>
-                <a:bodyPr rtlCol="0" anchor="ctr"/>
-                <a:p>
-                  <a:pPr algn="ctr"/>
-                  <a:endParaRPr lang="zh-CN" altLang="en-US"/>
-                </a:p>
-              </p:txBody>
-            </p:sp>
-            <p:sp>
-              <p:nvSpPr>
-                <p:cNvPr id="56" name="椭圆 55"/>
-                <p:cNvSpPr/>
-                <p:nvPr/>
-              </p:nvSpPr>
-              <p:spPr>
-                <a:xfrm>
-                  <a:off x="13779" y="4866"/>
-                  <a:ext cx="280" cy="280"/>
-                </a:xfrm>
-                <a:prstGeom prst="ellipse">
-                  <a:avLst/>
-                </a:prstGeom>
-                <a:solidFill>
-                  <a:srgbClr val="1D9E75"/>
-                </a:solidFill>
-                <a:ln>
-                  <a:solidFill>
-                    <a:srgbClr val="1F6052"/>
-                  </a:solidFill>
-                </a:ln>
-              </p:spPr>
-              <p:style>
-                <a:lnRef idx="2">
-                  <a:schemeClr val="accent1">
-                    <a:lumMod val="75000"/>
-                  </a:schemeClr>
-                </a:lnRef>
-                <a:fillRef idx="1">
-                  <a:schemeClr val="accent1"/>
-                </a:fillRef>
-                <a:effectRef idx="0">
-                  <a:srgbClr val="FFFFFF"/>
-                </a:effectRef>
-                <a:fontRef idx="minor">
-                  <a:schemeClr val="lt1"/>
-                </a:fontRef>
-              </p:style>
-              <p:txBody>
-                <a:bodyPr rtlCol="0" anchor="ctr"/>
-                <a:p>
-                  <a:pPr algn="ctr"/>
-                  <a:endParaRPr lang="zh-CN" altLang="en-US"/>
-                </a:p>
-              </p:txBody>
-            </p:sp>
-            <p:sp>
-              <p:nvSpPr>
-                <p:cNvPr id="57" name="椭圆 56"/>
-                <p:cNvSpPr/>
-                <p:nvPr/>
-              </p:nvSpPr>
-              <p:spPr>
-                <a:xfrm>
-                  <a:off x="14604" y="4778"/>
-                  <a:ext cx="280" cy="280"/>
-                </a:xfrm>
-                <a:prstGeom prst="ellipse">
-                  <a:avLst/>
-                </a:prstGeom>
-                <a:solidFill>
-                  <a:srgbClr val="1D9E75"/>
-                </a:solidFill>
-                <a:ln>
-                  <a:solidFill>
-                    <a:srgbClr val="1F6052"/>
-                  </a:solidFill>
-                </a:ln>
-              </p:spPr>
-              <p:style>
-                <a:lnRef idx="2">
-                  <a:schemeClr val="accent1">
-                    <a:lumMod val="75000"/>
-                  </a:schemeClr>
-                </a:lnRef>
-                <a:fillRef idx="1">
-                  <a:schemeClr val="accent1"/>
-                </a:fillRef>
-                <a:effectRef idx="0">
-                  <a:srgbClr val="FFFFFF"/>
-                </a:effectRef>
-                <a:fontRef idx="minor">
-                  <a:schemeClr val="lt1"/>
-                </a:fontRef>
-              </p:style>
-              <p:txBody>
-                <a:bodyPr rtlCol="0" anchor="ctr"/>
-                <a:p>
-                  <a:pPr algn="ctr"/>
-                  <a:endParaRPr lang="zh-CN" altLang="en-US"/>
-                </a:p>
-              </p:txBody>
-            </p:sp>
-            <p:cxnSp>
-              <p:nvCxnSpPr>
-                <p:cNvPr id="63" name="直接连接符 62"/>
-                <p:cNvCxnSpPr>
-                  <a:stCxn id="53" idx="6"/>
-                  <a:endCxn id="54" idx="2"/>
-                </p:cNvCxnSpPr>
-                <p:nvPr/>
-              </p:nvCxnSpPr>
-              <p:spPr>
-                <a:xfrm flipV="1">
-                  <a:off x="11590" y="4918"/>
-                  <a:ext cx="510" cy="184"/>
-                </a:xfrm>
-                <a:prstGeom prst="line">
-                  <a:avLst/>
-                </a:prstGeom>
-                <a:ln w="22225">
-                  <a:solidFill>
-                    <a:srgbClr val="36A883"/>
-                  </a:solidFill>
-                </a:ln>
-              </p:spPr>
-              <p:style>
-                <a:lnRef idx="2">
-                  <a:schemeClr val="accent1"/>
-                </a:lnRef>
-                <a:fillRef idx="0">
-                  <a:srgbClr val="FFFFFF"/>
-                </a:fillRef>
-                <a:effectRef idx="0">
-                  <a:srgbClr val="FFFFFF"/>
-                </a:effectRef>
-                <a:fontRef idx="minor">
-                  <a:schemeClr val="tx1"/>
-                </a:fontRef>
-              </p:style>
-            </p:cxnSp>
-            <p:cxnSp>
-              <p:nvCxnSpPr>
-                <p:cNvPr id="64" name="直接连接符 63"/>
-                <p:cNvCxnSpPr>
-                  <a:stCxn id="55" idx="2"/>
-                  <a:endCxn id="54" idx="6"/>
-                </p:cNvCxnSpPr>
-                <p:nvPr/>
-              </p:nvCxnSpPr>
-              <p:spPr>
-                <a:xfrm flipH="1" flipV="1">
-                  <a:off x="12380" y="4918"/>
-                  <a:ext cx="584" cy="250"/>
-                </a:xfrm>
-                <a:prstGeom prst="line">
-                  <a:avLst/>
-                </a:prstGeom>
-                <a:ln w="22225">
-                  <a:solidFill>
-                    <a:srgbClr val="36A883"/>
-                  </a:solidFill>
-                </a:ln>
-              </p:spPr>
-              <p:style>
-                <a:lnRef idx="2">
-                  <a:schemeClr val="accent1"/>
-                </a:lnRef>
-                <a:fillRef idx="0">
-                  <a:srgbClr val="FFFFFF"/>
-                </a:fillRef>
-                <a:effectRef idx="0">
-                  <a:srgbClr val="FFFFFF"/>
-                </a:effectRef>
-                <a:fontRef idx="minor">
-                  <a:schemeClr val="tx1"/>
-                </a:fontRef>
-              </p:style>
-            </p:cxnSp>
-            <p:cxnSp>
-              <p:nvCxnSpPr>
-                <p:cNvPr id="65" name="直接连接符 64"/>
-                <p:cNvCxnSpPr>
-                  <a:stCxn id="55" idx="6"/>
-                  <a:endCxn id="56" idx="2"/>
-                </p:cNvCxnSpPr>
-                <p:nvPr/>
-              </p:nvCxnSpPr>
-              <p:spPr>
-                <a:xfrm flipV="1">
-                  <a:off x="13244" y="5006"/>
-                  <a:ext cx="535" cy="162"/>
-                </a:xfrm>
-                <a:prstGeom prst="line">
-                  <a:avLst/>
-                </a:prstGeom>
-                <a:ln w="22225">
-                  <a:solidFill>
-                    <a:srgbClr val="36A883"/>
-                  </a:solidFill>
-                </a:ln>
-              </p:spPr>
-              <p:style>
-                <a:lnRef idx="2">
-                  <a:schemeClr val="accent1"/>
-                </a:lnRef>
-                <a:fillRef idx="0">
-                  <a:srgbClr val="FFFFFF"/>
-                </a:fillRef>
-                <a:effectRef idx="0">
-                  <a:srgbClr val="FFFFFF"/>
-                </a:effectRef>
-                <a:fontRef idx="minor">
-                  <a:schemeClr val="tx1"/>
-                </a:fontRef>
-              </p:style>
-            </p:cxnSp>
-            <p:cxnSp>
-              <p:nvCxnSpPr>
-                <p:cNvPr id="66" name="直接连接符 65"/>
-                <p:cNvCxnSpPr>
-                  <a:stCxn id="56" idx="6"/>
-                  <a:endCxn id="57" idx="2"/>
-                </p:cNvCxnSpPr>
-                <p:nvPr/>
-              </p:nvCxnSpPr>
-              <p:spPr>
-                <a:xfrm flipV="1">
-                  <a:off x="14059" y="4918"/>
-                  <a:ext cx="545" cy="88"/>
-                </a:xfrm>
-                <a:prstGeom prst="line">
-                  <a:avLst/>
-                </a:prstGeom>
-                <a:ln w="22225">
-                  <a:solidFill>
-                    <a:srgbClr val="36A883"/>
-                  </a:solidFill>
-                </a:ln>
-              </p:spPr>
-              <p:style>
-                <a:lnRef idx="2">
-                  <a:schemeClr val="accent1"/>
-                </a:lnRef>
-                <a:fillRef idx="0">
-                  <a:srgbClr val="FFFFFF"/>
-                </a:fillRef>
-                <a:effectRef idx="0">
-                  <a:srgbClr val="FFFFFF"/>
-                </a:effectRef>
-                <a:fontRef idx="minor">
-                  <a:schemeClr val="tx1"/>
-                </a:fontRef>
-              </p:style>
-            </p:cxnSp>
-          </p:grpSp>
-          <p:grpSp>
-            <p:nvGrpSpPr>
-              <p:cNvPr id="79" name="组合 78"/>
-              <p:cNvGrpSpPr/>
-              <p:nvPr/>
-            </p:nvGrpSpPr>
-            <p:grpSpPr>
-              <a:xfrm rot="0">
-                <a:off x="11310" y="5368"/>
-                <a:ext cx="3574" cy="1410"/>
-                <a:chOff x="11310" y="5368"/>
-                <a:chExt cx="3574" cy="1410"/>
-              </a:xfrm>
-            </p:grpSpPr>
-            <p:sp>
-              <p:nvSpPr>
-                <p:cNvPr id="70" name="椭圆 69"/>
-                <p:cNvSpPr/>
-                <p:nvPr/>
-              </p:nvSpPr>
-              <p:spPr>
-                <a:xfrm>
-                  <a:off x="11310" y="5608"/>
-                  <a:ext cx="280" cy="280"/>
-                </a:xfrm>
-                <a:prstGeom prst="ellipse">
-                  <a:avLst/>
-                </a:prstGeom>
-                <a:solidFill>
-                  <a:srgbClr val="D3D1C7"/>
-                </a:solidFill>
-                <a:ln>
-                  <a:solidFill>
-                    <a:srgbClr val="B5B3AD"/>
-                  </a:solidFill>
-                </a:ln>
-              </p:spPr>
-              <p:style>
-                <a:lnRef idx="2">
-                  <a:schemeClr val="accent1">
-                    <a:lumMod val="75000"/>
-                  </a:schemeClr>
-                </a:lnRef>
-                <a:fillRef idx="1">
-                  <a:schemeClr val="accent1"/>
-                </a:fillRef>
-                <a:effectRef idx="0">
-                  <a:srgbClr val="FFFFFF"/>
-                </a:effectRef>
-                <a:fontRef idx="minor">
-                  <a:schemeClr val="lt1"/>
-                </a:fontRef>
-              </p:style>
-              <p:txBody>
-                <a:bodyPr rtlCol="0" anchor="ctr"/>
-                <a:p>
-                  <a:pPr algn="ctr"/>
-                  <a:endParaRPr lang="zh-CN" altLang="en-US"/>
-                </a:p>
-              </p:txBody>
-            </p:sp>
-            <p:sp>
-              <p:nvSpPr>
-                <p:cNvPr id="71" name="椭圆 70"/>
-                <p:cNvSpPr/>
-                <p:nvPr/>
-              </p:nvSpPr>
-              <p:spPr>
-                <a:xfrm>
-                  <a:off x="12100" y="5368"/>
-                  <a:ext cx="280" cy="280"/>
-                </a:xfrm>
-                <a:prstGeom prst="ellipse">
-                  <a:avLst/>
-                </a:prstGeom>
-                <a:solidFill>
-                  <a:srgbClr val="D3D1C7"/>
-                </a:solidFill>
-                <a:ln>
-                  <a:solidFill>
-                    <a:srgbClr val="B5B3AD"/>
-                  </a:solidFill>
-                </a:ln>
-              </p:spPr>
-              <p:style>
-                <a:lnRef idx="2">
-                  <a:schemeClr val="accent1">
-                    <a:lumMod val="75000"/>
-                  </a:schemeClr>
-                </a:lnRef>
-                <a:fillRef idx="1">
-                  <a:schemeClr val="accent1"/>
-                </a:fillRef>
-                <a:effectRef idx="0">
-                  <a:srgbClr val="FFFFFF"/>
-                </a:effectRef>
-                <a:fontRef idx="minor">
-                  <a:schemeClr val="lt1"/>
-                </a:fontRef>
-              </p:style>
-              <p:txBody>
-                <a:bodyPr rtlCol="0" anchor="ctr"/>
-                <a:p>
-                  <a:pPr algn="ctr"/>
-                  <a:endParaRPr lang="zh-CN" altLang="en-US"/>
-                </a:p>
-              </p:txBody>
-            </p:sp>
-            <p:sp>
-              <p:nvSpPr>
-                <p:cNvPr id="72" name="椭圆 71"/>
-                <p:cNvSpPr/>
-                <p:nvPr/>
-              </p:nvSpPr>
-              <p:spPr>
-                <a:xfrm>
-                  <a:off x="12964" y="6434"/>
-                  <a:ext cx="280" cy="280"/>
-                </a:xfrm>
-                <a:prstGeom prst="ellipse">
-                  <a:avLst/>
-                </a:prstGeom>
-                <a:solidFill>
-                  <a:srgbClr val="D3D1C7"/>
-                </a:solidFill>
-                <a:ln>
-                  <a:solidFill>
-                    <a:srgbClr val="B5B3AD"/>
-                  </a:solidFill>
-                </a:ln>
-              </p:spPr>
-              <p:style>
-                <a:lnRef idx="2">
-                  <a:schemeClr val="accent1">
-                    <a:lumMod val="75000"/>
-                  </a:schemeClr>
-                </a:lnRef>
-                <a:fillRef idx="1">
-                  <a:schemeClr val="accent1"/>
-                </a:fillRef>
-                <a:effectRef idx="0">
-                  <a:srgbClr val="FFFFFF"/>
-                </a:effectRef>
-                <a:fontRef idx="minor">
-                  <a:schemeClr val="lt1"/>
-                </a:fontRef>
-              </p:style>
-              <p:txBody>
-                <a:bodyPr rtlCol="0" anchor="ctr"/>
-                <a:p>
-                  <a:pPr algn="ctr"/>
-                  <a:endParaRPr lang="zh-CN" altLang="en-US"/>
-                </a:p>
-              </p:txBody>
-            </p:sp>
-            <p:sp>
-              <p:nvSpPr>
-                <p:cNvPr id="73" name="椭圆 72"/>
-                <p:cNvSpPr/>
-                <p:nvPr/>
-              </p:nvSpPr>
-              <p:spPr>
-                <a:xfrm>
-                  <a:off x="13779" y="6498"/>
-                  <a:ext cx="280" cy="280"/>
-                </a:xfrm>
-                <a:prstGeom prst="ellipse">
-                  <a:avLst/>
-                </a:prstGeom>
-                <a:solidFill>
-                  <a:srgbClr val="D3D1C7"/>
-                </a:solidFill>
-                <a:ln>
-                  <a:solidFill>
-                    <a:srgbClr val="B5B3AD"/>
-                  </a:solidFill>
-                </a:ln>
-              </p:spPr>
-              <p:style>
-                <a:lnRef idx="2">
-                  <a:schemeClr val="accent1">
-                    <a:lumMod val="75000"/>
-                  </a:schemeClr>
-                </a:lnRef>
-                <a:fillRef idx="1">
-                  <a:schemeClr val="accent1"/>
-                </a:fillRef>
-                <a:effectRef idx="0">
-                  <a:srgbClr val="FFFFFF"/>
-                </a:effectRef>
-                <a:fontRef idx="minor">
-                  <a:schemeClr val="lt1"/>
-                </a:fontRef>
-              </p:style>
-              <p:txBody>
-                <a:bodyPr rtlCol="0" anchor="ctr"/>
-                <a:p>
-                  <a:pPr algn="ctr"/>
-                  <a:endParaRPr lang="zh-CN" altLang="en-US"/>
-                </a:p>
-              </p:txBody>
-            </p:sp>
-            <p:sp>
-              <p:nvSpPr>
-                <p:cNvPr id="74" name="椭圆 73"/>
-                <p:cNvSpPr/>
-                <p:nvPr/>
-              </p:nvSpPr>
-              <p:spPr>
-                <a:xfrm>
-                  <a:off x="14604" y="5691"/>
-                  <a:ext cx="280" cy="280"/>
-                </a:xfrm>
-                <a:prstGeom prst="ellipse">
-                  <a:avLst/>
-                </a:prstGeom>
-                <a:solidFill>
-                  <a:srgbClr val="D3D1C7"/>
-                </a:solidFill>
-                <a:ln>
-                  <a:solidFill>
-                    <a:srgbClr val="B5B3AD"/>
-                  </a:solidFill>
-                </a:ln>
-              </p:spPr>
-              <p:style>
-                <a:lnRef idx="2">
-                  <a:schemeClr val="accent1">
-                    <a:lumMod val="75000"/>
-                  </a:schemeClr>
-                </a:lnRef>
-                <a:fillRef idx="1">
-                  <a:schemeClr val="accent1"/>
-                </a:fillRef>
-                <a:effectRef idx="0">
-                  <a:srgbClr val="FFFFFF"/>
-                </a:effectRef>
-                <a:fontRef idx="minor">
-                  <a:schemeClr val="lt1"/>
-                </a:fontRef>
-              </p:style>
-              <p:txBody>
-                <a:bodyPr rtlCol="0" anchor="ctr"/>
-                <a:p>
-                  <a:pPr algn="ctr"/>
-                  <a:endParaRPr lang="zh-CN" altLang="en-US"/>
-                </a:p>
-              </p:txBody>
-            </p:sp>
-            <p:cxnSp>
-              <p:nvCxnSpPr>
-                <p:cNvPr id="75" name="直接连接符 74"/>
-                <p:cNvCxnSpPr>
-                  <a:stCxn id="70" idx="6"/>
-                  <a:endCxn id="71" idx="2"/>
-                </p:cNvCxnSpPr>
-                <p:nvPr/>
-              </p:nvCxnSpPr>
-              <p:spPr>
-                <a:xfrm flipV="1">
-                  <a:off x="11590" y="5508"/>
-                  <a:ext cx="510" cy="240"/>
-                </a:xfrm>
-                <a:prstGeom prst="line">
-                  <a:avLst/>
-                </a:prstGeom>
-                <a:ln w="19050" cmpd="sng">
-                  <a:solidFill>
-                    <a:schemeClr val="bg2">
-                      <a:lumMod val="90000"/>
-                    </a:schemeClr>
-                  </a:solidFill>
-                  <a:prstDash val="sysDash"/>
-                </a:ln>
-              </p:spPr>
-              <p:style>
-                <a:lnRef idx="2">
-                  <a:schemeClr val="accent1"/>
-                </a:lnRef>
-                <a:fillRef idx="0">
-                  <a:srgbClr val="FFFFFF"/>
-                </a:fillRef>
-                <a:effectRef idx="0">
-                  <a:srgbClr val="FFFFFF"/>
-                </a:effectRef>
-                <a:fontRef idx="minor">
-                  <a:schemeClr val="tx1"/>
-                </a:fontRef>
-              </p:style>
-            </p:cxnSp>
-            <p:cxnSp>
-              <p:nvCxnSpPr>
-                <p:cNvPr id="76" name="直接连接符 75"/>
-                <p:cNvCxnSpPr>
-                  <a:stCxn id="72" idx="2"/>
-                  <a:endCxn id="71" idx="6"/>
-                </p:cNvCxnSpPr>
-                <p:nvPr/>
-              </p:nvCxnSpPr>
-              <p:spPr>
-                <a:xfrm flipH="1" flipV="1">
-                  <a:off x="12380" y="5508"/>
-                  <a:ext cx="584" cy="1066"/>
-                </a:xfrm>
-                <a:prstGeom prst="line">
-                  <a:avLst/>
-                </a:prstGeom>
-                <a:ln w="19050" cmpd="sng">
-                  <a:solidFill>
-                    <a:schemeClr val="bg2">
-                      <a:lumMod val="90000"/>
-                    </a:schemeClr>
-                  </a:solidFill>
-                  <a:prstDash val="sysDash"/>
-                </a:ln>
-              </p:spPr>
-              <p:style>
-                <a:lnRef idx="2">
-                  <a:schemeClr val="accent1"/>
-                </a:lnRef>
-                <a:fillRef idx="0">
-                  <a:srgbClr val="FFFFFF"/>
-                </a:fillRef>
-                <a:effectRef idx="0">
-                  <a:srgbClr val="FFFFFF"/>
-                </a:effectRef>
-                <a:fontRef idx="minor">
-                  <a:schemeClr val="tx1"/>
-                </a:fontRef>
-              </p:style>
-            </p:cxnSp>
-            <p:cxnSp>
-              <p:nvCxnSpPr>
-                <p:cNvPr id="77" name="直接连接符 76"/>
-                <p:cNvCxnSpPr>
-                  <a:stCxn id="72" idx="6"/>
-                  <a:endCxn id="73" idx="2"/>
-                </p:cNvCxnSpPr>
-                <p:nvPr/>
-              </p:nvCxnSpPr>
-              <p:spPr>
-                <a:xfrm>
-                  <a:off x="13244" y="6574"/>
-                  <a:ext cx="535" cy="64"/>
-                </a:xfrm>
-                <a:prstGeom prst="line">
-                  <a:avLst/>
-                </a:prstGeom>
-                <a:ln w="19050" cmpd="sng">
-                  <a:solidFill>
-                    <a:schemeClr val="bg2">
-                      <a:lumMod val="90000"/>
-                    </a:schemeClr>
-                  </a:solidFill>
-                  <a:prstDash val="sysDash"/>
-                </a:ln>
-              </p:spPr>
-              <p:style>
-                <a:lnRef idx="2">
-                  <a:schemeClr val="accent1"/>
-                </a:lnRef>
-                <a:fillRef idx="0">
-                  <a:srgbClr val="FFFFFF"/>
-                </a:fillRef>
-                <a:effectRef idx="0">
-                  <a:srgbClr val="FFFFFF"/>
-                </a:effectRef>
-                <a:fontRef idx="minor">
-                  <a:schemeClr val="tx1"/>
-                </a:fontRef>
-              </p:style>
-            </p:cxnSp>
-            <p:cxnSp>
-              <p:nvCxnSpPr>
-                <p:cNvPr id="78" name="直接连接符 77"/>
-                <p:cNvCxnSpPr>
-                  <a:stCxn id="73" idx="6"/>
-                  <a:endCxn id="74" idx="2"/>
-                </p:cNvCxnSpPr>
-                <p:nvPr/>
-              </p:nvCxnSpPr>
-              <p:spPr>
-                <a:xfrm flipV="1">
-                  <a:off x="14059" y="5831"/>
-                  <a:ext cx="545" cy="807"/>
-                </a:xfrm>
-                <a:prstGeom prst="line">
-                  <a:avLst/>
-                </a:prstGeom>
-                <a:ln w="19050" cmpd="sng">
-                  <a:solidFill>
-                    <a:schemeClr val="bg2">
-                      <a:lumMod val="90000"/>
-                    </a:schemeClr>
-                  </a:solidFill>
-                  <a:prstDash val="sysDash"/>
-                </a:ln>
-              </p:spPr>
-              <p:style>
-                <a:lnRef idx="2">
-                  <a:schemeClr val="accent1"/>
-                </a:lnRef>
-                <a:fillRef idx="0">
-                  <a:srgbClr val="FFFFFF"/>
-                </a:fillRef>
-                <a:effectRef idx="0">
-                  <a:srgbClr val="FFFFFF"/>
-                </a:effectRef>
-                <a:fontRef idx="minor">
-                  <a:schemeClr val="tx1"/>
-                </a:fontRef>
-              </p:style>
-            </p:cxnSp>
-          </p:grpSp>
-          <p:sp>
-            <p:nvSpPr>
-              <p:cNvPr id="91" name="椭圆 90"/>
-              <p:cNvSpPr/>
-              <p:nvPr/>
-            </p:nvSpPr>
-            <p:spPr>
-              <a:xfrm>
-                <a:off x="11310" y="6126"/>
-                <a:ext cx="280" cy="280"/>
-              </a:xfrm>
-              <a:prstGeom prst="ellipse">
-                <a:avLst/>
-              </a:prstGeom>
-              <a:solidFill>
-                <a:schemeClr val="bg2">
-                  <a:lumMod val="75000"/>
-                </a:schemeClr>
-              </a:solidFill>
-              <a:ln>
-                <a:solidFill>
-                  <a:schemeClr val="bg2">
-                    <a:lumMod val="50000"/>
-                  </a:schemeClr>
-                </a:solidFill>
-              </a:ln>
-            </p:spPr>
-            <p:style>
-              <a:lnRef idx="2">
-                <a:schemeClr val="accent1">
-                  <a:lumMod val="75000"/>
-                </a:schemeClr>
-              </a:lnRef>
-              <a:fillRef idx="1">
-                <a:schemeClr val="accent1"/>
-              </a:fillRef>
-              <a:effectRef idx="0">
-                <a:srgbClr val="FFFFFF"/>
-              </a:effectRef>
-              <a:fontRef idx="minor">
-                <a:schemeClr val="lt1"/>
-              </a:fontRef>
-            </p:style>
-            <p:txBody>
-              <a:bodyPr rtlCol="0" anchor="ctr"/>
-              <a:p>
-                <a:pPr algn="ctr"/>
-                <a:endParaRPr lang="zh-CN" altLang="en-US"/>
-              </a:p>
-            </p:txBody>
-          </p:sp>
-          <p:sp>
-            <p:nvSpPr>
-              <p:cNvPr id="92" name="椭圆 91"/>
-              <p:cNvSpPr/>
-              <p:nvPr/>
-            </p:nvSpPr>
-            <p:spPr>
-              <a:xfrm>
-                <a:off x="12100" y="6434"/>
-                <a:ext cx="280" cy="280"/>
-              </a:xfrm>
-              <a:prstGeom prst="ellipse">
-                <a:avLst/>
-              </a:prstGeom>
-              <a:solidFill>
-                <a:schemeClr val="bg2">
-                  <a:lumMod val="75000"/>
-                </a:schemeClr>
-              </a:solidFill>
-              <a:ln>
-                <a:solidFill>
-                  <a:schemeClr val="bg2">
-                    <a:lumMod val="50000"/>
-                  </a:schemeClr>
-                </a:solidFill>
-              </a:ln>
-            </p:spPr>
-            <p:style>
-              <a:lnRef idx="2">
-                <a:schemeClr val="accent1">
-                  <a:lumMod val="75000"/>
-                </a:schemeClr>
-              </a:lnRef>
-              <a:fillRef idx="1">
-                <a:schemeClr val="accent1"/>
-              </a:fillRef>
-              <a:effectRef idx="0">
-                <a:srgbClr val="FFFFFF"/>
-              </a:effectRef>
-              <a:fontRef idx="minor">
-                <a:schemeClr val="lt1"/>
-              </a:fontRef>
-            </p:style>
-            <p:txBody>
-              <a:bodyPr rtlCol="0" anchor="ctr"/>
-              <a:p>
-                <a:pPr algn="ctr"/>
-                <a:endParaRPr lang="zh-CN" altLang="en-US"/>
-              </a:p>
-            </p:txBody>
-          </p:sp>
-          <p:sp>
-            <p:nvSpPr>
-              <p:cNvPr id="93" name="椭圆 92"/>
-              <p:cNvSpPr/>
-              <p:nvPr/>
-            </p:nvSpPr>
-            <p:spPr>
-              <a:xfrm>
-                <a:off x="12964" y="5748"/>
-                <a:ext cx="280" cy="280"/>
-              </a:xfrm>
-              <a:prstGeom prst="ellipse">
-                <a:avLst/>
-              </a:prstGeom>
-              <a:solidFill>
-                <a:schemeClr val="bg2">
-                  <a:lumMod val="75000"/>
-                </a:schemeClr>
-              </a:solidFill>
-              <a:ln>
-                <a:solidFill>
-                  <a:schemeClr val="bg2">
-                    <a:lumMod val="50000"/>
-                  </a:schemeClr>
-                </a:solidFill>
-              </a:ln>
-            </p:spPr>
-            <p:style>
-              <a:lnRef idx="2">
-                <a:schemeClr val="accent1">
-                  <a:lumMod val="75000"/>
-                </a:schemeClr>
-              </a:lnRef>
-              <a:fillRef idx="1">
-                <a:schemeClr val="accent1"/>
-              </a:fillRef>
-              <a:effectRef idx="0">
-                <a:srgbClr val="FFFFFF"/>
-              </a:effectRef>
-              <a:fontRef idx="minor">
-                <a:schemeClr val="lt1"/>
-              </a:fontRef>
-            </p:style>
-            <p:txBody>
-              <a:bodyPr rtlCol="0" anchor="ctr"/>
-              <a:p>
-                <a:pPr algn="ctr"/>
-                <a:endParaRPr lang="zh-CN" altLang="en-US"/>
-              </a:p>
-            </p:txBody>
-          </p:sp>
-          <p:sp>
-            <p:nvSpPr>
-              <p:cNvPr id="94" name="椭圆 93"/>
-              <p:cNvSpPr/>
-              <p:nvPr/>
-            </p:nvSpPr>
-            <p:spPr>
-              <a:xfrm>
-                <a:off x="13779" y="6154"/>
-                <a:ext cx="280" cy="280"/>
-              </a:xfrm>
-              <a:prstGeom prst="ellipse">
-                <a:avLst/>
-              </a:prstGeom>
-              <a:solidFill>
-                <a:schemeClr val="bg2">
-                  <a:lumMod val="75000"/>
-                </a:schemeClr>
-              </a:solidFill>
-              <a:ln>
-                <a:solidFill>
-                  <a:schemeClr val="bg2">
-                    <a:lumMod val="50000"/>
-                  </a:schemeClr>
-                </a:solidFill>
-              </a:ln>
-            </p:spPr>
-            <p:style>
-              <a:lnRef idx="2">
-                <a:schemeClr val="accent1">
-                  <a:lumMod val="75000"/>
-                </a:schemeClr>
-              </a:lnRef>
-              <a:fillRef idx="1">
-                <a:schemeClr val="accent1"/>
-              </a:fillRef>
-              <a:effectRef idx="0">
-                <a:srgbClr val="FFFFFF"/>
-              </a:effectRef>
-              <a:fontRef idx="minor">
-                <a:schemeClr val="lt1"/>
-              </a:fontRef>
-            </p:style>
-            <p:txBody>
-              <a:bodyPr rtlCol="0" anchor="ctr"/>
-              <a:p>
-                <a:pPr algn="ctr"/>
-                <a:endParaRPr lang="zh-CN" altLang="en-US"/>
-              </a:p>
-            </p:txBody>
-          </p:sp>
-          <p:sp>
-            <p:nvSpPr>
-              <p:cNvPr id="95" name="椭圆 94"/>
-              <p:cNvSpPr/>
-              <p:nvPr/>
-            </p:nvSpPr>
-            <p:spPr>
-              <a:xfrm>
-                <a:off x="14604" y="6214"/>
-                <a:ext cx="280" cy="280"/>
-              </a:xfrm>
-              <a:prstGeom prst="ellipse">
-                <a:avLst/>
-              </a:prstGeom>
-              <a:solidFill>
-                <a:schemeClr val="bg2">
-                  <a:lumMod val="75000"/>
-                </a:schemeClr>
-              </a:solidFill>
-              <a:ln>
-                <a:solidFill>
-                  <a:schemeClr val="bg2">
-                    <a:lumMod val="50000"/>
-                  </a:schemeClr>
-                </a:solidFill>
-              </a:ln>
-            </p:spPr>
-            <p:style>
-              <a:lnRef idx="2">
-                <a:schemeClr val="accent1">
-                  <a:lumMod val="75000"/>
-                </a:schemeClr>
-              </a:lnRef>
-              <a:fillRef idx="1">
-                <a:schemeClr val="accent1"/>
-              </a:fillRef>
-              <a:effectRef idx="0">
-                <a:srgbClr val="FFFFFF"/>
-              </a:effectRef>
-              <a:fontRef idx="minor">
-                <a:schemeClr val="lt1"/>
-              </a:fontRef>
-            </p:style>
-            <p:txBody>
-              <a:bodyPr rtlCol="0" anchor="ctr"/>
-              <a:p>
-                <a:pPr algn="ctr"/>
-                <a:endParaRPr lang="zh-CN" altLang="en-US"/>
-              </a:p>
-            </p:txBody>
-          </p:sp>
-          <p:cxnSp>
-            <p:nvCxnSpPr>
-              <p:cNvPr id="96" name="直接连接符 95"/>
-              <p:cNvCxnSpPr>
-                <a:stCxn id="91" idx="6"/>
-                <a:endCxn id="92" idx="2"/>
-              </p:cNvCxnSpPr>
-              <p:nvPr/>
-            </p:nvCxnSpPr>
-            <p:spPr>
-              <a:xfrm>
-                <a:off x="11590" y="6266"/>
-                <a:ext cx="510" cy="308"/>
-              </a:xfrm>
-              <a:prstGeom prst="line">
-                <a:avLst/>
-              </a:prstGeom>
-              <a:ln w="19050" cmpd="sng">
-                <a:solidFill>
-                  <a:schemeClr val="bg2">
-                    <a:lumMod val="75000"/>
-                  </a:schemeClr>
-                </a:solidFill>
-                <a:prstDash val="sysDash"/>
-              </a:ln>
-            </p:spPr>
-            <p:style>
-              <a:lnRef idx="2">
-                <a:schemeClr val="accent1"/>
-              </a:lnRef>
-              <a:fillRef idx="0">
-                <a:srgbClr val="FFFFFF"/>
-              </a:fillRef>
-              <a:effectRef idx="0">
-                <a:srgbClr val="FFFFFF"/>
-              </a:effectRef>
-              <a:fontRef idx="minor">
-                <a:schemeClr val="tx1"/>
-              </a:fontRef>
-            </p:style>
-          </p:cxnSp>
-          <p:cxnSp>
-            <p:nvCxnSpPr>
-              <p:cNvPr id="97" name="直接连接符 96"/>
-              <p:cNvCxnSpPr>
-                <a:stCxn id="93" idx="2"/>
-                <a:endCxn id="92" idx="6"/>
-              </p:cNvCxnSpPr>
-              <p:nvPr/>
-            </p:nvCxnSpPr>
-            <p:spPr>
-              <a:xfrm flipH="1">
-                <a:off x="12380" y="5888"/>
-                <a:ext cx="584" cy="686"/>
-              </a:xfrm>
-              <a:prstGeom prst="line">
-                <a:avLst/>
-              </a:prstGeom>
-              <a:ln w="19050" cmpd="sng">
-                <a:solidFill>
-                  <a:schemeClr val="bg2">
-                    <a:lumMod val="75000"/>
-                  </a:schemeClr>
-                </a:solidFill>
-                <a:prstDash val="sysDash"/>
-              </a:ln>
-            </p:spPr>
-            <p:style>
-              <a:lnRef idx="2">
-                <a:schemeClr val="accent1"/>
-              </a:lnRef>
-              <a:fillRef idx="0">
-                <a:srgbClr val="FFFFFF"/>
-              </a:fillRef>
-              <a:effectRef idx="0">
-                <a:srgbClr val="FFFFFF"/>
-              </a:effectRef>
-              <a:fontRef idx="minor">
-                <a:schemeClr val="tx1"/>
-              </a:fontRef>
-            </p:style>
-          </p:cxnSp>
-          <p:cxnSp>
-            <p:nvCxnSpPr>
-              <p:cNvPr id="98" name="直接连接符 97"/>
-              <p:cNvCxnSpPr>
-                <a:stCxn id="93" idx="6"/>
-                <a:endCxn id="94" idx="2"/>
-              </p:cNvCxnSpPr>
-              <p:nvPr/>
-            </p:nvCxnSpPr>
-            <p:spPr>
-              <a:xfrm>
-                <a:off x="13244" y="5888"/>
-                <a:ext cx="535" cy="406"/>
-              </a:xfrm>
-              <a:prstGeom prst="line">
-                <a:avLst/>
-              </a:prstGeom>
-              <a:ln w="19050" cmpd="sng">
-                <a:solidFill>
-                  <a:schemeClr val="bg2">
-                    <a:lumMod val="75000"/>
-                  </a:schemeClr>
-                </a:solidFill>
-                <a:prstDash val="sysDash"/>
-              </a:ln>
-            </p:spPr>
-            <p:style>
-              <a:lnRef idx="2">
-                <a:schemeClr val="accent1"/>
-              </a:lnRef>
-              <a:fillRef idx="0">
-                <a:srgbClr val="FFFFFF"/>
-              </a:fillRef>
-              <a:effectRef idx="0">
-                <a:srgbClr val="FFFFFF"/>
-              </a:effectRef>
-              <a:fontRef idx="minor">
-                <a:schemeClr val="tx1"/>
-              </a:fontRef>
-            </p:style>
-          </p:cxnSp>
-          <p:cxnSp>
-            <p:nvCxnSpPr>
-              <p:cNvPr id="99" name="直接连接符 98"/>
-              <p:cNvCxnSpPr>
-                <a:stCxn id="94" idx="6"/>
-                <a:endCxn id="95" idx="2"/>
-              </p:cNvCxnSpPr>
-              <p:nvPr/>
-            </p:nvCxnSpPr>
-            <p:spPr>
-              <a:xfrm>
-                <a:off x="14059" y="6294"/>
-                <a:ext cx="545" cy="60"/>
-              </a:xfrm>
-              <a:prstGeom prst="line">
-                <a:avLst/>
-              </a:prstGeom>
-              <a:ln w="19050" cmpd="sng">
-                <a:solidFill>
-                  <a:schemeClr val="bg2">
-                    <a:lumMod val="75000"/>
-                  </a:schemeClr>
-                </a:solidFill>
-                <a:prstDash val="sysDash"/>
-              </a:ln>
-            </p:spPr>
-            <p:style>
-              <a:lnRef idx="2">
-                <a:schemeClr val="accent1"/>
-              </a:lnRef>
-              <a:fillRef idx="0">
-                <a:srgbClr val="FFFFFF"/>
-              </a:fillRef>
-              <a:effectRef idx="0">
-                <a:srgbClr val="FFFFFF"/>
-              </a:effectRef>
-              <a:fontRef idx="minor">
-                <a:schemeClr val="tx1"/>
-              </a:fontRef>
-            </p:style>
-          </p:cxnSp>
-          <p:sp>
-            <p:nvSpPr>
-              <p:cNvPr id="101" name="椭圆 100"/>
-              <p:cNvSpPr/>
-              <p:nvPr/>
-            </p:nvSpPr>
-            <p:spPr>
-              <a:xfrm>
-                <a:off x="15345" y="5280"/>
+                <a:off x="11310" y="4962"/>
                 <a:ext cx="280" cy="280"/>
               </a:xfrm>
               <a:prstGeom prst="ellipse">
@@ -6255,54 +5021,368 @@
           </p:sp>
           <p:sp>
             <p:nvSpPr>
-              <p:cNvPr id="102" name="文本框 101"/>
-              <p:cNvSpPr txBox="1"/>
+              <p:cNvPr id="54" name="椭圆 53"/>
+              <p:cNvSpPr/>
               <p:nvPr/>
             </p:nvSpPr>
             <p:spPr>
               <a:xfrm>
-                <a:off x="15625" y="5157"/>
-                <a:ext cx="1721" cy="531"/>
+                <a:off x="12100" y="4778"/>
+                <a:ext cx="280" cy="280"/>
               </a:xfrm>
-              <a:prstGeom prst="rect">
+              <a:prstGeom prst="ellipse">
                 <a:avLst/>
               </a:prstGeom>
-              <a:noFill/>
+              <a:solidFill>
+                <a:srgbClr val="1D9E75"/>
+              </a:solidFill>
+              <a:ln>
+                <a:solidFill>
+                  <a:srgbClr val="1F6052"/>
+                </a:solidFill>
+              </a:ln>
             </p:spPr>
+            <p:style>
+              <a:lnRef idx="2">
+                <a:schemeClr val="accent1">
+                  <a:lumMod val="75000"/>
+                </a:schemeClr>
+              </a:lnRef>
+              <a:fillRef idx="1">
+                <a:schemeClr val="accent1"/>
+              </a:fillRef>
+              <a:effectRef idx="0">
+                <a:srgbClr val="FFFFFF"/>
+              </a:effectRef>
+              <a:fontRef idx="minor">
+                <a:schemeClr val="lt1"/>
+              </a:fontRef>
+            </p:style>
             <p:txBody>
-              <a:bodyPr wrap="square" rtlCol="0">
-                <a:spAutoFit/>
-              </a:bodyPr>
+              <a:bodyPr rtlCol="0" anchor="ctr"/>
               <a:p>
-                <a:r>
-                  <a:rPr lang="en-US" altLang="zh-CN" sz="1600" b="1">
-                    <a:solidFill>
-                      <a:srgbClr val="3AAA85"/>
-                    </a:solidFill>
-                    <a:latin typeface="Times New Roman" panose="02020603050405020304" charset="0"/>
-                    <a:cs typeface="Times New Roman" panose="02020603050405020304" charset="0"/>
-                  </a:rPr>
-                  <a:t>DEFEND</a:t>
-                </a:r>
-                <a:endParaRPr lang="en-US" altLang="zh-CN" sz="1600" b="1">
-                  <a:solidFill>
-                    <a:srgbClr val="3AAA85"/>
-                  </a:solidFill>
-                  <a:latin typeface="Times New Roman" panose="02020603050405020304" charset="0"/>
-                  <a:cs typeface="Times New Roman" panose="02020603050405020304" charset="0"/>
-                </a:endParaRPr>
+                <a:pPr algn="ctr"/>
+                <a:endParaRPr lang="zh-CN" altLang="en-US"/>
               </a:p>
             </p:txBody>
           </p:sp>
           <p:sp>
             <p:nvSpPr>
-              <p:cNvPr id="104" name="椭圆 103"/>
+              <p:cNvPr id="55" name="椭圆 54"/>
               <p:cNvSpPr/>
               <p:nvPr/>
             </p:nvSpPr>
             <p:spPr>
               <a:xfrm>
-                <a:off x="15345" y="5748"/>
+                <a:off x="12964" y="5028"/>
+                <a:ext cx="280" cy="280"/>
+              </a:xfrm>
+              <a:prstGeom prst="ellipse">
+                <a:avLst/>
+              </a:prstGeom>
+              <a:solidFill>
+                <a:srgbClr val="1D9E75"/>
+              </a:solidFill>
+              <a:ln>
+                <a:solidFill>
+                  <a:srgbClr val="1F6052"/>
+                </a:solidFill>
+              </a:ln>
+            </p:spPr>
+            <p:style>
+              <a:lnRef idx="2">
+                <a:schemeClr val="accent1">
+                  <a:lumMod val="75000"/>
+                </a:schemeClr>
+              </a:lnRef>
+              <a:fillRef idx="1">
+                <a:schemeClr val="accent1"/>
+              </a:fillRef>
+              <a:effectRef idx="0">
+                <a:srgbClr val="FFFFFF"/>
+              </a:effectRef>
+              <a:fontRef idx="minor">
+                <a:schemeClr val="lt1"/>
+              </a:fontRef>
+            </p:style>
+            <p:txBody>
+              <a:bodyPr rtlCol="0" anchor="ctr"/>
+              <a:p>
+                <a:pPr algn="ctr"/>
+                <a:endParaRPr lang="zh-CN" altLang="en-US"/>
+              </a:p>
+            </p:txBody>
+          </p:sp>
+          <p:sp>
+            <p:nvSpPr>
+              <p:cNvPr id="56" name="椭圆 55"/>
+              <p:cNvSpPr/>
+              <p:nvPr/>
+            </p:nvSpPr>
+            <p:spPr>
+              <a:xfrm>
+                <a:off x="13779" y="4866"/>
+                <a:ext cx="280" cy="280"/>
+              </a:xfrm>
+              <a:prstGeom prst="ellipse">
+                <a:avLst/>
+              </a:prstGeom>
+              <a:solidFill>
+                <a:srgbClr val="1D9E75"/>
+              </a:solidFill>
+              <a:ln>
+                <a:solidFill>
+                  <a:srgbClr val="1F6052"/>
+                </a:solidFill>
+              </a:ln>
+            </p:spPr>
+            <p:style>
+              <a:lnRef idx="2">
+                <a:schemeClr val="accent1">
+                  <a:lumMod val="75000"/>
+                </a:schemeClr>
+              </a:lnRef>
+              <a:fillRef idx="1">
+                <a:schemeClr val="accent1"/>
+              </a:fillRef>
+              <a:effectRef idx="0">
+                <a:srgbClr val="FFFFFF"/>
+              </a:effectRef>
+              <a:fontRef idx="minor">
+                <a:schemeClr val="lt1"/>
+              </a:fontRef>
+            </p:style>
+            <p:txBody>
+              <a:bodyPr rtlCol="0" anchor="ctr"/>
+              <a:p>
+                <a:pPr algn="ctr"/>
+                <a:endParaRPr lang="zh-CN" altLang="en-US"/>
+              </a:p>
+            </p:txBody>
+          </p:sp>
+          <p:sp>
+            <p:nvSpPr>
+              <p:cNvPr id="57" name="椭圆 56"/>
+              <p:cNvSpPr/>
+              <p:nvPr/>
+            </p:nvSpPr>
+            <p:spPr>
+              <a:xfrm>
+                <a:off x="14604" y="4778"/>
+                <a:ext cx="280" cy="280"/>
+              </a:xfrm>
+              <a:prstGeom prst="ellipse">
+                <a:avLst/>
+              </a:prstGeom>
+              <a:solidFill>
+                <a:srgbClr val="1D9E75"/>
+              </a:solidFill>
+              <a:ln>
+                <a:solidFill>
+                  <a:srgbClr val="1F6052"/>
+                </a:solidFill>
+              </a:ln>
+            </p:spPr>
+            <p:style>
+              <a:lnRef idx="2">
+                <a:schemeClr val="accent1">
+                  <a:lumMod val="75000"/>
+                </a:schemeClr>
+              </a:lnRef>
+              <a:fillRef idx="1">
+                <a:schemeClr val="accent1"/>
+              </a:fillRef>
+              <a:effectRef idx="0">
+                <a:srgbClr val="FFFFFF"/>
+              </a:effectRef>
+              <a:fontRef idx="minor">
+                <a:schemeClr val="lt1"/>
+              </a:fontRef>
+            </p:style>
+            <p:txBody>
+              <a:bodyPr rtlCol="0" anchor="ctr"/>
+              <a:p>
+                <a:pPr algn="ctr"/>
+                <a:endParaRPr lang="zh-CN" altLang="en-US"/>
+              </a:p>
+            </p:txBody>
+          </p:sp>
+          <p:cxnSp>
+            <p:nvCxnSpPr>
+              <p:cNvPr id="63" name="直接连接符 62"/>
+              <p:cNvCxnSpPr>
+                <a:stCxn id="53" idx="6"/>
+                <a:endCxn id="54" idx="2"/>
+              </p:cNvCxnSpPr>
+              <p:nvPr/>
+            </p:nvCxnSpPr>
+            <p:spPr>
+              <a:xfrm flipV="1">
+                <a:off x="11590" y="4918"/>
+                <a:ext cx="510" cy="184"/>
+              </a:xfrm>
+              <a:prstGeom prst="line">
+                <a:avLst/>
+              </a:prstGeom>
+              <a:ln w="22225">
+                <a:solidFill>
+                  <a:srgbClr val="36A883"/>
+                </a:solidFill>
+              </a:ln>
+            </p:spPr>
+            <p:style>
+              <a:lnRef idx="2">
+                <a:schemeClr val="accent1"/>
+              </a:lnRef>
+              <a:fillRef idx="0">
+                <a:srgbClr val="FFFFFF"/>
+              </a:fillRef>
+              <a:effectRef idx="0">
+                <a:srgbClr val="FFFFFF"/>
+              </a:effectRef>
+              <a:fontRef idx="minor">
+                <a:schemeClr val="tx1"/>
+              </a:fontRef>
+            </p:style>
+          </p:cxnSp>
+          <p:cxnSp>
+            <p:nvCxnSpPr>
+              <p:cNvPr id="64" name="直接连接符 63"/>
+              <p:cNvCxnSpPr>
+                <a:stCxn id="55" idx="2"/>
+                <a:endCxn id="54" idx="6"/>
+              </p:cNvCxnSpPr>
+              <p:nvPr/>
+            </p:nvCxnSpPr>
+            <p:spPr>
+              <a:xfrm flipH="1" flipV="1">
+                <a:off x="12380" y="4918"/>
+                <a:ext cx="584" cy="250"/>
+              </a:xfrm>
+              <a:prstGeom prst="line">
+                <a:avLst/>
+              </a:prstGeom>
+              <a:ln w="22225">
+                <a:solidFill>
+                  <a:srgbClr val="36A883"/>
+                </a:solidFill>
+              </a:ln>
+            </p:spPr>
+            <p:style>
+              <a:lnRef idx="2">
+                <a:schemeClr val="accent1"/>
+              </a:lnRef>
+              <a:fillRef idx="0">
+                <a:srgbClr val="FFFFFF"/>
+              </a:fillRef>
+              <a:effectRef idx="0">
+                <a:srgbClr val="FFFFFF"/>
+              </a:effectRef>
+              <a:fontRef idx="minor">
+                <a:schemeClr val="tx1"/>
+              </a:fontRef>
+            </p:style>
+          </p:cxnSp>
+          <p:cxnSp>
+            <p:nvCxnSpPr>
+              <p:cNvPr id="65" name="直接连接符 64"/>
+              <p:cNvCxnSpPr>
+                <a:stCxn id="55" idx="6"/>
+                <a:endCxn id="56" idx="2"/>
+              </p:cNvCxnSpPr>
+              <p:nvPr/>
+            </p:nvCxnSpPr>
+            <p:spPr>
+              <a:xfrm flipV="1">
+                <a:off x="13244" y="5006"/>
+                <a:ext cx="535" cy="162"/>
+              </a:xfrm>
+              <a:prstGeom prst="line">
+                <a:avLst/>
+              </a:prstGeom>
+              <a:ln w="22225">
+                <a:solidFill>
+                  <a:srgbClr val="36A883"/>
+                </a:solidFill>
+              </a:ln>
+            </p:spPr>
+            <p:style>
+              <a:lnRef idx="2">
+                <a:schemeClr val="accent1"/>
+              </a:lnRef>
+              <a:fillRef idx="0">
+                <a:srgbClr val="FFFFFF"/>
+              </a:fillRef>
+              <a:effectRef idx="0">
+                <a:srgbClr val="FFFFFF"/>
+              </a:effectRef>
+              <a:fontRef idx="minor">
+                <a:schemeClr val="tx1"/>
+              </a:fontRef>
+            </p:style>
+          </p:cxnSp>
+          <p:cxnSp>
+            <p:nvCxnSpPr>
+              <p:cNvPr id="66" name="直接连接符 65"/>
+              <p:cNvCxnSpPr>
+                <a:stCxn id="56" idx="6"/>
+                <a:endCxn id="57" idx="2"/>
+              </p:cNvCxnSpPr>
+              <p:nvPr/>
+            </p:nvCxnSpPr>
+            <p:spPr>
+              <a:xfrm flipV="1">
+                <a:off x="14059" y="4918"/>
+                <a:ext cx="545" cy="88"/>
+              </a:xfrm>
+              <a:prstGeom prst="line">
+                <a:avLst/>
+              </a:prstGeom>
+              <a:ln w="22225">
+                <a:solidFill>
+                  <a:srgbClr val="36A883"/>
+                </a:solidFill>
+              </a:ln>
+            </p:spPr>
+            <p:style>
+              <a:lnRef idx="2">
+                <a:schemeClr val="accent1"/>
+              </a:lnRef>
+              <a:fillRef idx="0">
+                <a:srgbClr val="FFFFFF"/>
+              </a:fillRef>
+              <a:effectRef idx="0">
+                <a:srgbClr val="FFFFFF"/>
+              </a:effectRef>
+              <a:fontRef idx="minor">
+                <a:schemeClr val="tx1"/>
+              </a:fontRef>
+            </p:style>
+          </p:cxnSp>
+        </p:grpSp>
+        <p:grpSp>
+          <p:nvGrpSpPr>
+            <p:cNvPr id="79" name="组合 78"/>
+            <p:cNvGrpSpPr/>
+            <p:nvPr/>
+          </p:nvGrpSpPr>
+          <p:grpSpPr>
+            <a:xfrm rot="0">
+              <a:off x="11310" y="5368"/>
+              <a:ext cx="3574" cy="1410"/>
+              <a:chOff x="11310" y="5368"/>
+              <a:chExt cx="3574" cy="1410"/>
+            </a:xfrm>
+          </p:grpSpPr>
+          <p:sp>
+            <p:nvSpPr>
+              <p:cNvPr id="70" name="椭圆 69"/>
+              <p:cNvSpPr/>
+              <p:nvPr/>
+            </p:nvSpPr>
+            <p:spPr>
+              <a:xfrm>
+                <a:off x="11310" y="5608"/>
                 <a:ext cx="280" cy="280"/>
               </a:xfrm>
               <a:prstGeom prst="ellipse">
@@ -6343,129 +5423,24 @@
           </p:sp>
           <p:sp>
             <p:nvSpPr>
-              <p:cNvPr id="105" name="文本框 104"/>
-              <p:cNvSpPr txBox="1"/>
-              <p:nvPr/>
-            </p:nvSpPr>
-            <p:spPr>
-              <a:xfrm>
-                <a:off x="15625" y="5594"/>
-                <a:ext cx="2086" cy="531"/>
-              </a:xfrm>
-              <a:prstGeom prst="rect">
-                <a:avLst/>
-              </a:prstGeom>
-              <a:noFill/>
-            </p:spPr>
-            <p:txBody>
-              <a:bodyPr wrap="square" rtlCol="0">
-                <a:spAutoFit/>
-              </a:bodyPr>
-              <a:p>
-                <a:r>
-                  <a:rPr lang="en-US" altLang="zh-CN" sz="1600" b="1">
-                    <a:solidFill>
-                      <a:schemeClr val="bg2">
-                        <a:lumMod val="50000"/>
-                      </a:schemeClr>
-                    </a:solidFill>
-                    <a:latin typeface="Times New Roman" panose="02020603050405020304" charset="0"/>
-                    <a:cs typeface="Times New Roman" panose="02020603050405020304" charset="0"/>
-                  </a:rPr>
-                  <a:t>Baselines</a:t>
-                </a:r>
-                <a:endParaRPr lang="en-US" altLang="zh-CN" sz="1600" b="1">
-                  <a:solidFill>
-                    <a:schemeClr val="bg2">
-                      <a:lumMod val="50000"/>
-                    </a:schemeClr>
-                  </a:solidFill>
-                  <a:latin typeface="Times New Roman" panose="02020603050405020304" charset="0"/>
-                  <a:cs typeface="Times New Roman" panose="02020603050405020304" charset="0"/>
-                </a:endParaRPr>
-              </a:p>
-            </p:txBody>
-          </p:sp>
-          <p:sp>
-            <p:nvSpPr>
-              <p:cNvPr id="107" name="文本框 106"/>
-              <p:cNvSpPr txBox="1"/>
-              <p:nvPr/>
-            </p:nvSpPr>
-            <p:spPr>
-              <a:xfrm>
-                <a:off x="10535" y="5592"/>
-                <a:ext cx="671" cy="483"/>
-              </a:xfrm>
-              <a:prstGeom prst="rect">
-                <a:avLst/>
-              </a:prstGeom>
-              <a:noFill/>
-            </p:spPr>
-            <p:txBody>
-              <a:bodyPr wrap="square" rtlCol="0">
-                <a:spAutoFit/>
-              </a:bodyPr>
-              <a:p>
-                <a:r>
-                  <a:rPr lang="en-US" altLang="zh-CN" sz="1400">
-                    <a:solidFill>
-                      <a:schemeClr val="bg2">
-                        <a:lumMod val="50000"/>
-                      </a:schemeClr>
-                    </a:solidFill>
-                    <a:latin typeface="Times New Roman" panose="02020603050405020304" charset="0"/>
-                    <a:cs typeface="Times New Roman" panose="02020603050405020304" charset="0"/>
-                  </a:rPr>
-                  <a:t>F1</a:t>
-                </a:r>
-                <a:endParaRPr lang="en-US" altLang="zh-CN" sz="1400">
-                  <a:solidFill>
-                    <a:schemeClr val="bg2">
-                      <a:lumMod val="50000"/>
-                    </a:schemeClr>
-                  </a:solidFill>
-                  <a:latin typeface="Times New Roman" panose="02020603050405020304" charset="0"/>
-                  <a:cs typeface="Times New Roman" panose="02020603050405020304" charset="0"/>
-                </a:endParaRPr>
-              </a:p>
-            </p:txBody>
-          </p:sp>
-        </p:grpSp>
-        <p:grpSp>
-          <p:nvGrpSpPr>
-            <p:cNvPr id="115" name="组合 114"/>
-            <p:cNvGrpSpPr/>
-            <p:nvPr/>
-          </p:nvGrpSpPr>
-          <p:grpSpPr>
-            <a:xfrm>
-              <a:off x="3878" y="3588"/>
-              <a:ext cx="4721" cy="823"/>
-              <a:chOff x="3411" y="3780"/>
-              <a:chExt cx="4721" cy="823"/>
-            </a:xfrm>
-          </p:grpSpPr>
-          <p:sp>
-            <p:nvSpPr>
-              <p:cNvPr id="111" name="圆角矩形 110"/>
+              <p:cNvPr id="71" name="椭圆 70"/>
               <p:cNvSpPr/>
               <p:nvPr/>
             </p:nvSpPr>
             <p:spPr>
               <a:xfrm>
-                <a:off x="3476" y="4035"/>
-                <a:ext cx="4572" cy="568"/>
+                <a:off x="12100" y="5368"/>
+                <a:ext cx="280" cy="280"/>
               </a:xfrm>
-              <a:prstGeom prst="roundRect">
+              <a:prstGeom prst="ellipse">
                 <a:avLst/>
               </a:prstGeom>
               <a:solidFill>
-                <a:srgbClr val="FFFFFF"/>
+                <a:srgbClr val="D3D1C7"/>
               </a:solidFill>
               <a:ln>
                 <a:solidFill>
-                  <a:srgbClr val="437137"/>
+                  <a:srgbClr val="B5B3AD"/>
                 </a:solidFill>
               </a:ln>
             </p:spPr>
@@ -6495,110 +5470,24 @@
           </p:sp>
           <p:sp>
             <p:nvSpPr>
-              <p:cNvPr id="109" name="文本框 108"/>
-              <p:cNvSpPr txBox="1"/>
-              <p:nvPr/>
-            </p:nvSpPr>
-            <p:spPr>
-              <a:xfrm>
-                <a:off x="3807" y="4023"/>
-                <a:ext cx="4325" cy="580"/>
-              </a:xfrm>
-              <a:prstGeom prst="rect">
-                <a:avLst/>
-              </a:prstGeom>
-              <a:noFill/>
-            </p:spPr>
-            <p:txBody>
-              <a:bodyPr wrap="square" rtlCol="0">
-                <a:spAutoFit/>
-              </a:bodyPr>
-              <a:p>
-                <a:r>
-                  <a:rPr lang="en-US" altLang="zh-CN">
-                    <a:solidFill>
-                      <a:srgbClr val="437137"/>
-                    </a:solidFill>
-                    <a:latin typeface="Times New Roman" panose="02020603050405020304" charset="0"/>
-                    <a:cs typeface="Times New Roman" panose="02020603050405020304" charset="0"/>
-                  </a:rPr>
-                  <a:t>SOTA defense performance</a:t>
-                </a:r>
-                <a:endParaRPr lang="en-US" altLang="zh-CN">
-                  <a:solidFill>
-                    <a:srgbClr val="437137"/>
-                  </a:solidFill>
-                  <a:latin typeface="Times New Roman" panose="02020603050405020304" charset="0"/>
-                  <a:cs typeface="Times New Roman" panose="02020603050405020304" charset="0"/>
-                </a:endParaRPr>
-              </a:p>
-            </p:txBody>
-          </p:sp>
-          <p:pic>
-            <p:nvPicPr>
-              <p:cNvPr id="114" name="图片 113" descr="正确"/>
-              <p:cNvPicPr>
-                <a:picLocks noChangeAspect="1"/>
-              </p:cNvPicPr>
-              <p:nvPr/>
-            </p:nvPicPr>
-            <p:blipFill>
-              <a:blip r:embed="rId1">
-                <a:extLst>
-                  <a:ext uri="{96DAC541-7B7A-43D3-8B79-37D633B846F1}">
-                    <asvg:svgBlip xmlns:asvg="http://schemas.microsoft.com/office/drawing/2016/SVG/main" r:embed="rId2"/>
-                  </a:ext>
-                </a:extLst>
-              </a:blip>
-              <a:stretch>
-                <a:fillRect/>
-              </a:stretch>
-            </p:blipFill>
-            <p:spPr>
-              <a:xfrm>
-                <a:off x="3411" y="3780"/>
-                <a:ext cx="425" cy="425"/>
-              </a:xfrm>
-              <a:prstGeom prst="rect">
-                <a:avLst/>
-              </a:prstGeom>
-            </p:spPr>
-          </p:pic>
-        </p:grpSp>
-        <p:grpSp>
-          <p:nvGrpSpPr>
-            <p:cNvPr id="117" name="组合 116"/>
-            <p:cNvGrpSpPr/>
-            <p:nvPr/>
-          </p:nvGrpSpPr>
-          <p:grpSpPr>
-            <a:xfrm>
-              <a:off x="10865" y="3558"/>
-              <a:ext cx="4715" cy="841"/>
-              <a:chOff x="10701" y="3780"/>
-              <a:chExt cx="4715" cy="841"/>
-            </a:xfrm>
-          </p:grpSpPr>
-          <p:sp>
-            <p:nvSpPr>
-              <p:cNvPr id="113" name="圆角矩形 112"/>
+              <p:cNvPr id="72" name="椭圆 71"/>
               <p:cNvSpPr/>
               <p:nvPr/>
             </p:nvSpPr>
             <p:spPr>
               <a:xfrm>
-                <a:off x="10701" y="4035"/>
-                <a:ext cx="4644" cy="568"/>
+                <a:off x="12964" y="6434"/>
+                <a:ext cx="280" cy="280"/>
               </a:xfrm>
-              <a:prstGeom prst="roundRect">
+              <a:prstGeom prst="ellipse">
                 <a:avLst/>
               </a:prstGeom>
               <a:solidFill>
-                <a:srgbClr val="FFFFFF"/>
+                <a:srgbClr val="D3D1C7"/>
               </a:solidFill>
               <a:ln>
                 <a:solidFill>
-                  <a:srgbClr val="437137"/>
+                  <a:srgbClr val="B5B3AD"/>
                 </a:solidFill>
               </a:ln>
             </p:spPr>
@@ -6628,80 +5517,2953 @@
           </p:sp>
           <p:sp>
             <p:nvSpPr>
-              <p:cNvPr id="110" name="文本框 109"/>
-              <p:cNvSpPr txBox="1"/>
+              <p:cNvPr id="73" name="椭圆 72"/>
+              <p:cNvSpPr/>
               <p:nvPr/>
             </p:nvSpPr>
             <p:spPr>
               <a:xfrm>
-                <a:off x="10934" y="4041"/>
-                <a:ext cx="3977" cy="580"/>
+                <a:off x="13779" y="6498"/>
+                <a:ext cx="280" cy="280"/>
               </a:xfrm>
-              <a:prstGeom prst="rect">
+              <a:prstGeom prst="ellipse">
                 <a:avLst/>
               </a:prstGeom>
-              <a:noFill/>
+              <a:solidFill>
+                <a:srgbClr val="D3D1C7"/>
+              </a:solidFill>
+              <a:ln>
+                <a:solidFill>
+                  <a:srgbClr val="B5B3AD"/>
+                </a:solidFill>
+              </a:ln>
             </p:spPr>
+            <p:style>
+              <a:lnRef idx="2">
+                <a:schemeClr val="accent1">
+                  <a:lumMod val="75000"/>
+                </a:schemeClr>
+              </a:lnRef>
+              <a:fillRef idx="1">
+                <a:schemeClr val="accent1"/>
+              </a:fillRef>
+              <a:effectRef idx="0">
+                <a:srgbClr val="FFFFFF"/>
+              </a:effectRef>
+              <a:fontRef idx="minor">
+                <a:schemeClr val="lt1"/>
+              </a:fontRef>
+            </p:style>
             <p:txBody>
-              <a:bodyPr wrap="square" rtlCol="0">
-                <a:spAutoFit/>
-              </a:bodyPr>
+              <a:bodyPr rtlCol="0" anchor="ctr"/>
               <a:p>
-                <a:r>
-                  <a:rPr lang="en-US" altLang="zh-CN">
-                    <a:solidFill>
-                      <a:srgbClr val="437137"/>
-                    </a:solidFill>
-                    <a:latin typeface="Times New Roman" panose="02020603050405020304" charset="0"/>
-                    <a:cs typeface="Times New Roman" panose="02020603050405020304" charset="0"/>
-                  </a:rPr>
-                  <a:t>Cross-domain generation</a:t>
-                </a:r>
-                <a:endParaRPr lang="en-US" altLang="zh-CN">
+                <a:pPr algn="ctr"/>
+                <a:endParaRPr lang="zh-CN" altLang="en-US"/>
+              </a:p>
+            </p:txBody>
+          </p:sp>
+          <p:sp>
+            <p:nvSpPr>
+              <p:cNvPr id="74" name="椭圆 73"/>
+              <p:cNvSpPr/>
+              <p:nvPr/>
+            </p:nvSpPr>
+            <p:spPr>
+              <a:xfrm>
+                <a:off x="14604" y="5691"/>
+                <a:ext cx="280" cy="280"/>
+              </a:xfrm>
+              <a:prstGeom prst="ellipse">
+                <a:avLst/>
+              </a:prstGeom>
+              <a:solidFill>
+                <a:srgbClr val="D3D1C7"/>
+              </a:solidFill>
+              <a:ln>
+                <a:solidFill>
+                  <a:srgbClr val="B5B3AD"/>
+                </a:solidFill>
+              </a:ln>
+            </p:spPr>
+            <p:style>
+              <a:lnRef idx="2">
+                <a:schemeClr val="accent1">
+                  <a:lumMod val="75000"/>
+                </a:schemeClr>
+              </a:lnRef>
+              <a:fillRef idx="1">
+                <a:schemeClr val="accent1"/>
+              </a:fillRef>
+              <a:effectRef idx="0">
+                <a:srgbClr val="FFFFFF"/>
+              </a:effectRef>
+              <a:fontRef idx="minor">
+                <a:schemeClr val="lt1"/>
+              </a:fontRef>
+            </p:style>
+            <p:txBody>
+              <a:bodyPr rtlCol="0" anchor="ctr"/>
+              <a:p>
+                <a:pPr algn="ctr"/>
+                <a:endParaRPr lang="zh-CN" altLang="en-US"/>
+              </a:p>
+            </p:txBody>
+          </p:sp>
+          <p:cxnSp>
+            <p:nvCxnSpPr>
+              <p:cNvPr id="75" name="直接连接符 74"/>
+              <p:cNvCxnSpPr>
+                <a:stCxn id="70" idx="6"/>
+                <a:endCxn id="71" idx="2"/>
+              </p:cNvCxnSpPr>
+              <p:nvPr/>
+            </p:nvCxnSpPr>
+            <p:spPr>
+              <a:xfrm flipV="1">
+                <a:off x="11590" y="5508"/>
+                <a:ext cx="510" cy="240"/>
+              </a:xfrm>
+              <a:prstGeom prst="line">
+                <a:avLst/>
+              </a:prstGeom>
+              <a:ln w="19050" cmpd="sng">
+                <a:solidFill>
+                  <a:schemeClr val="bg2">
+                    <a:lumMod val="90000"/>
+                  </a:schemeClr>
+                </a:solidFill>
+                <a:prstDash val="sysDash"/>
+              </a:ln>
+            </p:spPr>
+            <p:style>
+              <a:lnRef idx="2">
+                <a:schemeClr val="accent1"/>
+              </a:lnRef>
+              <a:fillRef idx="0">
+                <a:srgbClr val="FFFFFF"/>
+              </a:fillRef>
+              <a:effectRef idx="0">
+                <a:srgbClr val="FFFFFF"/>
+              </a:effectRef>
+              <a:fontRef idx="minor">
+                <a:schemeClr val="tx1"/>
+              </a:fontRef>
+            </p:style>
+          </p:cxnSp>
+          <p:cxnSp>
+            <p:nvCxnSpPr>
+              <p:cNvPr id="76" name="直接连接符 75"/>
+              <p:cNvCxnSpPr>
+                <a:stCxn id="72" idx="2"/>
+                <a:endCxn id="71" idx="6"/>
+              </p:cNvCxnSpPr>
+              <p:nvPr/>
+            </p:nvCxnSpPr>
+            <p:spPr>
+              <a:xfrm flipH="1" flipV="1">
+                <a:off x="12380" y="5508"/>
+                <a:ext cx="584" cy="1066"/>
+              </a:xfrm>
+              <a:prstGeom prst="line">
+                <a:avLst/>
+              </a:prstGeom>
+              <a:ln w="19050" cmpd="sng">
+                <a:solidFill>
+                  <a:schemeClr val="bg2">
+                    <a:lumMod val="90000"/>
+                  </a:schemeClr>
+                </a:solidFill>
+                <a:prstDash val="sysDash"/>
+              </a:ln>
+            </p:spPr>
+            <p:style>
+              <a:lnRef idx="2">
+                <a:schemeClr val="accent1"/>
+              </a:lnRef>
+              <a:fillRef idx="0">
+                <a:srgbClr val="FFFFFF"/>
+              </a:fillRef>
+              <a:effectRef idx="0">
+                <a:srgbClr val="FFFFFF"/>
+              </a:effectRef>
+              <a:fontRef idx="minor">
+                <a:schemeClr val="tx1"/>
+              </a:fontRef>
+            </p:style>
+          </p:cxnSp>
+          <p:cxnSp>
+            <p:nvCxnSpPr>
+              <p:cNvPr id="77" name="直接连接符 76"/>
+              <p:cNvCxnSpPr>
+                <a:stCxn id="72" idx="6"/>
+                <a:endCxn id="73" idx="2"/>
+              </p:cNvCxnSpPr>
+              <p:nvPr/>
+            </p:nvCxnSpPr>
+            <p:spPr>
+              <a:xfrm>
+                <a:off x="13244" y="6574"/>
+                <a:ext cx="535" cy="64"/>
+              </a:xfrm>
+              <a:prstGeom prst="line">
+                <a:avLst/>
+              </a:prstGeom>
+              <a:ln w="19050" cmpd="sng">
+                <a:solidFill>
+                  <a:schemeClr val="bg2">
+                    <a:lumMod val="90000"/>
+                  </a:schemeClr>
+                </a:solidFill>
+                <a:prstDash val="sysDash"/>
+              </a:ln>
+            </p:spPr>
+            <p:style>
+              <a:lnRef idx="2">
+                <a:schemeClr val="accent1"/>
+              </a:lnRef>
+              <a:fillRef idx="0">
+                <a:srgbClr val="FFFFFF"/>
+              </a:fillRef>
+              <a:effectRef idx="0">
+                <a:srgbClr val="FFFFFF"/>
+              </a:effectRef>
+              <a:fontRef idx="minor">
+                <a:schemeClr val="tx1"/>
+              </a:fontRef>
+            </p:style>
+          </p:cxnSp>
+          <p:cxnSp>
+            <p:nvCxnSpPr>
+              <p:cNvPr id="78" name="直接连接符 77"/>
+              <p:cNvCxnSpPr>
+                <a:stCxn id="73" idx="6"/>
+                <a:endCxn id="74" idx="2"/>
+              </p:cNvCxnSpPr>
+              <p:nvPr/>
+            </p:nvCxnSpPr>
+            <p:spPr>
+              <a:xfrm flipV="1">
+                <a:off x="14059" y="5831"/>
+                <a:ext cx="545" cy="807"/>
+              </a:xfrm>
+              <a:prstGeom prst="line">
+                <a:avLst/>
+              </a:prstGeom>
+              <a:ln w="19050" cmpd="sng">
+                <a:solidFill>
+                  <a:schemeClr val="bg2">
+                    <a:lumMod val="90000"/>
+                  </a:schemeClr>
+                </a:solidFill>
+                <a:prstDash val="sysDash"/>
+              </a:ln>
+            </p:spPr>
+            <p:style>
+              <a:lnRef idx="2">
+                <a:schemeClr val="accent1"/>
+              </a:lnRef>
+              <a:fillRef idx="0">
+                <a:srgbClr val="FFFFFF"/>
+              </a:fillRef>
+              <a:effectRef idx="0">
+                <a:srgbClr val="FFFFFF"/>
+              </a:effectRef>
+              <a:fontRef idx="minor">
+                <a:schemeClr val="tx1"/>
+              </a:fontRef>
+            </p:style>
+          </p:cxnSp>
+        </p:grpSp>
+        <p:sp>
+          <p:nvSpPr>
+            <p:cNvPr id="91" name="椭圆 90"/>
+            <p:cNvSpPr/>
+            <p:nvPr/>
+          </p:nvSpPr>
+          <p:spPr>
+            <a:xfrm>
+              <a:off x="11310" y="6126"/>
+              <a:ext cx="280" cy="280"/>
+            </a:xfrm>
+            <a:prstGeom prst="ellipse">
+              <a:avLst/>
+            </a:prstGeom>
+            <a:solidFill>
+              <a:schemeClr val="bg2">
+                <a:lumMod val="75000"/>
+              </a:schemeClr>
+            </a:solidFill>
+            <a:ln>
+              <a:solidFill>
+                <a:schemeClr val="bg2">
+                  <a:lumMod val="50000"/>
+                </a:schemeClr>
+              </a:solidFill>
+            </a:ln>
+          </p:spPr>
+          <p:style>
+            <a:lnRef idx="2">
+              <a:schemeClr val="accent1">
+                <a:lumMod val="75000"/>
+              </a:schemeClr>
+            </a:lnRef>
+            <a:fillRef idx="1">
+              <a:schemeClr val="accent1"/>
+            </a:fillRef>
+            <a:effectRef idx="0">
+              <a:srgbClr val="FFFFFF"/>
+            </a:effectRef>
+            <a:fontRef idx="minor">
+              <a:schemeClr val="lt1"/>
+            </a:fontRef>
+          </p:style>
+          <p:txBody>
+            <a:bodyPr rtlCol="0" anchor="ctr"/>
+            <a:p>
+              <a:pPr algn="ctr"/>
+              <a:endParaRPr lang="zh-CN" altLang="en-US"/>
+            </a:p>
+          </p:txBody>
+        </p:sp>
+        <p:sp>
+          <p:nvSpPr>
+            <p:cNvPr id="92" name="椭圆 91"/>
+            <p:cNvSpPr/>
+            <p:nvPr/>
+          </p:nvSpPr>
+          <p:spPr>
+            <a:xfrm>
+              <a:off x="12100" y="6434"/>
+              <a:ext cx="280" cy="280"/>
+            </a:xfrm>
+            <a:prstGeom prst="ellipse">
+              <a:avLst/>
+            </a:prstGeom>
+            <a:solidFill>
+              <a:schemeClr val="bg2">
+                <a:lumMod val="75000"/>
+              </a:schemeClr>
+            </a:solidFill>
+            <a:ln>
+              <a:solidFill>
+                <a:schemeClr val="bg2">
+                  <a:lumMod val="50000"/>
+                </a:schemeClr>
+              </a:solidFill>
+            </a:ln>
+          </p:spPr>
+          <p:style>
+            <a:lnRef idx="2">
+              <a:schemeClr val="accent1">
+                <a:lumMod val="75000"/>
+              </a:schemeClr>
+            </a:lnRef>
+            <a:fillRef idx="1">
+              <a:schemeClr val="accent1"/>
+            </a:fillRef>
+            <a:effectRef idx="0">
+              <a:srgbClr val="FFFFFF"/>
+            </a:effectRef>
+            <a:fontRef idx="minor">
+              <a:schemeClr val="lt1"/>
+            </a:fontRef>
+          </p:style>
+          <p:txBody>
+            <a:bodyPr rtlCol="0" anchor="ctr"/>
+            <a:p>
+              <a:pPr algn="ctr"/>
+              <a:endParaRPr lang="zh-CN" altLang="en-US"/>
+            </a:p>
+          </p:txBody>
+        </p:sp>
+        <p:sp>
+          <p:nvSpPr>
+            <p:cNvPr id="93" name="椭圆 92"/>
+            <p:cNvSpPr/>
+            <p:nvPr/>
+          </p:nvSpPr>
+          <p:spPr>
+            <a:xfrm>
+              <a:off x="12964" y="5748"/>
+              <a:ext cx="280" cy="280"/>
+            </a:xfrm>
+            <a:prstGeom prst="ellipse">
+              <a:avLst/>
+            </a:prstGeom>
+            <a:solidFill>
+              <a:schemeClr val="bg2">
+                <a:lumMod val="75000"/>
+              </a:schemeClr>
+            </a:solidFill>
+            <a:ln>
+              <a:solidFill>
+                <a:schemeClr val="bg2">
+                  <a:lumMod val="50000"/>
+                </a:schemeClr>
+              </a:solidFill>
+            </a:ln>
+          </p:spPr>
+          <p:style>
+            <a:lnRef idx="2">
+              <a:schemeClr val="accent1">
+                <a:lumMod val="75000"/>
+              </a:schemeClr>
+            </a:lnRef>
+            <a:fillRef idx="1">
+              <a:schemeClr val="accent1"/>
+            </a:fillRef>
+            <a:effectRef idx="0">
+              <a:srgbClr val="FFFFFF"/>
+            </a:effectRef>
+            <a:fontRef idx="minor">
+              <a:schemeClr val="lt1"/>
+            </a:fontRef>
+          </p:style>
+          <p:txBody>
+            <a:bodyPr rtlCol="0" anchor="ctr"/>
+            <a:p>
+              <a:pPr algn="ctr"/>
+              <a:endParaRPr lang="zh-CN" altLang="en-US"/>
+            </a:p>
+          </p:txBody>
+        </p:sp>
+        <p:sp>
+          <p:nvSpPr>
+            <p:cNvPr id="94" name="椭圆 93"/>
+            <p:cNvSpPr/>
+            <p:nvPr/>
+          </p:nvSpPr>
+          <p:spPr>
+            <a:xfrm>
+              <a:off x="13779" y="6154"/>
+              <a:ext cx="280" cy="280"/>
+            </a:xfrm>
+            <a:prstGeom prst="ellipse">
+              <a:avLst/>
+            </a:prstGeom>
+            <a:solidFill>
+              <a:schemeClr val="bg2">
+                <a:lumMod val="75000"/>
+              </a:schemeClr>
+            </a:solidFill>
+            <a:ln>
+              <a:solidFill>
+                <a:schemeClr val="bg2">
+                  <a:lumMod val="50000"/>
+                </a:schemeClr>
+              </a:solidFill>
+            </a:ln>
+          </p:spPr>
+          <p:style>
+            <a:lnRef idx="2">
+              <a:schemeClr val="accent1">
+                <a:lumMod val="75000"/>
+              </a:schemeClr>
+            </a:lnRef>
+            <a:fillRef idx="1">
+              <a:schemeClr val="accent1"/>
+            </a:fillRef>
+            <a:effectRef idx="0">
+              <a:srgbClr val="FFFFFF"/>
+            </a:effectRef>
+            <a:fontRef idx="minor">
+              <a:schemeClr val="lt1"/>
+            </a:fontRef>
+          </p:style>
+          <p:txBody>
+            <a:bodyPr rtlCol="0" anchor="ctr"/>
+            <a:p>
+              <a:pPr algn="ctr"/>
+              <a:endParaRPr lang="zh-CN" altLang="en-US"/>
+            </a:p>
+          </p:txBody>
+        </p:sp>
+        <p:sp>
+          <p:nvSpPr>
+            <p:cNvPr id="95" name="椭圆 94"/>
+            <p:cNvSpPr/>
+            <p:nvPr/>
+          </p:nvSpPr>
+          <p:spPr>
+            <a:xfrm>
+              <a:off x="14604" y="6214"/>
+              <a:ext cx="280" cy="280"/>
+            </a:xfrm>
+            <a:prstGeom prst="ellipse">
+              <a:avLst/>
+            </a:prstGeom>
+            <a:solidFill>
+              <a:schemeClr val="bg2">
+                <a:lumMod val="75000"/>
+              </a:schemeClr>
+            </a:solidFill>
+            <a:ln>
+              <a:solidFill>
+                <a:schemeClr val="bg2">
+                  <a:lumMod val="50000"/>
+                </a:schemeClr>
+              </a:solidFill>
+            </a:ln>
+          </p:spPr>
+          <p:style>
+            <a:lnRef idx="2">
+              <a:schemeClr val="accent1">
+                <a:lumMod val="75000"/>
+              </a:schemeClr>
+            </a:lnRef>
+            <a:fillRef idx="1">
+              <a:schemeClr val="accent1"/>
+            </a:fillRef>
+            <a:effectRef idx="0">
+              <a:srgbClr val="FFFFFF"/>
+            </a:effectRef>
+            <a:fontRef idx="minor">
+              <a:schemeClr val="lt1"/>
+            </a:fontRef>
+          </p:style>
+          <p:txBody>
+            <a:bodyPr rtlCol="0" anchor="ctr"/>
+            <a:p>
+              <a:pPr algn="ctr"/>
+              <a:endParaRPr lang="zh-CN" altLang="en-US"/>
+            </a:p>
+          </p:txBody>
+        </p:sp>
+        <p:cxnSp>
+          <p:nvCxnSpPr>
+            <p:cNvPr id="96" name="直接连接符 95"/>
+            <p:cNvCxnSpPr>
+              <a:stCxn id="91" idx="6"/>
+              <a:endCxn id="92" idx="2"/>
+            </p:cNvCxnSpPr>
+            <p:nvPr/>
+          </p:nvCxnSpPr>
+          <p:spPr>
+            <a:xfrm>
+              <a:off x="11590" y="6266"/>
+              <a:ext cx="510" cy="308"/>
+            </a:xfrm>
+            <a:prstGeom prst="line">
+              <a:avLst/>
+            </a:prstGeom>
+            <a:ln w="19050" cmpd="sng">
+              <a:solidFill>
+                <a:schemeClr val="bg2">
+                  <a:lumMod val="75000"/>
+                </a:schemeClr>
+              </a:solidFill>
+              <a:prstDash val="sysDash"/>
+            </a:ln>
+          </p:spPr>
+          <p:style>
+            <a:lnRef idx="2">
+              <a:schemeClr val="accent1"/>
+            </a:lnRef>
+            <a:fillRef idx="0">
+              <a:srgbClr val="FFFFFF"/>
+            </a:fillRef>
+            <a:effectRef idx="0">
+              <a:srgbClr val="FFFFFF"/>
+            </a:effectRef>
+            <a:fontRef idx="minor">
+              <a:schemeClr val="tx1"/>
+            </a:fontRef>
+          </p:style>
+        </p:cxnSp>
+        <p:cxnSp>
+          <p:nvCxnSpPr>
+            <p:cNvPr id="97" name="直接连接符 96"/>
+            <p:cNvCxnSpPr>
+              <a:stCxn id="93" idx="2"/>
+              <a:endCxn id="92" idx="6"/>
+            </p:cNvCxnSpPr>
+            <p:nvPr/>
+          </p:nvCxnSpPr>
+          <p:spPr>
+            <a:xfrm flipH="1">
+              <a:off x="12380" y="5888"/>
+              <a:ext cx="584" cy="686"/>
+            </a:xfrm>
+            <a:prstGeom prst="line">
+              <a:avLst/>
+            </a:prstGeom>
+            <a:ln w="19050" cmpd="sng">
+              <a:solidFill>
+                <a:schemeClr val="bg2">
+                  <a:lumMod val="75000"/>
+                </a:schemeClr>
+              </a:solidFill>
+              <a:prstDash val="sysDash"/>
+            </a:ln>
+          </p:spPr>
+          <p:style>
+            <a:lnRef idx="2">
+              <a:schemeClr val="accent1"/>
+            </a:lnRef>
+            <a:fillRef idx="0">
+              <a:srgbClr val="FFFFFF"/>
+            </a:fillRef>
+            <a:effectRef idx="0">
+              <a:srgbClr val="FFFFFF"/>
+            </a:effectRef>
+            <a:fontRef idx="minor">
+              <a:schemeClr val="tx1"/>
+            </a:fontRef>
+          </p:style>
+        </p:cxnSp>
+        <p:cxnSp>
+          <p:nvCxnSpPr>
+            <p:cNvPr id="98" name="直接连接符 97"/>
+            <p:cNvCxnSpPr>
+              <a:stCxn id="93" idx="6"/>
+              <a:endCxn id="94" idx="2"/>
+            </p:cNvCxnSpPr>
+            <p:nvPr/>
+          </p:nvCxnSpPr>
+          <p:spPr>
+            <a:xfrm>
+              <a:off x="13244" y="5888"/>
+              <a:ext cx="535" cy="406"/>
+            </a:xfrm>
+            <a:prstGeom prst="line">
+              <a:avLst/>
+            </a:prstGeom>
+            <a:ln w="19050" cmpd="sng">
+              <a:solidFill>
+                <a:schemeClr val="bg2">
+                  <a:lumMod val="75000"/>
+                </a:schemeClr>
+              </a:solidFill>
+              <a:prstDash val="sysDash"/>
+            </a:ln>
+          </p:spPr>
+          <p:style>
+            <a:lnRef idx="2">
+              <a:schemeClr val="accent1"/>
+            </a:lnRef>
+            <a:fillRef idx="0">
+              <a:srgbClr val="FFFFFF"/>
+            </a:fillRef>
+            <a:effectRef idx="0">
+              <a:srgbClr val="FFFFFF"/>
+            </a:effectRef>
+            <a:fontRef idx="minor">
+              <a:schemeClr val="tx1"/>
+            </a:fontRef>
+          </p:style>
+        </p:cxnSp>
+        <p:cxnSp>
+          <p:nvCxnSpPr>
+            <p:cNvPr id="99" name="直接连接符 98"/>
+            <p:cNvCxnSpPr>
+              <a:stCxn id="94" idx="6"/>
+              <a:endCxn id="95" idx="2"/>
+            </p:cNvCxnSpPr>
+            <p:nvPr/>
+          </p:nvCxnSpPr>
+          <p:spPr>
+            <a:xfrm>
+              <a:off x="14059" y="6294"/>
+              <a:ext cx="545" cy="60"/>
+            </a:xfrm>
+            <a:prstGeom prst="line">
+              <a:avLst/>
+            </a:prstGeom>
+            <a:ln w="19050" cmpd="sng">
+              <a:solidFill>
+                <a:schemeClr val="bg2">
+                  <a:lumMod val="75000"/>
+                </a:schemeClr>
+              </a:solidFill>
+              <a:prstDash val="sysDash"/>
+            </a:ln>
+          </p:spPr>
+          <p:style>
+            <a:lnRef idx="2">
+              <a:schemeClr val="accent1"/>
+            </a:lnRef>
+            <a:fillRef idx="0">
+              <a:srgbClr val="FFFFFF"/>
+            </a:fillRef>
+            <a:effectRef idx="0">
+              <a:srgbClr val="FFFFFF"/>
+            </a:effectRef>
+            <a:fontRef idx="minor">
+              <a:schemeClr val="tx1"/>
+            </a:fontRef>
+          </p:style>
+        </p:cxnSp>
+        <p:sp>
+          <p:nvSpPr>
+            <p:cNvPr id="101" name="椭圆 100"/>
+            <p:cNvSpPr/>
+            <p:nvPr/>
+          </p:nvSpPr>
+          <p:spPr>
+            <a:xfrm>
+              <a:off x="15345" y="5280"/>
+              <a:ext cx="280" cy="280"/>
+            </a:xfrm>
+            <a:prstGeom prst="ellipse">
+              <a:avLst/>
+            </a:prstGeom>
+            <a:solidFill>
+              <a:srgbClr val="1D9E75"/>
+            </a:solidFill>
+            <a:ln>
+              <a:solidFill>
+                <a:srgbClr val="1F6052"/>
+              </a:solidFill>
+            </a:ln>
+          </p:spPr>
+          <p:style>
+            <a:lnRef idx="2">
+              <a:schemeClr val="accent1">
+                <a:lumMod val="75000"/>
+              </a:schemeClr>
+            </a:lnRef>
+            <a:fillRef idx="1">
+              <a:schemeClr val="accent1"/>
+            </a:fillRef>
+            <a:effectRef idx="0">
+              <a:srgbClr val="FFFFFF"/>
+            </a:effectRef>
+            <a:fontRef idx="minor">
+              <a:schemeClr val="lt1"/>
+            </a:fontRef>
+          </p:style>
+          <p:txBody>
+            <a:bodyPr rtlCol="0" anchor="ctr"/>
+            <a:p>
+              <a:pPr algn="ctr"/>
+              <a:endParaRPr lang="zh-CN" altLang="en-US"/>
+            </a:p>
+          </p:txBody>
+        </p:sp>
+        <p:sp>
+          <p:nvSpPr>
+            <p:cNvPr id="102" name="文本框 101"/>
+            <p:cNvSpPr txBox="1"/>
+            <p:nvPr/>
+          </p:nvSpPr>
+          <p:spPr>
+            <a:xfrm>
+              <a:off x="15625" y="5157"/>
+              <a:ext cx="1721" cy="531"/>
+            </a:xfrm>
+            <a:prstGeom prst="rect">
+              <a:avLst/>
+            </a:prstGeom>
+            <a:noFill/>
+          </p:spPr>
+          <p:txBody>
+            <a:bodyPr wrap="square" rtlCol="0">
+              <a:spAutoFit/>
+            </a:bodyPr>
+            <a:p>
+              <a:r>
+                <a:rPr lang="en-US" altLang="zh-CN" sz="1600" b="1">
+                  <a:solidFill>
+                    <a:srgbClr val="3AAA85"/>
+                  </a:solidFill>
+                  <a:latin typeface="Times New Roman" panose="02020603050405020304" charset="0"/>
+                  <a:cs typeface="Times New Roman" panose="02020603050405020304" charset="0"/>
+                </a:rPr>
+                <a:t>DEFEND</a:t>
+              </a:r>
+              <a:endParaRPr lang="en-US" altLang="zh-CN" sz="1600" b="1">
+                <a:solidFill>
+                  <a:srgbClr val="3AAA85"/>
+                </a:solidFill>
+                <a:latin typeface="Times New Roman" panose="02020603050405020304" charset="0"/>
+                <a:cs typeface="Times New Roman" panose="02020603050405020304" charset="0"/>
+              </a:endParaRPr>
+            </a:p>
+          </p:txBody>
+        </p:sp>
+        <p:sp>
+          <p:nvSpPr>
+            <p:cNvPr id="104" name="椭圆 103"/>
+            <p:cNvSpPr/>
+            <p:nvPr/>
+          </p:nvSpPr>
+          <p:spPr>
+            <a:xfrm>
+              <a:off x="15345" y="5748"/>
+              <a:ext cx="280" cy="280"/>
+            </a:xfrm>
+            <a:prstGeom prst="ellipse">
+              <a:avLst/>
+            </a:prstGeom>
+            <a:solidFill>
+              <a:srgbClr val="D3D1C7"/>
+            </a:solidFill>
+            <a:ln>
+              <a:solidFill>
+                <a:srgbClr val="B5B3AD"/>
+              </a:solidFill>
+            </a:ln>
+          </p:spPr>
+          <p:style>
+            <a:lnRef idx="2">
+              <a:schemeClr val="accent1">
+                <a:lumMod val="75000"/>
+              </a:schemeClr>
+            </a:lnRef>
+            <a:fillRef idx="1">
+              <a:schemeClr val="accent1"/>
+            </a:fillRef>
+            <a:effectRef idx="0">
+              <a:srgbClr val="FFFFFF"/>
+            </a:effectRef>
+            <a:fontRef idx="minor">
+              <a:schemeClr val="lt1"/>
+            </a:fontRef>
+          </p:style>
+          <p:txBody>
+            <a:bodyPr rtlCol="0" anchor="ctr"/>
+            <a:p>
+              <a:pPr algn="ctr"/>
+              <a:endParaRPr lang="zh-CN" altLang="en-US"/>
+            </a:p>
+          </p:txBody>
+        </p:sp>
+        <p:sp>
+          <p:nvSpPr>
+            <p:cNvPr id="105" name="文本框 104"/>
+            <p:cNvSpPr txBox="1"/>
+            <p:nvPr/>
+          </p:nvSpPr>
+          <p:spPr>
+            <a:xfrm>
+              <a:off x="15625" y="5594"/>
+              <a:ext cx="2086" cy="531"/>
+            </a:xfrm>
+            <a:prstGeom prst="rect">
+              <a:avLst/>
+            </a:prstGeom>
+            <a:noFill/>
+          </p:spPr>
+          <p:txBody>
+            <a:bodyPr wrap="square" rtlCol="0">
+              <a:spAutoFit/>
+            </a:bodyPr>
+            <a:p>
+              <a:r>
+                <a:rPr lang="en-US" altLang="zh-CN" sz="1600" b="1">
+                  <a:solidFill>
+                    <a:schemeClr val="bg2">
+                      <a:lumMod val="50000"/>
+                    </a:schemeClr>
+                  </a:solidFill>
+                  <a:latin typeface="Times New Roman" panose="02020603050405020304" charset="0"/>
+                  <a:cs typeface="Times New Roman" panose="02020603050405020304" charset="0"/>
+                </a:rPr>
+                <a:t>Baselines</a:t>
+              </a:r>
+              <a:endParaRPr lang="en-US" altLang="zh-CN" sz="1600" b="1">
+                <a:solidFill>
+                  <a:schemeClr val="bg2">
+                    <a:lumMod val="50000"/>
+                  </a:schemeClr>
+                </a:solidFill>
+                <a:latin typeface="Times New Roman" panose="02020603050405020304" charset="0"/>
+                <a:cs typeface="Times New Roman" panose="02020603050405020304" charset="0"/>
+              </a:endParaRPr>
+            </a:p>
+          </p:txBody>
+        </p:sp>
+        <p:sp>
+          <p:nvSpPr>
+            <p:cNvPr id="107" name="文本框 106"/>
+            <p:cNvSpPr txBox="1"/>
+            <p:nvPr/>
+          </p:nvSpPr>
+          <p:spPr>
+            <a:xfrm>
+              <a:off x="10535" y="5592"/>
+              <a:ext cx="671" cy="483"/>
+            </a:xfrm>
+            <a:prstGeom prst="rect">
+              <a:avLst/>
+            </a:prstGeom>
+            <a:noFill/>
+          </p:spPr>
+          <p:txBody>
+            <a:bodyPr wrap="square" rtlCol="0">
+              <a:spAutoFit/>
+            </a:bodyPr>
+            <a:p>
+              <a:r>
+                <a:rPr lang="en-US" altLang="zh-CN" sz="1400">
+                  <a:solidFill>
+                    <a:schemeClr val="bg2">
+                      <a:lumMod val="50000"/>
+                    </a:schemeClr>
+                  </a:solidFill>
+                  <a:latin typeface="Times New Roman" panose="02020603050405020304" charset="0"/>
+                  <a:cs typeface="Times New Roman" panose="02020603050405020304" charset="0"/>
+                </a:rPr>
+                <a:t>F1</a:t>
+              </a:r>
+              <a:endParaRPr lang="en-US" altLang="zh-CN" sz="1400">
+                <a:solidFill>
+                  <a:schemeClr val="bg2">
+                    <a:lumMod val="50000"/>
+                  </a:schemeClr>
+                </a:solidFill>
+                <a:latin typeface="Times New Roman" panose="02020603050405020304" charset="0"/>
+                <a:cs typeface="Times New Roman" panose="02020603050405020304" charset="0"/>
+              </a:endParaRPr>
+            </a:p>
+          </p:txBody>
+        </p:sp>
+      </p:grpSp>
+      <p:grpSp>
+        <p:nvGrpSpPr>
+          <p:cNvPr id="115" name="组合 114"/>
+          <p:cNvGrpSpPr/>
+          <p:nvPr/>
+        </p:nvGrpSpPr>
+        <p:grpSpPr>
+          <a:xfrm rot="0">
+            <a:off x="2462530" y="2278380"/>
+            <a:ext cx="2997835" cy="522605"/>
+            <a:chOff x="3411" y="3780"/>
+            <a:chExt cx="4721" cy="823"/>
+          </a:xfrm>
+        </p:grpSpPr>
+        <p:sp>
+          <p:nvSpPr>
+            <p:cNvPr id="111" name="圆角矩形 110"/>
+            <p:cNvSpPr/>
+            <p:nvPr/>
+          </p:nvSpPr>
+          <p:spPr>
+            <a:xfrm>
+              <a:off x="3476" y="4035"/>
+              <a:ext cx="4572" cy="568"/>
+            </a:xfrm>
+            <a:prstGeom prst="roundRect">
+              <a:avLst/>
+            </a:prstGeom>
+            <a:solidFill>
+              <a:srgbClr val="FFFFFF"/>
+            </a:solidFill>
+            <a:ln>
+              <a:solidFill>
+                <a:srgbClr val="437137"/>
+              </a:solidFill>
+            </a:ln>
+          </p:spPr>
+          <p:style>
+            <a:lnRef idx="2">
+              <a:schemeClr val="accent1">
+                <a:lumMod val="75000"/>
+              </a:schemeClr>
+            </a:lnRef>
+            <a:fillRef idx="1">
+              <a:schemeClr val="accent1"/>
+            </a:fillRef>
+            <a:effectRef idx="0">
+              <a:srgbClr val="FFFFFF"/>
+            </a:effectRef>
+            <a:fontRef idx="minor">
+              <a:schemeClr val="lt1"/>
+            </a:fontRef>
+          </p:style>
+          <p:txBody>
+            <a:bodyPr rtlCol="0" anchor="ctr"/>
+            <a:p>
+              <a:pPr algn="ctr"/>
+              <a:endParaRPr lang="zh-CN" altLang="en-US"/>
+            </a:p>
+          </p:txBody>
+        </p:sp>
+        <p:sp>
+          <p:nvSpPr>
+            <p:cNvPr id="109" name="文本框 108"/>
+            <p:cNvSpPr txBox="1"/>
+            <p:nvPr/>
+          </p:nvSpPr>
+          <p:spPr>
+            <a:xfrm>
+              <a:off x="3807" y="4023"/>
+              <a:ext cx="4325" cy="580"/>
+            </a:xfrm>
+            <a:prstGeom prst="rect">
+              <a:avLst/>
+            </a:prstGeom>
+            <a:noFill/>
+          </p:spPr>
+          <p:txBody>
+            <a:bodyPr wrap="square" rtlCol="0">
+              <a:spAutoFit/>
+            </a:bodyPr>
+            <a:p>
+              <a:r>
+                <a:rPr lang="en-US" altLang="zh-CN">
                   <a:solidFill>
                     <a:srgbClr val="437137"/>
                   </a:solidFill>
                   <a:latin typeface="Times New Roman" panose="02020603050405020304" charset="0"/>
                   <a:cs typeface="Times New Roman" panose="02020603050405020304" charset="0"/>
-                </a:endParaRPr>
-              </a:p>
-            </p:txBody>
-          </p:sp>
-          <p:pic>
-            <p:nvPicPr>
-              <p:cNvPr id="116" name="图片 115" descr="正确"/>
-              <p:cNvPicPr>
-                <a:picLocks noChangeAspect="1"/>
-              </p:cNvPicPr>
-              <p:nvPr/>
-            </p:nvPicPr>
-            <p:blipFill>
-              <a:blip r:embed="rId1">
-                <a:extLst>
-                  <a:ext uri="{96DAC541-7B7A-43D3-8B79-37D633B846F1}">
-                    <asvg:svgBlip xmlns:asvg="http://schemas.microsoft.com/office/drawing/2016/SVG/main" r:embed="rId2"/>
-                  </a:ext>
-                </a:extLst>
-              </a:blip>
-              <a:stretch>
-                <a:fillRect/>
-              </a:stretch>
-            </p:blipFill>
-            <p:spPr>
-              <a:xfrm>
-                <a:off x="14991" y="3780"/>
-                <a:ext cx="425" cy="425"/>
-              </a:xfrm>
-              <a:prstGeom prst="rect">
-                <a:avLst/>
-              </a:prstGeom>
-            </p:spPr>
-          </p:pic>
-        </p:grpSp>
+                </a:rPr>
+                <a:t>SOTA defense performance</a:t>
+              </a:r>
+              <a:endParaRPr lang="en-US" altLang="zh-CN">
+                <a:solidFill>
+                  <a:srgbClr val="437137"/>
+                </a:solidFill>
+                <a:latin typeface="Times New Roman" panose="02020603050405020304" charset="0"/>
+                <a:cs typeface="Times New Roman" panose="02020603050405020304" charset="0"/>
+              </a:endParaRPr>
+            </a:p>
+          </p:txBody>
+        </p:sp>
+        <p:pic>
+          <p:nvPicPr>
+            <p:cNvPr id="114" name="图片 113" descr="正确"/>
+            <p:cNvPicPr>
+              <a:picLocks noChangeAspect="1"/>
+            </p:cNvPicPr>
+            <p:nvPr/>
+          </p:nvPicPr>
+          <p:blipFill>
+            <a:blip r:embed="rId1">
+              <a:extLst>
+                <a:ext uri="{96DAC541-7B7A-43D3-8B79-37D633B846F1}">
+                  <asvg:svgBlip xmlns:asvg="http://schemas.microsoft.com/office/drawing/2016/SVG/main" r:embed="rId2"/>
+                </a:ext>
+              </a:extLst>
+            </a:blip>
+            <a:stretch>
+              <a:fillRect/>
+            </a:stretch>
+          </p:blipFill>
+          <p:spPr>
+            <a:xfrm>
+              <a:off x="3411" y="3780"/>
+              <a:ext cx="425" cy="425"/>
+            </a:xfrm>
+            <a:prstGeom prst="rect">
+              <a:avLst/>
+            </a:prstGeom>
+          </p:spPr>
+        </p:pic>
+      </p:grpSp>
+      <p:grpSp>
+        <p:nvGrpSpPr>
+          <p:cNvPr id="117" name="组合 116"/>
+          <p:cNvGrpSpPr/>
+          <p:nvPr/>
+        </p:nvGrpSpPr>
+        <p:grpSpPr>
+          <a:xfrm rot="0">
+            <a:off x="6899275" y="2259330"/>
+            <a:ext cx="2994025" cy="534035"/>
+            <a:chOff x="10701" y="3780"/>
+            <a:chExt cx="4715" cy="841"/>
+          </a:xfrm>
+        </p:grpSpPr>
+        <p:sp>
+          <p:nvSpPr>
+            <p:cNvPr id="113" name="圆角矩形 112"/>
+            <p:cNvSpPr/>
+            <p:nvPr/>
+          </p:nvSpPr>
+          <p:spPr>
+            <a:xfrm>
+              <a:off x="10701" y="4035"/>
+              <a:ext cx="4644" cy="568"/>
+            </a:xfrm>
+            <a:prstGeom prst="roundRect">
+              <a:avLst/>
+            </a:prstGeom>
+            <a:solidFill>
+              <a:srgbClr val="FFFFFF"/>
+            </a:solidFill>
+            <a:ln>
+              <a:solidFill>
+                <a:srgbClr val="437137"/>
+              </a:solidFill>
+            </a:ln>
+          </p:spPr>
+          <p:style>
+            <a:lnRef idx="2">
+              <a:schemeClr val="accent1">
+                <a:lumMod val="75000"/>
+              </a:schemeClr>
+            </a:lnRef>
+            <a:fillRef idx="1">
+              <a:schemeClr val="accent1"/>
+            </a:fillRef>
+            <a:effectRef idx="0">
+              <a:srgbClr val="FFFFFF"/>
+            </a:effectRef>
+            <a:fontRef idx="minor">
+              <a:schemeClr val="lt1"/>
+            </a:fontRef>
+          </p:style>
+          <p:txBody>
+            <a:bodyPr rtlCol="0" anchor="ctr"/>
+            <a:p>
+              <a:pPr algn="ctr"/>
+              <a:endParaRPr lang="zh-CN" altLang="en-US"/>
+            </a:p>
+          </p:txBody>
+        </p:sp>
+        <p:sp>
+          <p:nvSpPr>
+            <p:cNvPr id="110" name="文本框 109"/>
+            <p:cNvSpPr txBox="1"/>
+            <p:nvPr/>
+          </p:nvSpPr>
+          <p:spPr>
+            <a:xfrm>
+              <a:off x="10934" y="4041"/>
+              <a:ext cx="3977" cy="580"/>
+            </a:xfrm>
+            <a:prstGeom prst="rect">
+              <a:avLst/>
+            </a:prstGeom>
+            <a:noFill/>
+          </p:spPr>
+          <p:txBody>
+            <a:bodyPr wrap="square" rtlCol="0">
+              <a:spAutoFit/>
+            </a:bodyPr>
+            <a:p>
+              <a:r>
+                <a:rPr lang="en-US" altLang="zh-CN">
+                  <a:solidFill>
+                    <a:srgbClr val="437137"/>
+                  </a:solidFill>
+                  <a:latin typeface="Times New Roman" panose="02020603050405020304" charset="0"/>
+                  <a:cs typeface="Times New Roman" panose="02020603050405020304" charset="0"/>
+                </a:rPr>
+                <a:t>Cross-domain generation</a:t>
+              </a:r>
+              <a:endParaRPr lang="en-US" altLang="zh-CN">
+                <a:solidFill>
+                  <a:srgbClr val="437137"/>
+                </a:solidFill>
+                <a:latin typeface="Times New Roman" panose="02020603050405020304" charset="0"/>
+                <a:cs typeface="Times New Roman" panose="02020603050405020304" charset="0"/>
+              </a:endParaRPr>
+            </a:p>
+          </p:txBody>
+        </p:sp>
+        <p:pic>
+          <p:nvPicPr>
+            <p:cNvPr id="116" name="图片 115" descr="正确"/>
+            <p:cNvPicPr>
+              <a:picLocks noChangeAspect="1"/>
+            </p:cNvPicPr>
+            <p:nvPr/>
+          </p:nvPicPr>
+          <p:blipFill>
+            <a:blip r:embed="rId1">
+              <a:extLst>
+                <a:ext uri="{96DAC541-7B7A-43D3-8B79-37D633B846F1}">
+                  <asvg:svgBlip xmlns:asvg="http://schemas.microsoft.com/office/drawing/2016/SVG/main" r:embed="rId2"/>
+                </a:ext>
+              </a:extLst>
+            </a:blip>
+            <a:stretch>
+              <a:fillRect/>
+            </a:stretch>
+          </p:blipFill>
+          <p:spPr>
+            <a:xfrm>
+              <a:off x="14991" y="3780"/>
+              <a:ext cx="425" cy="425"/>
+            </a:xfrm>
+            <a:prstGeom prst="rect">
+              <a:avLst/>
+            </a:prstGeom>
+          </p:spPr>
+        </p:pic>
       </p:grpSp>
     </p:spTree>
     <p:custDataLst>
       <p:tags r:id="rId3"/>
+    </p:custDataLst>
+  </p:cSld>
+  <p:clrMapOvr>
+    <a:masterClrMapping/>
+  </p:clrMapOvr>
+</p:sld>
+</file>
+
+<file path=ppt/slides/slide2.xml><?xml version="1.0" encoding="utf-8"?>
+<p:sld xmlns:a="http://schemas.openxmlformats.org/drawingml/2006/main" xmlns:r="http://schemas.openxmlformats.org/officeDocument/2006/relationships" xmlns:p="http://schemas.openxmlformats.org/presentationml/2006/main">
+  <p:cSld>
+    <p:spTree>
+      <p:nvGrpSpPr>
+        <p:cNvPr id="1" name=""/>
+        <p:cNvGrpSpPr/>
+        <p:nvPr/>
+      </p:nvGrpSpPr>
+      <p:grpSpPr/>
+      <p:cxnSp>
+        <p:nvCxnSpPr>
+          <p:cNvPr id="51" name="直接连接符 50"/>
+          <p:cNvCxnSpPr/>
+          <p:nvPr/>
+        </p:nvCxnSpPr>
+        <p:spPr>
+          <a:xfrm>
+            <a:off x="3368675" y="1565275"/>
+            <a:ext cx="0" cy="1455420"/>
+          </a:xfrm>
+          <a:prstGeom prst="line">
+            <a:avLst/>
+          </a:prstGeom>
+          <a:ln>
+            <a:solidFill>
+              <a:srgbClr val="D3D1C7"/>
+            </a:solidFill>
+          </a:ln>
+        </p:spPr>
+        <p:style>
+          <a:lnRef idx="2">
+            <a:schemeClr val="accent1"/>
+          </a:lnRef>
+          <a:fillRef idx="0">
+            <a:srgbClr val="FFFFFF"/>
+          </a:fillRef>
+          <a:effectRef idx="0">
+            <a:srgbClr val="FFFFFF"/>
+          </a:effectRef>
+          <a:fontRef idx="minor">
+            <a:schemeClr val="tx1"/>
+          </a:fontRef>
+        </p:style>
+      </p:cxnSp>
+      <p:cxnSp>
+        <p:nvCxnSpPr>
+          <p:cNvPr id="52" name="直接连接符 51"/>
+          <p:cNvCxnSpPr/>
+          <p:nvPr/>
+        </p:nvCxnSpPr>
+        <p:spPr>
+          <a:xfrm flipV="1">
+            <a:off x="3370580" y="2999105"/>
+            <a:ext cx="3346450" cy="17780"/>
+          </a:xfrm>
+          <a:prstGeom prst="line">
+            <a:avLst/>
+          </a:prstGeom>
+          <a:ln>
+            <a:solidFill>
+              <a:srgbClr val="D3D1C7"/>
+            </a:solidFill>
+          </a:ln>
+        </p:spPr>
+        <p:style>
+          <a:lnRef idx="2">
+            <a:schemeClr val="accent1"/>
+          </a:lnRef>
+          <a:fillRef idx="0">
+            <a:srgbClr val="FFFFFF"/>
+          </a:fillRef>
+          <a:effectRef idx="0">
+            <a:srgbClr val="FFFFFF"/>
+          </a:effectRef>
+          <a:fontRef idx="minor">
+            <a:schemeClr val="tx1"/>
+          </a:fontRef>
+        </p:style>
+      </p:cxnSp>
+      <p:sp>
+        <p:nvSpPr>
+          <p:cNvPr id="58" name="文本框 57"/>
+          <p:cNvSpPr txBox="1"/>
+          <p:nvPr/>
+        </p:nvSpPr>
+        <p:spPr>
+          <a:xfrm>
+            <a:off x="3405505" y="2981960"/>
+            <a:ext cx="543560" cy="306705"/>
+          </a:xfrm>
+          <a:prstGeom prst="rect">
+            <a:avLst/>
+          </a:prstGeom>
+          <a:noFill/>
+        </p:spPr>
+        <p:txBody>
+          <a:bodyPr wrap="square" rtlCol="0">
+            <a:spAutoFit/>
+          </a:bodyPr>
+          <a:p>
+            <a:r>
+              <a:rPr lang="en-US" altLang="zh-CN" sz="1400">
+                <a:solidFill>
+                  <a:schemeClr val="bg2">
+                    <a:lumMod val="50000"/>
+                  </a:schemeClr>
+                </a:solidFill>
+                <a:latin typeface="Times New Roman" panose="02020603050405020304" charset="0"/>
+                <a:cs typeface="Times New Roman" panose="02020603050405020304" charset="0"/>
+              </a:rPr>
+              <a:t>App</a:t>
+            </a:r>
+            <a:endParaRPr lang="en-US" altLang="zh-CN" sz="1400">
+              <a:solidFill>
+                <a:schemeClr val="bg2">
+                  <a:lumMod val="50000"/>
+                </a:schemeClr>
+              </a:solidFill>
+              <a:latin typeface="Times New Roman" panose="02020603050405020304" charset="0"/>
+              <a:cs typeface="Times New Roman" panose="02020603050405020304" charset="0"/>
+            </a:endParaRPr>
+          </a:p>
+        </p:txBody>
+      </p:sp>
+      <p:sp>
+        <p:nvSpPr>
+          <p:cNvPr id="59" name="文本框 58"/>
+          <p:cNvSpPr txBox="1"/>
+          <p:nvPr/>
+        </p:nvSpPr>
+        <p:spPr>
+          <a:xfrm>
+            <a:off x="3934460" y="2981960"/>
+            <a:ext cx="543560" cy="306705"/>
+          </a:xfrm>
+          <a:prstGeom prst="rect">
+            <a:avLst/>
+          </a:prstGeom>
+          <a:noFill/>
+        </p:spPr>
+        <p:txBody>
+          <a:bodyPr wrap="square" rtlCol="0">
+            <a:spAutoFit/>
+          </a:bodyPr>
+          <a:p>
+            <a:r>
+              <a:rPr lang="en-US" altLang="zh-CN" sz="1400">
+                <a:solidFill>
+                  <a:schemeClr val="bg2">
+                    <a:lumMod val="50000"/>
+                  </a:schemeClr>
+                </a:solidFill>
+                <a:latin typeface="Times New Roman" panose="02020603050405020304" charset="0"/>
+                <a:cs typeface="Times New Roman" panose="02020603050405020304" charset="0"/>
+              </a:rPr>
+              <a:t>Prog</a:t>
+            </a:r>
+            <a:endParaRPr lang="en-US" altLang="zh-CN" sz="1400">
+              <a:solidFill>
+                <a:schemeClr val="bg2">
+                  <a:lumMod val="50000"/>
+                </a:schemeClr>
+              </a:solidFill>
+              <a:latin typeface="Times New Roman" panose="02020603050405020304" charset="0"/>
+              <a:cs typeface="Times New Roman" panose="02020603050405020304" charset="0"/>
+            </a:endParaRPr>
+          </a:p>
+        </p:txBody>
+      </p:sp>
+      <p:sp>
+        <p:nvSpPr>
+          <p:cNvPr id="60" name="文本框 59"/>
+          <p:cNvSpPr txBox="1"/>
+          <p:nvPr/>
+        </p:nvSpPr>
+        <p:spPr>
+          <a:xfrm>
+            <a:off x="4503420" y="2981960"/>
+            <a:ext cx="543560" cy="306705"/>
+          </a:xfrm>
+          <a:prstGeom prst="rect">
+            <a:avLst/>
+          </a:prstGeom>
+          <a:noFill/>
+        </p:spPr>
+        <p:txBody>
+          <a:bodyPr wrap="square" rtlCol="0">
+            <a:spAutoFit/>
+          </a:bodyPr>
+          <a:p>
+            <a:r>
+              <a:rPr lang="en-US" altLang="zh-CN" sz="1400">
+                <a:solidFill>
+                  <a:schemeClr val="bg2">
+                    <a:lumMod val="50000"/>
+                  </a:schemeClr>
+                </a:solidFill>
+                <a:latin typeface="Times New Roman" panose="02020603050405020304" charset="0"/>
+                <a:cs typeface="Times New Roman" panose="02020603050405020304" charset="0"/>
+              </a:rPr>
+              <a:t>IoT</a:t>
+            </a:r>
+            <a:endParaRPr lang="en-US" altLang="zh-CN" sz="1400">
+              <a:solidFill>
+                <a:schemeClr val="bg2">
+                  <a:lumMod val="50000"/>
+                </a:schemeClr>
+              </a:solidFill>
+              <a:latin typeface="Times New Roman" panose="02020603050405020304" charset="0"/>
+              <a:cs typeface="Times New Roman" panose="02020603050405020304" charset="0"/>
+            </a:endParaRPr>
+          </a:p>
+        </p:txBody>
+      </p:sp>
+      <p:sp>
+        <p:nvSpPr>
+          <p:cNvPr id="61" name="文本框 60"/>
+          <p:cNvSpPr txBox="1"/>
+          <p:nvPr/>
+        </p:nvSpPr>
+        <p:spPr>
+          <a:xfrm>
+            <a:off x="4996180" y="2976880"/>
+            <a:ext cx="543560" cy="321945"/>
+          </a:xfrm>
+          <a:prstGeom prst="rect">
+            <a:avLst/>
+          </a:prstGeom>
+          <a:noFill/>
+        </p:spPr>
+        <p:txBody>
+          <a:bodyPr wrap="square" rtlCol="0">
+            <a:spAutoFit/>
+          </a:bodyPr>
+          <a:p>
+            <a:r>
+              <a:rPr lang="en-US" altLang="zh-CN" sz="1500">
+                <a:solidFill>
+                  <a:schemeClr val="bg2">
+                    <a:lumMod val="50000"/>
+                  </a:schemeClr>
+                </a:solidFill>
+                <a:latin typeface="Times New Roman" panose="02020603050405020304" charset="0"/>
+                <a:cs typeface="Times New Roman" panose="02020603050405020304" charset="0"/>
+              </a:rPr>
+              <a:t>Fin</a:t>
+            </a:r>
+            <a:endParaRPr lang="en-US" altLang="zh-CN" sz="1500">
+              <a:solidFill>
+                <a:schemeClr val="bg2">
+                  <a:lumMod val="50000"/>
+                </a:schemeClr>
+              </a:solidFill>
+              <a:latin typeface="Times New Roman" panose="02020603050405020304" charset="0"/>
+              <a:cs typeface="Times New Roman" panose="02020603050405020304" charset="0"/>
+            </a:endParaRPr>
+          </a:p>
+        </p:txBody>
+      </p:sp>
+      <p:sp>
+        <p:nvSpPr>
+          <p:cNvPr id="62" name="文本框 61"/>
+          <p:cNvSpPr txBox="1"/>
+          <p:nvPr/>
+        </p:nvSpPr>
+        <p:spPr>
+          <a:xfrm>
+            <a:off x="5436870" y="2981960"/>
+            <a:ext cx="543560" cy="321945"/>
+          </a:xfrm>
+          <a:prstGeom prst="rect">
+            <a:avLst/>
+          </a:prstGeom>
+          <a:noFill/>
+        </p:spPr>
+        <p:txBody>
+          <a:bodyPr wrap="square" rtlCol="0">
+            <a:spAutoFit/>
+          </a:bodyPr>
+          <a:p>
+            <a:r>
+              <a:rPr lang="en-US" altLang="zh-CN" sz="1500">
+                <a:solidFill>
+                  <a:schemeClr val="bg2">
+                    <a:lumMod val="50000"/>
+                  </a:schemeClr>
+                </a:solidFill>
+                <a:latin typeface="Times New Roman" panose="02020603050405020304" charset="0"/>
+                <a:cs typeface="Times New Roman" panose="02020603050405020304" charset="0"/>
+              </a:rPr>
+              <a:t>Web</a:t>
+            </a:r>
+            <a:endParaRPr lang="en-US" altLang="zh-CN" sz="1500">
+              <a:solidFill>
+                <a:schemeClr val="bg2">
+                  <a:lumMod val="50000"/>
+                </a:schemeClr>
+              </a:solidFill>
+              <a:latin typeface="Times New Roman" panose="02020603050405020304" charset="0"/>
+              <a:cs typeface="Times New Roman" panose="02020603050405020304" charset="0"/>
+            </a:endParaRPr>
+          </a:p>
+        </p:txBody>
+      </p:sp>
+      <p:grpSp>
+        <p:nvGrpSpPr>
+          <p:cNvPr id="67" name="组合 66"/>
+          <p:cNvGrpSpPr/>
+          <p:nvPr/>
+        </p:nvGrpSpPr>
+        <p:grpSpPr>
+          <a:xfrm rot="0">
+            <a:off x="3539490" y="1608455"/>
+            <a:ext cx="2269490" cy="336550"/>
+            <a:chOff x="11310" y="4778"/>
+            <a:chExt cx="3574" cy="530"/>
+          </a:xfrm>
+        </p:grpSpPr>
+        <p:sp>
+          <p:nvSpPr>
+            <p:cNvPr id="53" name="椭圆 52"/>
+            <p:cNvSpPr/>
+            <p:nvPr/>
+          </p:nvSpPr>
+          <p:spPr>
+            <a:xfrm>
+              <a:off x="11310" y="4962"/>
+              <a:ext cx="280" cy="280"/>
+            </a:xfrm>
+            <a:prstGeom prst="ellipse">
+              <a:avLst/>
+            </a:prstGeom>
+            <a:solidFill>
+              <a:srgbClr val="1D9E75"/>
+            </a:solidFill>
+            <a:ln>
+              <a:solidFill>
+                <a:srgbClr val="1F6052"/>
+              </a:solidFill>
+            </a:ln>
+          </p:spPr>
+          <p:style>
+            <a:lnRef idx="2">
+              <a:schemeClr val="accent1">
+                <a:lumMod val="75000"/>
+              </a:schemeClr>
+            </a:lnRef>
+            <a:fillRef idx="1">
+              <a:schemeClr val="accent1"/>
+            </a:fillRef>
+            <a:effectRef idx="0">
+              <a:srgbClr val="FFFFFF"/>
+            </a:effectRef>
+            <a:fontRef idx="minor">
+              <a:schemeClr val="lt1"/>
+            </a:fontRef>
+          </p:style>
+          <p:txBody>
+            <a:bodyPr rtlCol="0" anchor="ctr"/>
+            <a:p>
+              <a:pPr algn="ctr"/>
+              <a:endParaRPr lang="zh-CN" altLang="en-US"/>
+            </a:p>
+          </p:txBody>
+        </p:sp>
+        <p:sp>
+          <p:nvSpPr>
+            <p:cNvPr id="54" name="椭圆 53"/>
+            <p:cNvSpPr/>
+            <p:nvPr/>
+          </p:nvSpPr>
+          <p:spPr>
+            <a:xfrm>
+              <a:off x="12100" y="4778"/>
+              <a:ext cx="280" cy="280"/>
+            </a:xfrm>
+            <a:prstGeom prst="ellipse">
+              <a:avLst/>
+            </a:prstGeom>
+            <a:solidFill>
+              <a:srgbClr val="1D9E75"/>
+            </a:solidFill>
+            <a:ln>
+              <a:solidFill>
+                <a:srgbClr val="1F6052"/>
+              </a:solidFill>
+            </a:ln>
+          </p:spPr>
+          <p:style>
+            <a:lnRef idx="2">
+              <a:schemeClr val="accent1">
+                <a:lumMod val="75000"/>
+              </a:schemeClr>
+            </a:lnRef>
+            <a:fillRef idx="1">
+              <a:schemeClr val="accent1"/>
+            </a:fillRef>
+            <a:effectRef idx="0">
+              <a:srgbClr val="FFFFFF"/>
+            </a:effectRef>
+            <a:fontRef idx="minor">
+              <a:schemeClr val="lt1"/>
+            </a:fontRef>
+          </p:style>
+          <p:txBody>
+            <a:bodyPr rtlCol="0" anchor="ctr"/>
+            <a:p>
+              <a:pPr algn="ctr"/>
+              <a:endParaRPr lang="zh-CN" altLang="en-US"/>
+            </a:p>
+          </p:txBody>
+        </p:sp>
+        <p:sp>
+          <p:nvSpPr>
+            <p:cNvPr id="55" name="椭圆 54"/>
+            <p:cNvSpPr/>
+            <p:nvPr/>
+          </p:nvSpPr>
+          <p:spPr>
+            <a:xfrm>
+              <a:off x="12964" y="5028"/>
+              <a:ext cx="280" cy="280"/>
+            </a:xfrm>
+            <a:prstGeom prst="ellipse">
+              <a:avLst/>
+            </a:prstGeom>
+            <a:solidFill>
+              <a:srgbClr val="1D9E75"/>
+            </a:solidFill>
+            <a:ln>
+              <a:solidFill>
+                <a:srgbClr val="1F6052"/>
+              </a:solidFill>
+            </a:ln>
+          </p:spPr>
+          <p:style>
+            <a:lnRef idx="2">
+              <a:schemeClr val="accent1">
+                <a:lumMod val="75000"/>
+              </a:schemeClr>
+            </a:lnRef>
+            <a:fillRef idx="1">
+              <a:schemeClr val="accent1"/>
+            </a:fillRef>
+            <a:effectRef idx="0">
+              <a:srgbClr val="FFFFFF"/>
+            </a:effectRef>
+            <a:fontRef idx="minor">
+              <a:schemeClr val="lt1"/>
+            </a:fontRef>
+          </p:style>
+          <p:txBody>
+            <a:bodyPr rtlCol="0" anchor="ctr"/>
+            <a:p>
+              <a:pPr algn="ctr"/>
+              <a:endParaRPr lang="zh-CN" altLang="en-US"/>
+            </a:p>
+          </p:txBody>
+        </p:sp>
+        <p:sp>
+          <p:nvSpPr>
+            <p:cNvPr id="56" name="椭圆 55"/>
+            <p:cNvSpPr/>
+            <p:nvPr/>
+          </p:nvSpPr>
+          <p:spPr>
+            <a:xfrm>
+              <a:off x="13779" y="4866"/>
+              <a:ext cx="280" cy="280"/>
+            </a:xfrm>
+            <a:prstGeom prst="ellipse">
+              <a:avLst/>
+            </a:prstGeom>
+            <a:solidFill>
+              <a:srgbClr val="1D9E75"/>
+            </a:solidFill>
+            <a:ln>
+              <a:solidFill>
+                <a:srgbClr val="1F6052"/>
+              </a:solidFill>
+            </a:ln>
+          </p:spPr>
+          <p:style>
+            <a:lnRef idx="2">
+              <a:schemeClr val="accent1">
+                <a:lumMod val="75000"/>
+              </a:schemeClr>
+            </a:lnRef>
+            <a:fillRef idx="1">
+              <a:schemeClr val="accent1"/>
+            </a:fillRef>
+            <a:effectRef idx="0">
+              <a:srgbClr val="FFFFFF"/>
+            </a:effectRef>
+            <a:fontRef idx="minor">
+              <a:schemeClr val="lt1"/>
+            </a:fontRef>
+          </p:style>
+          <p:txBody>
+            <a:bodyPr rtlCol="0" anchor="ctr"/>
+            <a:p>
+              <a:pPr algn="ctr"/>
+              <a:endParaRPr lang="zh-CN" altLang="en-US"/>
+            </a:p>
+          </p:txBody>
+        </p:sp>
+        <p:sp>
+          <p:nvSpPr>
+            <p:cNvPr id="57" name="椭圆 56"/>
+            <p:cNvSpPr/>
+            <p:nvPr/>
+          </p:nvSpPr>
+          <p:spPr>
+            <a:xfrm>
+              <a:off x="14604" y="4778"/>
+              <a:ext cx="280" cy="280"/>
+            </a:xfrm>
+            <a:prstGeom prst="ellipse">
+              <a:avLst/>
+            </a:prstGeom>
+            <a:solidFill>
+              <a:srgbClr val="1D9E75"/>
+            </a:solidFill>
+            <a:ln>
+              <a:solidFill>
+                <a:srgbClr val="1F6052"/>
+              </a:solidFill>
+            </a:ln>
+          </p:spPr>
+          <p:style>
+            <a:lnRef idx="2">
+              <a:schemeClr val="accent1">
+                <a:lumMod val="75000"/>
+              </a:schemeClr>
+            </a:lnRef>
+            <a:fillRef idx="1">
+              <a:schemeClr val="accent1"/>
+            </a:fillRef>
+            <a:effectRef idx="0">
+              <a:srgbClr val="FFFFFF"/>
+            </a:effectRef>
+            <a:fontRef idx="minor">
+              <a:schemeClr val="lt1"/>
+            </a:fontRef>
+          </p:style>
+          <p:txBody>
+            <a:bodyPr rtlCol="0" anchor="ctr"/>
+            <a:p>
+              <a:pPr algn="ctr"/>
+              <a:endParaRPr lang="zh-CN" altLang="en-US"/>
+            </a:p>
+          </p:txBody>
+        </p:sp>
+        <p:cxnSp>
+          <p:nvCxnSpPr>
+            <p:cNvPr id="63" name="直接连接符 62"/>
+            <p:cNvCxnSpPr>
+              <a:stCxn id="53" idx="6"/>
+              <a:endCxn id="54" idx="2"/>
+            </p:cNvCxnSpPr>
+            <p:nvPr/>
+          </p:nvCxnSpPr>
+          <p:spPr>
+            <a:xfrm flipV="1">
+              <a:off x="11590" y="4918"/>
+              <a:ext cx="510" cy="184"/>
+            </a:xfrm>
+            <a:prstGeom prst="line">
+              <a:avLst/>
+            </a:prstGeom>
+            <a:ln w="22225">
+              <a:solidFill>
+                <a:srgbClr val="36A883"/>
+              </a:solidFill>
+            </a:ln>
+          </p:spPr>
+          <p:style>
+            <a:lnRef idx="2">
+              <a:schemeClr val="accent1"/>
+            </a:lnRef>
+            <a:fillRef idx="0">
+              <a:srgbClr val="FFFFFF"/>
+            </a:fillRef>
+            <a:effectRef idx="0">
+              <a:srgbClr val="FFFFFF"/>
+            </a:effectRef>
+            <a:fontRef idx="minor">
+              <a:schemeClr val="tx1"/>
+            </a:fontRef>
+          </p:style>
+        </p:cxnSp>
+        <p:cxnSp>
+          <p:nvCxnSpPr>
+            <p:cNvPr id="64" name="直接连接符 63"/>
+            <p:cNvCxnSpPr>
+              <a:stCxn id="55" idx="2"/>
+              <a:endCxn id="54" idx="6"/>
+            </p:cNvCxnSpPr>
+            <p:nvPr/>
+          </p:nvCxnSpPr>
+          <p:spPr>
+            <a:xfrm flipH="1" flipV="1">
+              <a:off x="12380" y="4918"/>
+              <a:ext cx="584" cy="250"/>
+            </a:xfrm>
+            <a:prstGeom prst="line">
+              <a:avLst/>
+            </a:prstGeom>
+            <a:ln w="22225">
+              <a:solidFill>
+                <a:srgbClr val="36A883"/>
+              </a:solidFill>
+            </a:ln>
+          </p:spPr>
+          <p:style>
+            <a:lnRef idx="2">
+              <a:schemeClr val="accent1"/>
+            </a:lnRef>
+            <a:fillRef idx="0">
+              <a:srgbClr val="FFFFFF"/>
+            </a:fillRef>
+            <a:effectRef idx="0">
+              <a:srgbClr val="FFFFFF"/>
+            </a:effectRef>
+            <a:fontRef idx="minor">
+              <a:schemeClr val="tx1"/>
+            </a:fontRef>
+          </p:style>
+        </p:cxnSp>
+        <p:cxnSp>
+          <p:nvCxnSpPr>
+            <p:cNvPr id="65" name="直接连接符 64"/>
+            <p:cNvCxnSpPr>
+              <a:stCxn id="55" idx="6"/>
+              <a:endCxn id="56" idx="2"/>
+            </p:cNvCxnSpPr>
+            <p:nvPr/>
+          </p:nvCxnSpPr>
+          <p:spPr>
+            <a:xfrm flipV="1">
+              <a:off x="13244" y="5006"/>
+              <a:ext cx="535" cy="162"/>
+            </a:xfrm>
+            <a:prstGeom prst="line">
+              <a:avLst/>
+            </a:prstGeom>
+            <a:ln w="22225">
+              <a:solidFill>
+                <a:srgbClr val="36A883"/>
+              </a:solidFill>
+            </a:ln>
+          </p:spPr>
+          <p:style>
+            <a:lnRef idx="2">
+              <a:schemeClr val="accent1"/>
+            </a:lnRef>
+            <a:fillRef idx="0">
+              <a:srgbClr val="FFFFFF"/>
+            </a:fillRef>
+            <a:effectRef idx="0">
+              <a:srgbClr val="FFFFFF"/>
+            </a:effectRef>
+            <a:fontRef idx="minor">
+              <a:schemeClr val="tx1"/>
+            </a:fontRef>
+          </p:style>
+        </p:cxnSp>
+        <p:cxnSp>
+          <p:nvCxnSpPr>
+            <p:cNvPr id="66" name="直接连接符 65"/>
+            <p:cNvCxnSpPr>
+              <a:stCxn id="56" idx="6"/>
+              <a:endCxn id="57" idx="2"/>
+            </p:cNvCxnSpPr>
+            <p:nvPr/>
+          </p:nvCxnSpPr>
+          <p:spPr>
+            <a:xfrm flipV="1">
+              <a:off x="14059" y="4918"/>
+              <a:ext cx="545" cy="88"/>
+            </a:xfrm>
+            <a:prstGeom prst="line">
+              <a:avLst/>
+            </a:prstGeom>
+            <a:ln w="22225">
+              <a:solidFill>
+                <a:srgbClr val="36A883"/>
+              </a:solidFill>
+            </a:ln>
+          </p:spPr>
+          <p:style>
+            <a:lnRef idx="2">
+              <a:schemeClr val="accent1"/>
+            </a:lnRef>
+            <a:fillRef idx="0">
+              <a:srgbClr val="FFFFFF"/>
+            </a:fillRef>
+            <a:effectRef idx="0">
+              <a:srgbClr val="FFFFFF"/>
+            </a:effectRef>
+            <a:fontRef idx="minor">
+              <a:schemeClr val="tx1"/>
+            </a:fontRef>
+          </p:style>
+        </p:cxnSp>
+      </p:grpSp>
+      <p:grpSp>
+        <p:nvGrpSpPr>
+          <p:cNvPr id="79" name="组合 78"/>
+          <p:cNvGrpSpPr/>
+          <p:nvPr/>
+        </p:nvGrpSpPr>
+        <p:grpSpPr>
+          <a:xfrm rot="0">
+            <a:off x="3539490" y="1983105"/>
+            <a:ext cx="2269490" cy="895350"/>
+            <a:chOff x="11310" y="5368"/>
+            <a:chExt cx="3574" cy="1410"/>
+          </a:xfrm>
+        </p:grpSpPr>
+        <p:sp>
+          <p:nvSpPr>
+            <p:cNvPr id="70" name="椭圆 69"/>
+            <p:cNvSpPr/>
+            <p:nvPr/>
+          </p:nvSpPr>
+          <p:spPr>
+            <a:xfrm>
+              <a:off x="11310" y="5608"/>
+              <a:ext cx="280" cy="280"/>
+            </a:xfrm>
+            <a:prstGeom prst="ellipse">
+              <a:avLst/>
+            </a:prstGeom>
+            <a:solidFill>
+              <a:srgbClr val="D3D1C7"/>
+            </a:solidFill>
+            <a:ln>
+              <a:solidFill>
+                <a:srgbClr val="B5B3AD"/>
+              </a:solidFill>
+            </a:ln>
+          </p:spPr>
+          <p:style>
+            <a:lnRef idx="2">
+              <a:schemeClr val="accent1">
+                <a:lumMod val="75000"/>
+              </a:schemeClr>
+            </a:lnRef>
+            <a:fillRef idx="1">
+              <a:schemeClr val="accent1"/>
+            </a:fillRef>
+            <a:effectRef idx="0">
+              <a:srgbClr val="FFFFFF"/>
+            </a:effectRef>
+            <a:fontRef idx="minor">
+              <a:schemeClr val="lt1"/>
+            </a:fontRef>
+          </p:style>
+          <p:txBody>
+            <a:bodyPr rtlCol="0" anchor="ctr"/>
+            <a:p>
+              <a:pPr algn="ctr"/>
+              <a:endParaRPr lang="zh-CN" altLang="en-US"/>
+            </a:p>
+          </p:txBody>
+        </p:sp>
+        <p:sp>
+          <p:nvSpPr>
+            <p:cNvPr id="71" name="椭圆 70"/>
+            <p:cNvSpPr/>
+            <p:nvPr/>
+          </p:nvSpPr>
+          <p:spPr>
+            <a:xfrm>
+              <a:off x="12100" y="5368"/>
+              <a:ext cx="280" cy="280"/>
+            </a:xfrm>
+            <a:prstGeom prst="ellipse">
+              <a:avLst/>
+            </a:prstGeom>
+            <a:solidFill>
+              <a:srgbClr val="D3D1C7"/>
+            </a:solidFill>
+            <a:ln>
+              <a:solidFill>
+                <a:srgbClr val="B5B3AD"/>
+              </a:solidFill>
+            </a:ln>
+          </p:spPr>
+          <p:style>
+            <a:lnRef idx="2">
+              <a:schemeClr val="accent1">
+                <a:lumMod val="75000"/>
+              </a:schemeClr>
+            </a:lnRef>
+            <a:fillRef idx="1">
+              <a:schemeClr val="accent1"/>
+            </a:fillRef>
+            <a:effectRef idx="0">
+              <a:srgbClr val="FFFFFF"/>
+            </a:effectRef>
+            <a:fontRef idx="minor">
+              <a:schemeClr val="lt1"/>
+            </a:fontRef>
+          </p:style>
+          <p:txBody>
+            <a:bodyPr rtlCol="0" anchor="ctr"/>
+            <a:p>
+              <a:pPr algn="ctr"/>
+              <a:endParaRPr lang="zh-CN" altLang="en-US"/>
+            </a:p>
+          </p:txBody>
+        </p:sp>
+        <p:sp>
+          <p:nvSpPr>
+            <p:cNvPr id="72" name="椭圆 71"/>
+            <p:cNvSpPr/>
+            <p:nvPr/>
+          </p:nvSpPr>
+          <p:spPr>
+            <a:xfrm>
+              <a:off x="12964" y="6434"/>
+              <a:ext cx="280" cy="280"/>
+            </a:xfrm>
+            <a:prstGeom prst="ellipse">
+              <a:avLst/>
+            </a:prstGeom>
+            <a:solidFill>
+              <a:srgbClr val="D3D1C7"/>
+            </a:solidFill>
+            <a:ln>
+              <a:solidFill>
+                <a:srgbClr val="B5B3AD"/>
+              </a:solidFill>
+            </a:ln>
+          </p:spPr>
+          <p:style>
+            <a:lnRef idx="2">
+              <a:schemeClr val="accent1">
+                <a:lumMod val="75000"/>
+              </a:schemeClr>
+            </a:lnRef>
+            <a:fillRef idx="1">
+              <a:schemeClr val="accent1"/>
+            </a:fillRef>
+            <a:effectRef idx="0">
+              <a:srgbClr val="FFFFFF"/>
+            </a:effectRef>
+            <a:fontRef idx="minor">
+              <a:schemeClr val="lt1"/>
+            </a:fontRef>
+          </p:style>
+          <p:txBody>
+            <a:bodyPr rtlCol="0" anchor="ctr"/>
+            <a:p>
+              <a:pPr algn="ctr"/>
+              <a:endParaRPr lang="zh-CN" altLang="en-US"/>
+            </a:p>
+          </p:txBody>
+        </p:sp>
+        <p:sp>
+          <p:nvSpPr>
+            <p:cNvPr id="73" name="椭圆 72"/>
+            <p:cNvSpPr/>
+            <p:nvPr/>
+          </p:nvSpPr>
+          <p:spPr>
+            <a:xfrm>
+              <a:off x="13779" y="6498"/>
+              <a:ext cx="280" cy="280"/>
+            </a:xfrm>
+            <a:prstGeom prst="ellipse">
+              <a:avLst/>
+            </a:prstGeom>
+            <a:solidFill>
+              <a:srgbClr val="D3D1C7"/>
+            </a:solidFill>
+            <a:ln>
+              <a:solidFill>
+                <a:srgbClr val="B5B3AD"/>
+              </a:solidFill>
+            </a:ln>
+          </p:spPr>
+          <p:style>
+            <a:lnRef idx="2">
+              <a:schemeClr val="accent1">
+                <a:lumMod val="75000"/>
+              </a:schemeClr>
+            </a:lnRef>
+            <a:fillRef idx="1">
+              <a:schemeClr val="accent1"/>
+            </a:fillRef>
+            <a:effectRef idx="0">
+              <a:srgbClr val="FFFFFF"/>
+            </a:effectRef>
+            <a:fontRef idx="minor">
+              <a:schemeClr val="lt1"/>
+            </a:fontRef>
+          </p:style>
+          <p:txBody>
+            <a:bodyPr rtlCol="0" anchor="ctr"/>
+            <a:p>
+              <a:pPr algn="ctr"/>
+              <a:endParaRPr lang="zh-CN" altLang="en-US"/>
+            </a:p>
+          </p:txBody>
+        </p:sp>
+        <p:sp>
+          <p:nvSpPr>
+            <p:cNvPr id="74" name="椭圆 73"/>
+            <p:cNvSpPr/>
+            <p:nvPr/>
+          </p:nvSpPr>
+          <p:spPr>
+            <a:xfrm>
+              <a:off x="14604" y="5691"/>
+              <a:ext cx="280" cy="280"/>
+            </a:xfrm>
+            <a:prstGeom prst="ellipse">
+              <a:avLst/>
+            </a:prstGeom>
+            <a:solidFill>
+              <a:srgbClr val="D3D1C7"/>
+            </a:solidFill>
+            <a:ln>
+              <a:solidFill>
+                <a:srgbClr val="B5B3AD"/>
+              </a:solidFill>
+            </a:ln>
+          </p:spPr>
+          <p:style>
+            <a:lnRef idx="2">
+              <a:schemeClr val="accent1">
+                <a:lumMod val="75000"/>
+              </a:schemeClr>
+            </a:lnRef>
+            <a:fillRef idx="1">
+              <a:schemeClr val="accent1"/>
+            </a:fillRef>
+            <a:effectRef idx="0">
+              <a:srgbClr val="FFFFFF"/>
+            </a:effectRef>
+            <a:fontRef idx="minor">
+              <a:schemeClr val="lt1"/>
+            </a:fontRef>
+          </p:style>
+          <p:txBody>
+            <a:bodyPr rtlCol="0" anchor="ctr"/>
+            <a:p>
+              <a:pPr algn="ctr"/>
+              <a:endParaRPr lang="zh-CN" altLang="en-US"/>
+            </a:p>
+          </p:txBody>
+        </p:sp>
+        <p:cxnSp>
+          <p:nvCxnSpPr>
+            <p:cNvPr id="75" name="直接连接符 74"/>
+            <p:cNvCxnSpPr>
+              <a:stCxn id="70" idx="6"/>
+              <a:endCxn id="71" idx="2"/>
+            </p:cNvCxnSpPr>
+            <p:nvPr/>
+          </p:nvCxnSpPr>
+          <p:spPr>
+            <a:xfrm flipV="1">
+              <a:off x="11590" y="5508"/>
+              <a:ext cx="510" cy="240"/>
+            </a:xfrm>
+            <a:prstGeom prst="line">
+              <a:avLst/>
+            </a:prstGeom>
+            <a:ln w="19050" cmpd="sng">
+              <a:solidFill>
+                <a:schemeClr val="bg2">
+                  <a:lumMod val="90000"/>
+                </a:schemeClr>
+              </a:solidFill>
+              <a:prstDash val="sysDash"/>
+            </a:ln>
+          </p:spPr>
+          <p:style>
+            <a:lnRef idx="2">
+              <a:schemeClr val="accent1"/>
+            </a:lnRef>
+            <a:fillRef idx="0">
+              <a:srgbClr val="FFFFFF"/>
+            </a:fillRef>
+            <a:effectRef idx="0">
+              <a:srgbClr val="FFFFFF"/>
+            </a:effectRef>
+            <a:fontRef idx="minor">
+              <a:schemeClr val="tx1"/>
+            </a:fontRef>
+          </p:style>
+        </p:cxnSp>
+        <p:cxnSp>
+          <p:nvCxnSpPr>
+            <p:cNvPr id="76" name="直接连接符 75"/>
+            <p:cNvCxnSpPr>
+              <a:stCxn id="72" idx="2"/>
+              <a:endCxn id="71" idx="6"/>
+            </p:cNvCxnSpPr>
+            <p:nvPr/>
+          </p:nvCxnSpPr>
+          <p:spPr>
+            <a:xfrm flipH="1" flipV="1">
+              <a:off x="12380" y="5508"/>
+              <a:ext cx="584" cy="1066"/>
+            </a:xfrm>
+            <a:prstGeom prst="line">
+              <a:avLst/>
+            </a:prstGeom>
+            <a:ln w="19050" cmpd="sng">
+              <a:solidFill>
+                <a:schemeClr val="bg2">
+                  <a:lumMod val="90000"/>
+                </a:schemeClr>
+              </a:solidFill>
+              <a:prstDash val="sysDash"/>
+            </a:ln>
+          </p:spPr>
+          <p:style>
+            <a:lnRef idx="2">
+              <a:schemeClr val="accent1"/>
+            </a:lnRef>
+            <a:fillRef idx="0">
+              <a:srgbClr val="FFFFFF"/>
+            </a:fillRef>
+            <a:effectRef idx="0">
+              <a:srgbClr val="FFFFFF"/>
+            </a:effectRef>
+            <a:fontRef idx="minor">
+              <a:schemeClr val="tx1"/>
+            </a:fontRef>
+          </p:style>
+        </p:cxnSp>
+        <p:cxnSp>
+          <p:nvCxnSpPr>
+            <p:cNvPr id="77" name="直接连接符 76"/>
+            <p:cNvCxnSpPr>
+              <a:stCxn id="72" idx="6"/>
+              <a:endCxn id="73" idx="2"/>
+            </p:cNvCxnSpPr>
+            <p:nvPr/>
+          </p:nvCxnSpPr>
+          <p:spPr>
+            <a:xfrm>
+              <a:off x="13244" y="6574"/>
+              <a:ext cx="535" cy="64"/>
+            </a:xfrm>
+            <a:prstGeom prst="line">
+              <a:avLst/>
+            </a:prstGeom>
+            <a:ln w="19050" cmpd="sng">
+              <a:solidFill>
+                <a:schemeClr val="bg2">
+                  <a:lumMod val="90000"/>
+                </a:schemeClr>
+              </a:solidFill>
+              <a:prstDash val="sysDash"/>
+            </a:ln>
+          </p:spPr>
+          <p:style>
+            <a:lnRef idx="2">
+              <a:schemeClr val="accent1"/>
+            </a:lnRef>
+            <a:fillRef idx="0">
+              <a:srgbClr val="FFFFFF"/>
+            </a:fillRef>
+            <a:effectRef idx="0">
+              <a:srgbClr val="FFFFFF"/>
+            </a:effectRef>
+            <a:fontRef idx="minor">
+              <a:schemeClr val="tx1"/>
+            </a:fontRef>
+          </p:style>
+        </p:cxnSp>
+        <p:cxnSp>
+          <p:nvCxnSpPr>
+            <p:cNvPr id="78" name="直接连接符 77"/>
+            <p:cNvCxnSpPr>
+              <a:stCxn id="73" idx="6"/>
+              <a:endCxn id="74" idx="2"/>
+            </p:cNvCxnSpPr>
+            <p:nvPr/>
+          </p:nvCxnSpPr>
+          <p:spPr>
+            <a:xfrm flipV="1">
+              <a:off x="14059" y="5831"/>
+              <a:ext cx="545" cy="807"/>
+            </a:xfrm>
+            <a:prstGeom prst="line">
+              <a:avLst/>
+            </a:prstGeom>
+            <a:ln w="19050" cmpd="sng">
+              <a:solidFill>
+                <a:schemeClr val="bg2">
+                  <a:lumMod val="90000"/>
+                </a:schemeClr>
+              </a:solidFill>
+              <a:prstDash val="sysDash"/>
+            </a:ln>
+          </p:spPr>
+          <p:style>
+            <a:lnRef idx="2">
+              <a:schemeClr val="accent1"/>
+            </a:lnRef>
+            <a:fillRef idx="0">
+              <a:srgbClr val="FFFFFF"/>
+            </a:fillRef>
+            <a:effectRef idx="0">
+              <a:srgbClr val="FFFFFF"/>
+            </a:effectRef>
+            <a:fontRef idx="minor">
+              <a:schemeClr val="tx1"/>
+            </a:fontRef>
+          </p:style>
+        </p:cxnSp>
+      </p:grpSp>
+      <p:sp>
+        <p:nvSpPr>
+          <p:cNvPr id="91" name="椭圆 90"/>
+          <p:cNvSpPr/>
+          <p:nvPr/>
+        </p:nvSpPr>
+        <p:spPr>
+          <a:xfrm>
+            <a:off x="3539490" y="2464435"/>
+            <a:ext cx="177800" cy="177800"/>
+          </a:xfrm>
+          <a:prstGeom prst="ellipse">
+            <a:avLst/>
+          </a:prstGeom>
+          <a:solidFill>
+            <a:schemeClr val="bg2">
+              <a:lumMod val="75000"/>
+            </a:schemeClr>
+          </a:solidFill>
+          <a:ln>
+            <a:solidFill>
+              <a:schemeClr val="bg2">
+                <a:lumMod val="50000"/>
+              </a:schemeClr>
+            </a:solidFill>
+          </a:ln>
+        </p:spPr>
+        <p:style>
+          <a:lnRef idx="2">
+            <a:schemeClr val="accent1">
+              <a:lumMod val="75000"/>
+            </a:schemeClr>
+          </a:lnRef>
+          <a:fillRef idx="1">
+            <a:schemeClr val="accent1"/>
+          </a:fillRef>
+          <a:effectRef idx="0">
+            <a:srgbClr val="FFFFFF"/>
+          </a:effectRef>
+          <a:fontRef idx="minor">
+            <a:schemeClr val="lt1"/>
+          </a:fontRef>
+        </p:style>
+        <p:txBody>
+          <a:bodyPr rtlCol="0" anchor="ctr"/>
+          <a:p>
+            <a:pPr algn="ctr"/>
+            <a:endParaRPr lang="zh-CN" altLang="en-US"/>
+          </a:p>
+        </p:txBody>
+      </p:sp>
+      <p:sp>
+        <p:nvSpPr>
+          <p:cNvPr id="92" name="椭圆 91"/>
+          <p:cNvSpPr/>
+          <p:nvPr/>
+        </p:nvSpPr>
+        <p:spPr>
+          <a:xfrm>
+            <a:off x="4041140" y="2660015"/>
+            <a:ext cx="177800" cy="177800"/>
+          </a:xfrm>
+          <a:prstGeom prst="ellipse">
+            <a:avLst/>
+          </a:prstGeom>
+          <a:solidFill>
+            <a:schemeClr val="bg2">
+              <a:lumMod val="75000"/>
+            </a:schemeClr>
+          </a:solidFill>
+          <a:ln>
+            <a:solidFill>
+              <a:schemeClr val="bg2">
+                <a:lumMod val="50000"/>
+              </a:schemeClr>
+            </a:solidFill>
+          </a:ln>
+        </p:spPr>
+        <p:style>
+          <a:lnRef idx="2">
+            <a:schemeClr val="accent1">
+              <a:lumMod val="75000"/>
+            </a:schemeClr>
+          </a:lnRef>
+          <a:fillRef idx="1">
+            <a:schemeClr val="accent1"/>
+          </a:fillRef>
+          <a:effectRef idx="0">
+            <a:srgbClr val="FFFFFF"/>
+          </a:effectRef>
+          <a:fontRef idx="minor">
+            <a:schemeClr val="lt1"/>
+          </a:fontRef>
+        </p:style>
+        <p:txBody>
+          <a:bodyPr rtlCol="0" anchor="ctr"/>
+          <a:p>
+            <a:pPr algn="ctr"/>
+            <a:endParaRPr lang="zh-CN" altLang="en-US"/>
+          </a:p>
+        </p:txBody>
+      </p:sp>
+      <p:sp>
+        <p:nvSpPr>
+          <p:cNvPr id="93" name="椭圆 92"/>
+          <p:cNvSpPr/>
+          <p:nvPr/>
+        </p:nvSpPr>
+        <p:spPr>
+          <a:xfrm>
+            <a:off x="4589780" y="2224405"/>
+            <a:ext cx="177800" cy="177800"/>
+          </a:xfrm>
+          <a:prstGeom prst="ellipse">
+            <a:avLst/>
+          </a:prstGeom>
+          <a:solidFill>
+            <a:schemeClr val="bg2">
+              <a:lumMod val="75000"/>
+            </a:schemeClr>
+          </a:solidFill>
+          <a:ln>
+            <a:solidFill>
+              <a:schemeClr val="bg2">
+                <a:lumMod val="50000"/>
+              </a:schemeClr>
+            </a:solidFill>
+          </a:ln>
+        </p:spPr>
+        <p:style>
+          <a:lnRef idx="2">
+            <a:schemeClr val="accent1">
+              <a:lumMod val="75000"/>
+            </a:schemeClr>
+          </a:lnRef>
+          <a:fillRef idx="1">
+            <a:schemeClr val="accent1"/>
+          </a:fillRef>
+          <a:effectRef idx="0">
+            <a:srgbClr val="FFFFFF"/>
+          </a:effectRef>
+          <a:fontRef idx="minor">
+            <a:schemeClr val="lt1"/>
+          </a:fontRef>
+        </p:style>
+        <p:txBody>
+          <a:bodyPr rtlCol="0" anchor="ctr"/>
+          <a:p>
+            <a:pPr algn="ctr"/>
+            <a:endParaRPr lang="zh-CN" altLang="en-US"/>
+          </a:p>
+        </p:txBody>
+      </p:sp>
+      <p:sp>
+        <p:nvSpPr>
+          <p:cNvPr id="94" name="椭圆 93"/>
+          <p:cNvSpPr/>
+          <p:nvPr/>
+        </p:nvSpPr>
+        <p:spPr>
+          <a:xfrm>
+            <a:off x="5107305" y="2482215"/>
+            <a:ext cx="177800" cy="177800"/>
+          </a:xfrm>
+          <a:prstGeom prst="ellipse">
+            <a:avLst/>
+          </a:prstGeom>
+          <a:solidFill>
+            <a:schemeClr val="bg2">
+              <a:lumMod val="75000"/>
+            </a:schemeClr>
+          </a:solidFill>
+          <a:ln>
+            <a:solidFill>
+              <a:schemeClr val="bg2">
+                <a:lumMod val="50000"/>
+              </a:schemeClr>
+            </a:solidFill>
+          </a:ln>
+        </p:spPr>
+        <p:style>
+          <a:lnRef idx="2">
+            <a:schemeClr val="accent1">
+              <a:lumMod val="75000"/>
+            </a:schemeClr>
+          </a:lnRef>
+          <a:fillRef idx="1">
+            <a:schemeClr val="accent1"/>
+          </a:fillRef>
+          <a:effectRef idx="0">
+            <a:srgbClr val="FFFFFF"/>
+          </a:effectRef>
+          <a:fontRef idx="minor">
+            <a:schemeClr val="lt1"/>
+          </a:fontRef>
+        </p:style>
+        <p:txBody>
+          <a:bodyPr rtlCol="0" anchor="ctr"/>
+          <a:p>
+            <a:pPr algn="ctr"/>
+            <a:endParaRPr lang="zh-CN" altLang="en-US"/>
+          </a:p>
+        </p:txBody>
+      </p:sp>
+      <p:sp>
+        <p:nvSpPr>
+          <p:cNvPr id="95" name="椭圆 94"/>
+          <p:cNvSpPr/>
+          <p:nvPr/>
+        </p:nvSpPr>
+        <p:spPr>
+          <a:xfrm>
+            <a:off x="5631180" y="2520315"/>
+            <a:ext cx="177800" cy="177800"/>
+          </a:xfrm>
+          <a:prstGeom prst="ellipse">
+            <a:avLst/>
+          </a:prstGeom>
+          <a:solidFill>
+            <a:schemeClr val="bg2">
+              <a:lumMod val="75000"/>
+            </a:schemeClr>
+          </a:solidFill>
+          <a:ln>
+            <a:solidFill>
+              <a:schemeClr val="bg2">
+                <a:lumMod val="50000"/>
+              </a:schemeClr>
+            </a:solidFill>
+          </a:ln>
+        </p:spPr>
+        <p:style>
+          <a:lnRef idx="2">
+            <a:schemeClr val="accent1">
+              <a:lumMod val="75000"/>
+            </a:schemeClr>
+          </a:lnRef>
+          <a:fillRef idx="1">
+            <a:schemeClr val="accent1"/>
+          </a:fillRef>
+          <a:effectRef idx="0">
+            <a:srgbClr val="FFFFFF"/>
+          </a:effectRef>
+          <a:fontRef idx="minor">
+            <a:schemeClr val="lt1"/>
+          </a:fontRef>
+        </p:style>
+        <p:txBody>
+          <a:bodyPr rtlCol="0" anchor="ctr"/>
+          <a:p>
+            <a:pPr algn="ctr"/>
+            <a:endParaRPr lang="zh-CN" altLang="en-US"/>
+          </a:p>
+        </p:txBody>
+      </p:sp>
+      <p:cxnSp>
+        <p:nvCxnSpPr>
+          <p:cNvPr id="96" name="直接连接符 95"/>
+          <p:cNvCxnSpPr>
+            <a:stCxn id="91" idx="6"/>
+            <a:endCxn id="92" idx="2"/>
+          </p:cNvCxnSpPr>
+          <p:nvPr/>
+        </p:nvCxnSpPr>
+        <p:spPr>
+          <a:xfrm>
+            <a:off x="3717290" y="2553335"/>
+            <a:ext cx="323850" cy="195580"/>
+          </a:xfrm>
+          <a:prstGeom prst="line">
+            <a:avLst/>
+          </a:prstGeom>
+          <a:ln w="19050" cmpd="sng">
+            <a:solidFill>
+              <a:schemeClr val="bg2">
+                <a:lumMod val="75000"/>
+              </a:schemeClr>
+            </a:solidFill>
+            <a:prstDash val="sysDash"/>
+          </a:ln>
+        </p:spPr>
+        <p:style>
+          <a:lnRef idx="2">
+            <a:schemeClr val="accent1"/>
+          </a:lnRef>
+          <a:fillRef idx="0">
+            <a:srgbClr val="FFFFFF"/>
+          </a:fillRef>
+          <a:effectRef idx="0">
+            <a:srgbClr val="FFFFFF"/>
+          </a:effectRef>
+          <a:fontRef idx="minor">
+            <a:schemeClr val="tx1"/>
+          </a:fontRef>
+        </p:style>
+      </p:cxnSp>
+      <p:cxnSp>
+        <p:nvCxnSpPr>
+          <p:cNvPr id="97" name="直接连接符 96"/>
+          <p:cNvCxnSpPr>
+            <a:stCxn id="93" idx="2"/>
+            <a:endCxn id="92" idx="6"/>
+          </p:cNvCxnSpPr>
+          <p:nvPr/>
+        </p:nvCxnSpPr>
+        <p:spPr>
+          <a:xfrm flipH="1">
+            <a:off x="4218940" y="2313305"/>
+            <a:ext cx="370840" cy="435610"/>
+          </a:xfrm>
+          <a:prstGeom prst="line">
+            <a:avLst/>
+          </a:prstGeom>
+          <a:ln w="19050" cmpd="sng">
+            <a:solidFill>
+              <a:schemeClr val="bg2">
+                <a:lumMod val="75000"/>
+              </a:schemeClr>
+            </a:solidFill>
+            <a:prstDash val="sysDash"/>
+          </a:ln>
+        </p:spPr>
+        <p:style>
+          <a:lnRef idx="2">
+            <a:schemeClr val="accent1"/>
+          </a:lnRef>
+          <a:fillRef idx="0">
+            <a:srgbClr val="FFFFFF"/>
+          </a:fillRef>
+          <a:effectRef idx="0">
+            <a:srgbClr val="FFFFFF"/>
+          </a:effectRef>
+          <a:fontRef idx="minor">
+            <a:schemeClr val="tx1"/>
+          </a:fontRef>
+        </p:style>
+      </p:cxnSp>
+      <p:cxnSp>
+        <p:nvCxnSpPr>
+          <p:cNvPr id="98" name="直接连接符 97"/>
+          <p:cNvCxnSpPr>
+            <a:stCxn id="93" idx="6"/>
+            <a:endCxn id="94" idx="2"/>
+          </p:cNvCxnSpPr>
+          <p:nvPr/>
+        </p:nvCxnSpPr>
+        <p:spPr>
+          <a:xfrm>
+            <a:off x="4767580" y="2313305"/>
+            <a:ext cx="339725" cy="257810"/>
+          </a:xfrm>
+          <a:prstGeom prst="line">
+            <a:avLst/>
+          </a:prstGeom>
+          <a:ln w="19050" cmpd="sng">
+            <a:solidFill>
+              <a:schemeClr val="bg2">
+                <a:lumMod val="75000"/>
+              </a:schemeClr>
+            </a:solidFill>
+            <a:prstDash val="sysDash"/>
+          </a:ln>
+        </p:spPr>
+        <p:style>
+          <a:lnRef idx="2">
+            <a:schemeClr val="accent1"/>
+          </a:lnRef>
+          <a:fillRef idx="0">
+            <a:srgbClr val="FFFFFF"/>
+          </a:fillRef>
+          <a:effectRef idx="0">
+            <a:srgbClr val="FFFFFF"/>
+          </a:effectRef>
+          <a:fontRef idx="minor">
+            <a:schemeClr val="tx1"/>
+          </a:fontRef>
+        </p:style>
+      </p:cxnSp>
+      <p:cxnSp>
+        <p:nvCxnSpPr>
+          <p:cNvPr id="99" name="直接连接符 98"/>
+          <p:cNvCxnSpPr>
+            <a:stCxn id="94" idx="6"/>
+            <a:endCxn id="95" idx="2"/>
+          </p:cNvCxnSpPr>
+          <p:nvPr/>
+        </p:nvCxnSpPr>
+        <p:spPr>
+          <a:xfrm>
+            <a:off x="5285105" y="2571115"/>
+            <a:ext cx="346075" cy="38100"/>
+          </a:xfrm>
+          <a:prstGeom prst="line">
+            <a:avLst/>
+          </a:prstGeom>
+          <a:ln w="19050" cmpd="sng">
+            <a:solidFill>
+              <a:schemeClr val="bg2">
+                <a:lumMod val="75000"/>
+              </a:schemeClr>
+            </a:solidFill>
+            <a:prstDash val="sysDash"/>
+          </a:ln>
+        </p:spPr>
+        <p:style>
+          <a:lnRef idx="2">
+            <a:schemeClr val="accent1"/>
+          </a:lnRef>
+          <a:fillRef idx="0">
+            <a:srgbClr val="FFFFFF"/>
+          </a:fillRef>
+          <a:effectRef idx="0">
+            <a:srgbClr val="FFFFFF"/>
+          </a:effectRef>
+          <a:fontRef idx="minor">
+            <a:schemeClr val="tx1"/>
+          </a:fontRef>
+        </p:style>
+      </p:cxnSp>
+      <p:sp>
+        <p:nvSpPr>
+          <p:cNvPr id="101" name="椭圆 100"/>
+          <p:cNvSpPr/>
+          <p:nvPr/>
+        </p:nvSpPr>
+        <p:spPr>
+          <a:xfrm>
+            <a:off x="6101715" y="1927225"/>
+            <a:ext cx="177800" cy="177800"/>
+          </a:xfrm>
+          <a:prstGeom prst="ellipse">
+            <a:avLst/>
+          </a:prstGeom>
+          <a:solidFill>
+            <a:srgbClr val="1D9E75"/>
+          </a:solidFill>
+          <a:ln>
+            <a:solidFill>
+              <a:srgbClr val="1F6052"/>
+            </a:solidFill>
+          </a:ln>
+        </p:spPr>
+        <p:style>
+          <a:lnRef idx="2">
+            <a:schemeClr val="accent1">
+              <a:lumMod val="75000"/>
+            </a:schemeClr>
+          </a:lnRef>
+          <a:fillRef idx="1">
+            <a:schemeClr val="accent1"/>
+          </a:fillRef>
+          <a:effectRef idx="0">
+            <a:srgbClr val="FFFFFF"/>
+          </a:effectRef>
+          <a:fontRef idx="minor">
+            <a:schemeClr val="lt1"/>
+          </a:fontRef>
+        </p:style>
+        <p:txBody>
+          <a:bodyPr rtlCol="0" anchor="ctr"/>
+          <a:p>
+            <a:pPr algn="ctr"/>
+            <a:endParaRPr lang="zh-CN" altLang="en-US"/>
+          </a:p>
+        </p:txBody>
+      </p:sp>
+      <p:sp>
+        <p:nvSpPr>
+          <p:cNvPr id="102" name="文本框 101"/>
+          <p:cNvSpPr txBox="1"/>
+          <p:nvPr/>
+        </p:nvSpPr>
+        <p:spPr>
+          <a:xfrm>
+            <a:off x="6279515" y="1849120"/>
+            <a:ext cx="1092835" cy="337185"/>
+          </a:xfrm>
+          <a:prstGeom prst="rect">
+            <a:avLst/>
+          </a:prstGeom>
+          <a:noFill/>
+        </p:spPr>
+        <p:txBody>
+          <a:bodyPr wrap="square" rtlCol="0">
+            <a:spAutoFit/>
+          </a:bodyPr>
+          <a:p>
+            <a:r>
+              <a:rPr lang="en-US" altLang="zh-CN" sz="1600" b="1">
+                <a:solidFill>
+                  <a:srgbClr val="3AAA85"/>
+                </a:solidFill>
+                <a:latin typeface="Times New Roman" panose="02020603050405020304" charset="0"/>
+                <a:cs typeface="Times New Roman" panose="02020603050405020304" charset="0"/>
+              </a:rPr>
+              <a:t>DEFEND</a:t>
+            </a:r>
+            <a:endParaRPr lang="en-US" altLang="zh-CN" sz="1600" b="1">
+              <a:solidFill>
+                <a:srgbClr val="3AAA85"/>
+              </a:solidFill>
+              <a:latin typeface="Times New Roman" panose="02020603050405020304" charset="0"/>
+              <a:cs typeface="Times New Roman" panose="02020603050405020304" charset="0"/>
+            </a:endParaRPr>
+          </a:p>
+        </p:txBody>
+      </p:sp>
+      <p:sp>
+        <p:nvSpPr>
+          <p:cNvPr id="104" name="椭圆 103"/>
+          <p:cNvSpPr/>
+          <p:nvPr/>
+        </p:nvSpPr>
+        <p:spPr>
+          <a:xfrm>
+            <a:off x="6101715" y="2224405"/>
+            <a:ext cx="177800" cy="177800"/>
+          </a:xfrm>
+          <a:prstGeom prst="ellipse">
+            <a:avLst/>
+          </a:prstGeom>
+          <a:solidFill>
+            <a:srgbClr val="D3D1C7"/>
+          </a:solidFill>
+          <a:ln>
+            <a:solidFill>
+              <a:srgbClr val="B5B3AD"/>
+            </a:solidFill>
+          </a:ln>
+        </p:spPr>
+        <p:style>
+          <a:lnRef idx="2">
+            <a:schemeClr val="accent1">
+              <a:lumMod val="75000"/>
+            </a:schemeClr>
+          </a:lnRef>
+          <a:fillRef idx="1">
+            <a:schemeClr val="accent1"/>
+          </a:fillRef>
+          <a:effectRef idx="0">
+            <a:srgbClr val="FFFFFF"/>
+          </a:effectRef>
+          <a:fontRef idx="minor">
+            <a:schemeClr val="lt1"/>
+          </a:fontRef>
+        </p:style>
+        <p:txBody>
+          <a:bodyPr rtlCol="0" anchor="ctr"/>
+          <a:p>
+            <a:pPr algn="ctr"/>
+            <a:endParaRPr lang="zh-CN" altLang="en-US"/>
+          </a:p>
+        </p:txBody>
+      </p:sp>
+      <p:sp>
+        <p:nvSpPr>
+          <p:cNvPr id="105" name="文本框 104"/>
+          <p:cNvSpPr txBox="1"/>
+          <p:nvPr/>
+        </p:nvSpPr>
+        <p:spPr>
+          <a:xfrm>
+            <a:off x="6279515" y="2126615"/>
+            <a:ext cx="1324610" cy="337185"/>
+          </a:xfrm>
+          <a:prstGeom prst="rect">
+            <a:avLst/>
+          </a:prstGeom>
+          <a:noFill/>
+        </p:spPr>
+        <p:txBody>
+          <a:bodyPr wrap="square" rtlCol="0">
+            <a:spAutoFit/>
+          </a:bodyPr>
+          <a:p>
+            <a:r>
+              <a:rPr lang="en-US" altLang="zh-CN" sz="1600" b="1">
+                <a:solidFill>
+                  <a:schemeClr val="bg2">
+                    <a:lumMod val="50000"/>
+                  </a:schemeClr>
+                </a:solidFill>
+                <a:latin typeface="Times New Roman" panose="02020603050405020304" charset="0"/>
+                <a:cs typeface="Times New Roman" panose="02020603050405020304" charset="0"/>
+              </a:rPr>
+              <a:t>Baselines</a:t>
+            </a:r>
+            <a:endParaRPr lang="en-US" altLang="zh-CN" sz="1600" b="1">
+              <a:solidFill>
+                <a:schemeClr val="bg2">
+                  <a:lumMod val="50000"/>
+                </a:schemeClr>
+              </a:solidFill>
+              <a:latin typeface="Times New Roman" panose="02020603050405020304" charset="0"/>
+              <a:cs typeface="Times New Roman" panose="02020603050405020304" charset="0"/>
+            </a:endParaRPr>
+          </a:p>
+        </p:txBody>
+      </p:sp>
+      <p:sp>
+        <p:nvSpPr>
+          <p:cNvPr id="107" name="文本框 106"/>
+          <p:cNvSpPr txBox="1"/>
+          <p:nvPr/>
+        </p:nvSpPr>
+        <p:spPr>
+          <a:xfrm>
+            <a:off x="3047365" y="2125345"/>
+            <a:ext cx="426085" cy="306705"/>
+          </a:xfrm>
+          <a:prstGeom prst="rect">
+            <a:avLst/>
+          </a:prstGeom>
+          <a:noFill/>
+        </p:spPr>
+        <p:txBody>
+          <a:bodyPr wrap="square" rtlCol="0">
+            <a:spAutoFit/>
+          </a:bodyPr>
+          <a:p>
+            <a:r>
+              <a:rPr lang="en-US" altLang="zh-CN" sz="1400">
+                <a:solidFill>
+                  <a:schemeClr val="bg2">
+                    <a:lumMod val="50000"/>
+                  </a:schemeClr>
+                </a:solidFill>
+                <a:latin typeface="Times New Roman" panose="02020603050405020304" charset="0"/>
+                <a:cs typeface="Times New Roman" panose="02020603050405020304" charset="0"/>
+              </a:rPr>
+              <a:t>F1</a:t>
+            </a:r>
+            <a:endParaRPr lang="en-US" altLang="zh-CN" sz="1400">
+              <a:solidFill>
+                <a:schemeClr val="bg2">
+                  <a:lumMod val="50000"/>
+                </a:schemeClr>
+              </a:solidFill>
+              <a:latin typeface="Times New Roman" panose="02020603050405020304" charset="0"/>
+              <a:cs typeface="Times New Roman" panose="02020603050405020304" charset="0"/>
+            </a:endParaRPr>
+          </a:p>
+        </p:txBody>
+      </p:sp>
+    </p:spTree>
+    <p:custDataLst>
+      <p:tags r:id="rId1"/>
     </p:custDataLst>
   </p:cSld>
   <p:clrMapOvr>
@@ -7503,6 +9265,14 @@
 </p:tagLst>
 </file>
 
+<file path=ppt/tags/tag64.xml><?xml version="1.0" encoding="utf-8"?>
+<p:tagLst xmlns:p="http://schemas.openxmlformats.org/presentationml/2006/main">
+  <p:tag name="KSO_WM_BEAUTIFY_FLAG" val="#wm#"/>
+  <p:tag name="KSO_WM_TEMPLATE_CATEGORY" val="custom"/>
+  <p:tag name="KSO_WM_TEMPLATE_INDEX" val="20205081"/>
+</p:tagLst>
+</file>
+
 <file path=ppt/tags/tag7.xml><?xml version="1.0" encoding="utf-8"?>
 <p:tagLst xmlns:p="http://schemas.openxmlformats.org/presentationml/2006/main">
   <p:tag name="KSO_WM_UNIT_HIGHLIGHT" val="0"/>
